--- a/docs/draft_new_modules/01_getting_started/01_getting_started_lecture.pptx
+++ b/docs/draft_new_modules/01_getting_started/01_getting_started_lecture.pptx
@@ -31,16 +31,6 @@
     <p:sldId id="279" r:id="rId25"/>
     <p:sldId id="280" r:id="rId26"/>
     <p:sldId id="281" r:id="rId27"/>
-    <p:sldId id="282" r:id="rId28"/>
-    <p:sldId id="283" r:id="rId29"/>
-    <p:sldId id="284" r:id="rId30"/>
-    <p:sldId id="285" r:id="rId31"/>
-    <p:sldId id="286" r:id="rId32"/>
-    <p:sldId id="287" r:id="rId33"/>
-    <p:sldId id="288" r:id="rId34"/>
-    <p:sldId id="289" r:id="rId35"/>
-    <p:sldId id="290" r:id="rId36"/>
-    <p:sldId id="291" r:id="rId37"/>
   </p:sldIdLst>
   <p:sldSz cx="9144000" cy="5143500" type="screen16x9"/>
   <p:notesSz cx="6858000" cy="9144000"/>
@@ -3215,53 +3205,130 @@
       </p:grpSpPr>
       <p:sp>
         <p:nvSpPr>
-          <p:cNvPr id="2" name="Title 1"/>
-          <p:cNvSpPr>
-            <a:spLocks noGrp="1"/>
-          </p:cNvSpPr>
-          <p:nvPr>
-            <p:ph type="title"/>
-          </p:nvPr>
-        </p:nvSpPr>
-        <p:spPr/>
-        <p:txBody>
-          <a:bodyPr/>
-          <a:lstStyle/>
-          <a:p>
-            <a:pPr lvl="0" indent="0" marL="0">
-              <a:buNone/>
-            </a:pPr>
-            <a:r>
-              <a:rPr/>
-              <a:t>Part 2 · Organizing Your Project</a:t>
-            </a:r>
-          </a:p>
-        </p:txBody>
-      </p:sp>
-      <p:sp>
-        <p:nvSpPr>
           <p:cNvPr id="3" name="Content Placeholder 2"/>
           <p:cNvSpPr>
             <a:spLocks noGrp="1"/>
           </p:cNvSpPr>
           <p:nvPr>
-            <p:ph idx="1"/>
-          </p:nvPr>
-        </p:nvSpPr>
-        <p:spPr/>
-        <p:txBody>
-          <a:bodyPr/>
-          <a:lstStyle/>
-          <a:p>
-            <a:pPr lvl="0" indent="0" marL="0">
-              <a:spcBef>
-                <a:spcPts val="3000"/>
-              </a:spcBef>
-              <a:buNone/>
-            </a:pPr>
+            <p:ph idx="1" sz="half"/>
+          </p:nvPr>
+        </p:nvSpPr>
+        <p:spPr/>
+        <p:txBody>
+          <a:bodyPr/>
+          <a:lstStyle/>
+          <a:p>
+            <a:pPr lvl="0"/>
+            <a:r>
+              <a:rPr/>
+              <a:t>Decide your </a:t>
+            </a:r>
             <a:r>
               <a:rPr b="1"/>
-              <a:t>Data is the raw material — treat it that way</a:t>
+              <a:t>variable names and units before you collect anything</a:t>
+            </a:r>
+            <a:r>
+              <a:rPr/>
+              <a:t> — this is a </a:t>
+            </a:r>
+            <a:r>
+              <a:rPr b="1"/>
+              <a:t>controlled vocabulary</a:t>
+            </a:r>
+          </a:p>
+          <a:p>
+            <a:pPr lvl="0"/>
+            <a:r>
+              <a:rPr/>
+              <a:t>Example: </a:t>
+            </a:r>
+            <a:r>
+              <a:rPr>
+                <a:latin typeface="Courier"/>
+              </a:rPr>
+              <a:t>length_mm</a:t>
+            </a:r>
+            <a:r>
+              <a:rPr/>
+              <a:t>, not </a:t>
+            </a:r>
+            <a:r>
+              <a:rPr>
+                <a:latin typeface="Courier"/>
+              </a:rPr>
+              <a:t>Length (mm)</a:t>
+            </a:r>
+            <a:r>
+              <a:rPr/>
+              <a:t> — no spaces, no units hidden in the header text, all lowercase</a:t>
+            </a:r>
+          </a:p>
+          <a:p>
+            <a:pPr lvl="0"/>
+            <a:r>
+              <a:rPr/>
+              <a:t>Plan where data goes the moment you collect it — do not let it pile up in email or texts</a:t>
+            </a:r>
+          </a:p>
+          <a:p>
+            <a:pPr lvl="0" indent="0" marL="1270000">
+              <a:buNone/>
+            </a:pPr>
+            <a:r>
+              <a:rPr sz="2000" b="1"/>
+              <a:t>Note</a:t>
+            </a:r>
+          </a:p>
+          <a:p>
+            <a:pPr lvl="0" indent="0" marL="1270000">
+              <a:buNone/>
+            </a:pPr>
+            <a:r>
+              <a:rPr sz="2000" b="1"/>
+              <a:t>✅ Key idea</a:t>
+            </a:r>
+          </a:p>
+          <a:p>
+            <a:pPr lvl="0" indent="0" marL="1270000">
+              <a:buNone/>
+            </a:pPr>
+            <a:r>
+              <a:rPr sz="2000"/>
+              <a:t>A few minutes of naming discipline today saves hours of confusion in Module 2, when we clean messy data.</a:t>
+            </a:r>
+          </a:p>
+        </p:txBody>
+      </p:sp>
+      <p:sp>
+        <p:nvSpPr>
+          <p:cNvPr id="4" name="Content Placeholder 3"/>
+          <p:cNvSpPr>
+            <a:spLocks noGrp="1"/>
+          </p:cNvSpPr>
+          <p:nvPr>
+            <p:ph idx="2" sz="half"/>
+          </p:nvPr>
+        </p:nvSpPr>
+        <p:spPr/>
+        <p:txBody>
+          <a:bodyPr/>
+          <a:lstStyle/>
+          <a:p>
+            <a:pPr lvl="0" indent="0" marL="1270000">
+              <a:buNone/>
+            </a:pPr>
+            <a:r>
+              <a:rPr sz="2000" b="1"/>
+              <a:t>Tip</a:t>
+            </a:r>
+          </a:p>
+          <a:p>
+            <a:pPr lvl="0" indent="0" marL="1270000">
+              <a:buNone/>
+            </a:pPr>
+            <a:r>
+              <a:rPr sz="2000" b="1"/>
+              <a:t>Controlled vocabulary example</a:t>
             </a:r>
           </a:p>
         </p:txBody>
@@ -3290,6 +3357,31 @@
       </p:grpSpPr>
       <p:sp>
         <p:nvSpPr>
+          <p:cNvPr id="2" name="Title 1"/>
+          <p:cNvSpPr>
+            <a:spLocks noGrp="1"/>
+          </p:cNvSpPr>
+          <p:nvPr>
+            <p:ph type="title"/>
+          </p:nvPr>
+        </p:nvSpPr>
+        <p:spPr/>
+        <p:txBody>
+          <a:bodyPr/>
+          <a:lstStyle/>
+          <a:p>
+            <a:pPr lvl="0" indent="0" marL="0">
+              <a:buNone/>
+            </a:pPr>
+            <a:r>
+              <a:rPr/>
+              <a:t>One folder per project</a:t>
+            </a:r>
+          </a:p>
+        </p:txBody>
+      </p:sp>
+      <p:sp>
+        <p:nvSpPr>
           <p:cNvPr id="3" name="Content Placeholder 2"/>
           <p:cNvSpPr>
             <a:spLocks noGrp="1"/>
@@ -3303,56 +3395,53 @@
           <a:bodyPr/>
           <a:lstStyle/>
           <a:p>
+            <a:pPr lvl="0" indent="0">
+              <a:buNone/>
+            </a:pPr>
+            <a:r>
+              <a:rPr>
+                <a:latin typeface="Courier"/>
+              </a:rPr>
+              <a:t>pine_project/
+├── data/       ← raw files, never overwritten
+├── scripts/    ← your .R code
+└── figures/    ← plots you save</a:t>
+            </a:r>
+          </a:p>
+          <a:p>
             <a:pPr lvl="0"/>
             <a:r>
               <a:rPr/>
-              <a:t>Decide your </a:t>
+              <a:t>Open this folder as your workspace in Positron (</a:t>
             </a:r>
             <a:r>
               <a:rPr b="1"/>
-              <a:t>variable names and units before you collect anything</a:t>
-            </a:r>
-            <a:r>
-              <a:rPr/>
-              <a:t> — this is a </a:t>
+              <a:t>File → Open Folder…</a:t>
+            </a:r>
+            <a:r>
+              <a:rPr/>
+              <a:t>)</a:t>
+            </a:r>
+          </a:p>
+          <a:p>
+            <a:pPr lvl="0"/>
+            <a:r>
+              <a:rPr/>
+              <a:t>Every file path then becomes </a:t>
             </a:r>
             <a:r>
               <a:rPr b="1"/>
-              <a:t>controlled vocabulary</a:t>
-            </a:r>
-          </a:p>
-          <a:p>
-            <a:pPr lvl="0"/>
-            <a:r>
-              <a:rPr/>
-              <a:t>Example: </a:t>
-            </a:r>
-            <a:r>
-              <a:rPr>
-                <a:latin typeface="Courier"/>
-              </a:rPr>
-              <a:t>length_mm</a:t>
-            </a:r>
-            <a:r>
-              <a:rPr/>
-              <a:t>, not </a:t>
-            </a:r>
-            <a:r>
-              <a:rPr>
-                <a:latin typeface="Courier"/>
-              </a:rPr>
-              <a:t>Length (mm)</a:t>
-            </a:r>
-            <a:r>
-              <a:rPr/>
-              <a:t> — no spaces, no units hidden in the header text, all lowercase</a:t>
-            </a:r>
-          </a:p>
-          <a:p>
-            <a:pPr lvl="0"/>
-            <a:r>
-              <a:rPr/>
-              <a:t>Plan where data goes the moment you collect it — do not let it pile up in email or texts</a:t>
+              <a:t>relative</a:t>
+            </a:r>
+            <a:r>
+              <a:rPr/>
+              <a:t> — no more </a:t>
+            </a:r>
+            <a:r>
+              <a:rPr>
+                <a:latin typeface="Courier"/>
+              </a:rPr>
+              <a:t>C:/Users/.../Desktop/final_FINAL2.xlsx</a:t>
             </a:r>
           </a:p>
           <a:p>
@@ -3379,7 +3468,15 @@
             </a:pPr>
             <a:r>
               <a:rPr sz="2000"/>
-              <a:t>A few minutes of naming discipline today saves hours of confusion in Module 2, when we clean messy data.</a:t>
+              <a:t>Keep </a:t>
+            </a:r>
+            <a:r>
+              <a:rPr sz="2000" b="1"/>
+              <a:t>raw data untouched</a:t>
+            </a:r>
+            <a:r>
+              <a:rPr sz="2000"/>
+              <a:t>. R writes new, processed files — so you can always trace your steps back to the original numbers.</a:t>
             </a:r>
           </a:p>
         </p:txBody>
@@ -3404,7 +3501,7 @@
             </a:pPr>
             <a:r>
               <a:rPr sz="2000" b="1"/>
-              <a:t>Tip</a:t>
+              <a:t>Note</a:t>
             </a:r>
           </a:p>
           <a:p>
@@ -3413,7 +3510,28 @@
             </a:pPr>
             <a:r>
               <a:rPr sz="2000" b="1"/>
-              <a:t>Controlled vocabulary example</a:t>
+              <a:t>📖 New word</a:t>
+            </a:r>
+          </a:p>
+          <a:p>
+            <a:pPr lvl="0" indent="0" marL="1270000">
+              <a:buNone/>
+            </a:pPr>
+            <a:r>
+              <a:rPr sz="2000" b="1"/>
+              <a:t>Metadata</a:t>
+            </a:r>
+            <a:r>
+              <a:rPr sz="2000"/>
+              <a:t> = data </a:t>
+            </a:r>
+            <a:r>
+              <a:rPr sz="2000" i="1"/>
+              <a:t>about</a:t>
+            </a:r>
+            <a:r>
+              <a:rPr sz="2000"/>
+              <a:t> your data: who collected it, when, how, with what instrument. Without it, data are nearly useless — even to future-you.</a:t>
             </a:r>
           </a:p>
         </p:txBody>
@@ -3455,15 +3573,30 @@
           <a:bodyPr/>
           <a:lstStyle/>
           <a:p>
-            <a:pPr lvl="0" indent="0" marL="0">
-              <a:spcBef>
-                <a:spcPts val="3000"/>
-              </a:spcBef>
-              <a:buNone/>
-            </a:pPr>
-            <a:r>
-              <a:rPr b="1"/>
-              <a:t>One folder per project</a:t>
+            <a:pPr lvl="0" indent="0" marL="1270000">
+              <a:buNone/>
+            </a:pPr>
+            <a:r>
+              <a:rPr sz="2000" b="1"/>
+              <a:t>Tip</a:t>
+            </a:r>
+          </a:p>
+          <a:p>
+            <a:pPr lvl="0" indent="0" marL="1270000">
+              <a:buNone/>
+            </a:pPr>
+            <a:r>
+              <a:rPr sz="2000" b="1"/>
+              <a:t>🖐 Preview</a:t>
+            </a:r>
+          </a:p>
+          <a:p>
+            <a:pPr lvl="0" indent="0" marL="1270000">
+              <a:buNone/>
+            </a:pPr>
+            <a:r>
+              <a:rPr sz="2000"/>
+              <a:t>Tidy data — one row per observation, one column per variable — is the target we’re organizing toward. We’ll formalize this in Module 2.</a:t>
             </a:r>
           </a:p>
         </p:txBody>
@@ -3492,156 +3625,53 @@
       </p:grpSpPr>
       <p:sp>
         <p:nvSpPr>
+          <p:cNvPr id="2" name="Title 1"/>
+          <p:cNvSpPr>
+            <a:spLocks noGrp="1"/>
+          </p:cNvSpPr>
+          <p:nvPr>
+            <p:ph type="title"/>
+          </p:nvPr>
+        </p:nvSpPr>
+        <p:spPr/>
+        <p:txBody>
+          <a:bodyPr/>
+          <a:lstStyle/>
+          <a:p>
+            <a:pPr lvl="0" indent="0" marL="0">
+              <a:buNone/>
+            </a:pPr>
+            <a:r>
+              <a:rPr/>
+              <a:t>Part 3 · Meet R and Positron</a:t>
+            </a:r>
+          </a:p>
+        </p:txBody>
+      </p:sp>
+      <p:sp>
+        <p:nvSpPr>
           <p:cNvPr id="3" name="Content Placeholder 2"/>
           <p:cNvSpPr>
             <a:spLocks noGrp="1"/>
           </p:cNvSpPr>
           <p:nvPr>
-            <p:ph idx="1" sz="half"/>
-          </p:nvPr>
-        </p:nvSpPr>
-        <p:spPr/>
-        <p:txBody>
-          <a:bodyPr/>
-          <a:lstStyle/>
-          <a:p>
-            <a:pPr lvl="0" indent="0">
-              <a:buNone/>
-            </a:pPr>
-            <a:r>
-              <a:rPr>
-                <a:latin typeface="Courier"/>
-              </a:rPr>
-              <a:t>pine_project/
-├── data/       ← raw files, never overwritten
-├── scripts/    ← your .R code
-└── figures/    ← plots you save</a:t>
-            </a:r>
-          </a:p>
-          <a:p>
-            <a:pPr lvl="0"/>
-            <a:r>
-              <a:rPr/>
-              <a:t>Open this folder as your workspace in Positron (</a:t>
-            </a:r>
+            <p:ph idx="1"/>
+          </p:nvPr>
+        </p:nvSpPr>
+        <p:spPr/>
+        <p:txBody>
+          <a:bodyPr/>
+          <a:lstStyle/>
+          <a:p>
+            <a:pPr lvl="0" indent="0" marL="0">
+              <a:spcBef>
+                <a:spcPts val="3000"/>
+              </a:spcBef>
+              <a:buNone/>
+            </a:pPr>
             <a:r>
               <a:rPr b="1"/>
-              <a:t>File → Open Folder…</a:t>
-            </a:r>
-            <a:r>
-              <a:rPr/>
-              <a:t>)</a:t>
-            </a:r>
-          </a:p>
-          <a:p>
-            <a:pPr lvl="0"/>
-            <a:r>
-              <a:rPr/>
-              <a:t>Every file path then becomes </a:t>
-            </a:r>
-            <a:r>
-              <a:rPr b="1"/>
-              <a:t>relative</a:t>
-            </a:r>
-            <a:r>
-              <a:rPr/>
-              <a:t> — no more </a:t>
-            </a:r>
-            <a:r>
-              <a:rPr>
-                <a:latin typeface="Courier"/>
-              </a:rPr>
-              <a:t>C:/Users/.../Desktop/final_FINAL2.xlsx</a:t>
-            </a:r>
-          </a:p>
-          <a:p>
-            <a:pPr lvl="0" indent="0" marL="1270000">
-              <a:buNone/>
-            </a:pPr>
-            <a:r>
-              <a:rPr sz="2000" b="1"/>
-              <a:t>Note</a:t>
-            </a:r>
-          </a:p>
-          <a:p>
-            <a:pPr lvl="0" indent="0" marL="1270000">
-              <a:buNone/>
-            </a:pPr>
-            <a:r>
-              <a:rPr sz="2000" b="1"/>
-              <a:t>✅ Key idea</a:t>
-            </a:r>
-          </a:p>
-          <a:p>
-            <a:pPr lvl="0" indent="0" marL="1270000">
-              <a:buNone/>
-            </a:pPr>
-            <a:r>
-              <a:rPr sz="2000"/>
-              <a:t>Keep </a:t>
-            </a:r>
-            <a:r>
-              <a:rPr sz="2000" b="1"/>
-              <a:t>raw data untouched</a:t>
-            </a:r>
-            <a:r>
-              <a:rPr sz="2000"/>
-              <a:t>. R writes new, processed files — so you can always trace your steps back to the original numbers.</a:t>
-            </a:r>
-          </a:p>
-        </p:txBody>
-      </p:sp>
-      <p:sp>
-        <p:nvSpPr>
-          <p:cNvPr id="4" name="Content Placeholder 3"/>
-          <p:cNvSpPr>
-            <a:spLocks noGrp="1"/>
-          </p:cNvSpPr>
-          <p:nvPr>
-            <p:ph idx="2" sz="half"/>
-          </p:nvPr>
-        </p:nvSpPr>
-        <p:spPr/>
-        <p:txBody>
-          <a:bodyPr/>
-          <a:lstStyle/>
-          <a:p>
-            <a:pPr lvl="0" indent="0" marL="1270000">
-              <a:buNone/>
-            </a:pPr>
-            <a:r>
-              <a:rPr sz="2000" b="1"/>
-              <a:t>Note</a:t>
-            </a:r>
-          </a:p>
-          <a:p>
-            <a:pPr lvl="0" indent="0" marL="1270000">
-              <a:buNone/>
-            </a:pPr>
-            <a:r>
-              <a:rPr sz="2000" b="1"/>
-              <a:t>📖 New word</a:t>
-            </a:r>
-          </a:p>
-          <a:p>
-            <a:pPr lvl="0" indent="0" marL="1270000">
-              <a:buNone/>
-            </a:pPr>
-            <a:r>
-              <a:rPr sz="2000" b="1"/>
-              <a:t>Metadata</a:t>
-            </a:r>
-            <a:r>
-              <a:rPr sz="2000"/>
-              <a:t> = data </a:t>
-            </a:r>
-            <a:r>
-              <a:rPr sz="2000" i="1"/>
-              <a:t>about</a:t>
-            </a:r>
-            <a:r>
-              <a:rPr sz="2000"/>
-              <a:t> your data: who collected it, when, how, with what instrument. Without it, data are nearly useless — even to future-you.</a:t>
+              <a:t>R is the engine, Positron is the dashboard</a:t>
             </a:r>
           </a:p>
         </p:txBody>
@@ -3652,146 +3682,6 @@
 </file>
 
 <file path=ppt/slides/slide14.xml><?xml version="1.0" encoding="utf-8"?>
-<p:sld xmlns:a="http://schemas.openxmlformats.org/drawingml/2006/main" xmlns:r="http://schemas.openxmlformats.org/officeDocument/2006/relationships" xmlns:p="http://schemas.openxmlformats.org/presentationml/2006/main">
-  <p:cSld>
-    <p:spTree>
-      <p:nvGrpSpPr>
-        <p:cNvPr id="1" name=""/>
-        <p:cNvGrpSpPr/>
-        <p:nvPr/>
-      </p:nvGrpSpPr>
-      <p:grpSpPr>
-        <a:xfrm>
-          <a:off x="0" y="0"/>
-          <a:ext cx="0" cy="0"/>
-          <a:chOff x="0" y="0"/>
-          <a:chExt cx="0" cy="0"/>
-        </a:xfrm>
-      </p:grpSpPr>
-      <p:sp>
-        <p:nvSpPr>
-          <p:cNvPr id="3" name="Content Placeholder 2"/>
-          <p:cNvSpPr>
-            <a:spLocks noGrp="1"/>
-          </p:cNvSpPr>
-          <p:nvPr>
-            <p:ph idx="1"/>
-          </p:nvPr>
-        </p:nvSpPr>
-        <p:spPr/>
-        <p:txBody>
-          <a:bodyPr/>
-          <a:lstStyle/>
-          <a:p>
-            <a:pPr lvl="0" indent="0" marL="1270000">
-              <a:buNone/>
-            </a:pPr>
-            <a:r>
-              <a:rPr sz="2000" b="1"/>
-              <a:t>Tip</a:t>
-            </a:r>
-          </a:p>
-          <a:p>
-            <a:pPr lvl="0" indent="0" marL="1270000">
-              <a:buNone/>
-            </a:pPr>
-            <a:r>
-              <a:rPr sz="2000" b="1"/>
-              <a:t>🖐 Preview</a:t>
-            </a:r>
-          </a:p>
-          <a:p>
-            <a:pPr lvl="0" indent="0" marL="1270000">
-              <a:buNone/>
-            </a:pPr>
-            <a:r>
-              <a:rPr sz="2000"/>
-              <a:t>Tidy data — one row per observation, one column per variable — is the target we’re organizing toward. We’ll formalize this in Module 2.</a:t>
-            </a:r>
-          </a:p>
-        </p:txBody>
-      </p:sp>
-    </p:spTree>
-  </p:cSld>
-</p:sld>
-</file>
-
-<file path=ppt/slides/slide15.xml><?xml version="1.0" encoding="utf-8"?>
-<p:sld xmlns:a="http://schemas.openxmlformats.org/drawingml/2006/main" xmlns:r="http://schemas.openxmlformats.org/officeDocument/2006/relationships" xmlns:p="http://schemas.openxmlformats.org/presentationml/2006/main">
-  <p:cSld>
-    <p:spTree>
-      <p:nvGrpSpPr>
-        <p:cNvPr id="1" name=""/>
-        <p:cNvGrpSpPr/>
-        <p:nvPr/>
-      </p:nvGrpSpPr>
-      <p:grpSpPr>
-        <a:xfrm>
-          <a:off x="0" y="0"/>
-          <a:ext cx="0" cy="0"/>
-          <a:chOff x="0" y="0"/>
-          <a:chExt cx="0" cy="0"/>
-        </a:xfrm>
-      </p:grpSpPr>
-      <p:sp>
-        <p:nvSpPr>
-          <p:cNvPr id="2" name="Title 1"/>
-          <p:cNvSpPr>
-            <a:spLocks noGrp="1"/>
-          </p:cNvSpPr>
-          <p:nvPr>
-            <p:ph type="title"/>
-          </p:nvPr>
-        </p:nvSpPr>
-        <p:spPr/>
-        <p:txBody>
-          <a:bodyPr/>
-          <a:lstStyle/>
-          <a:p>
-            <a:pPr lvl="0" indent="0" marL="0">
-              <a:buNone/>
-            </a:pPr>
-            <a:r>
-              <a:rPr/>
-              <a:t>Part 3 · Meet R and Positron</a:t>
-            </a:r>
-          </a:p>
-        </p:txBody>
-      </p:sp>
-      <p:sp>
-        <p:nvSpPr>
-          <p:cNvPr id="3" name="Content Placeholder 2"/>
-          <p:cNvSpPr>
-            <a:spLocks noGrp="1"/>
-          </p:cNvSpPr>
-          <p:nvPr>
-            <p:ph idx="1"/>
-          </p:nvPr>
-        </p:nvSpPr>
-        <p:spPr/>
-        <p:txBody>
-          <a:bodyPr/>
-          <a:lstStyle/>
-          <a:p>
-            <a:pPr lvl="0" indent="0" marL="0">
-              <a:spcBef>
-                <a:spcPts val="3000"/>
-              </a:spcBef>
-              <a:buNone/>
-            </a:pPr>
-            <a:r>
-              <a:rPr b="1"/>
-              <a:t>R is the engine, Positron is the dashboard</a:t>
-            </a:r>
-          </a:p>
-        </p:txBody>
-      </p:sp>
-    </p:spTree>
-  </p:cSld>
-</p:sld>
-</file>
-
-<file path=ppt/slides/slide16.xml><?xml version="1.0" encoding="utf-8"?>
 <p:sld xmlns:a="http://schemas.openxmlformats.org/drawingml/2006/main" xmlns:r="http://schemas.openxmlformats.org/officeDocument/2006/relationships" xmlns:p="http://schemas.openxmlformats.org/presentationml/2006/main">
   <p:cSld>
     <p:spTree>
@@ -4172,6 +4062,926 @@
 </p:sld>
 </file>
 
+<file path=ppt/slides/slide15.xml><?xml version="1.0" encoding="utf-8"?>
+<p:sld xmlns:a="http://schemas.openxmlformats.org/drawingml/2006/main" xmlns:r="http://schemas.openxmlformats.org/officeDocument/2006/relationships" xmlns:p="http://schemas.openxmlformats.org/presentationml/2006/main">
+  <p:cSld>
+    <p:spTree>
+      <p:nvGrpSpPr>
+        <p:cNvPr id="1" name=""/>
+        <p:cNvGrpSpPr/>
+        <p:nvPr/>
+      </p:nvGrpSpPr>
+      <p:grpSpPr>
+        <a:xfrm>
+          <a:off x="0" y="0"/>
+          <a:ext cx="0" cy="0"/>
+          <a:chOff x="0" y="0"/>
+          <a:chExt cx="0" cy="0"/>
+        </a:xfrm>
+      </p:grpSpPr>
+      <p:sp>
+        <p:nvSpPr>
+          <p:cNvPr id="2" name="Title 1"/>
+          <p:cNvSpPr>
+            <a:spLocks noGrp="1"/>
+          </p:cNvSpPr>
+          <p:nvPr>
+            <p:ph type="title"/>
+          </p:nvPr>
+        </p:nvSpPr>
+        <p:spPr/>
+        <p:txBody>
+          <a:bodyPr/>
+          <a:lstStyle/>
+          <a:p>
+            <a:pPr lvl="0" indent="0" marL="0">
+              <a:buNone/>
+            </a:pPr>
+            <a:r>
+              <a:rPr/>
+              <a:t>R as a calculator, and storing values</a:t>
+            </a:r>
+          </a:p>
+        </p:txBody>
+      </p:sp>
+      <p:sp>
+        <p:nvSpPr>
+          <p:cNvPr id="3" name="Content Placeholder 2"/>
+          <p:cNvSpPr>
+            <a:spLocks noGrp="1"/>
+          </p:cNvSpPr>
+          <p:nvPr>
+            <p:ph idx="1" sz="half"/>
+          </p:nvPr>
+        </p:nvSpPr>
+        <p:spPr/>
+        <p:txBody>
+          <a:bodyPr/>
+          <a:lstStyle/>
+          <a:p>
+            <a:pPr lvl="0" indent="0" marL="0">
+              <a:buNone/>
+            </a:pPr>
+            <a:r>
+              <a:rPr/>
+              <a:t>Type math into the </a:t>
+            </a:r>
+            <a:r>
+              <a:rPr b="1"/>
+              <a:t>console</a:t>
+            </a:r>
+            <a:r>
+              <a:rPr/>
+              <a:t> and press Enter. To keep a value, give it a name with the </a:t>
+            </a:r>
+            <a:r>
+              <a:rPr b="1"/>
+              <a:t>assignment operator</a:t>
+            </a:r>
+            <a:r>
+              <a:rPr/>
+              <a:t> </a:t>
+            </a:r>
+            <a:r>
+              <a:rPr>
+                <a:latin typeface="Courier"/>
+              </a:rPr>
+              <a:t>&lt;-</a:t>
+            </a:r>
+            <a:r>
+              <a:rPr/>
+              <a:t>:</a:t>
+            </a:r>
+          </a:p>
+          <a:p>
+            <a:pPr lvl="0" indent="0">
+              <a:buNone/>
+            </a:pPr>
+            <a:r>
+              <a:rPr>
+                <a:solidFill>
+                  <a:srgbClr val="AD0000"/>
+                </a:solidFill>
+                <a:latin typeface="Courier"/>
+              </a:rPr>
+              <a:t>3</a:t>
+            </a:r>
+            <a:r>
+              <a:rPr>
+                <a:solidFill>
+                  <a:srgbClr val="003B4F"/>
+                </a:solidFill>
+                <a:latin typeface="Courier"/>
+              </a:rPr>
+              <a:t> </a:t>
+            </a:r>
+            <a:r>
+              <a:rPr>
+                <a:solidFill>
+                  <a:srgbClr val="5E5E5E"/>
+                </a:solidFill>
+                <a:latin typeface="Courier"/>
+              </a:rPr>
+              <a:t>+</a:t>
+            </a:r>
+            <a:r>
+              <a:rPr>
+                <a:solidFill>
+                  <a:srgbClr val="003B4F"/>
+                </a:solidFill>
+                <a:latin typeface="Courier"/>
+              </a:rPr>
+              <a:t> </a:t>
+            </a:r>
+            <a:r>
+              <a:rPr>
+                <a:solidFill>
+                  <a:srgbClr val="AD0000"/>
+                </a:solidFill>
+                <a:latin typeface="Courier"/>
+              </a:rPr>
+              <a:t>5</a:t>
+            </a:r>
+            <a:br/>
+            <a:r>
+              <a:rPr>
+                <a:solidFill>
+                  <a:srgbClr val="AD0000"/>
+                </a:solidFill>
+                <a:latin typeface="Courier"/>
+              </a:rPr>
+              <a:t>12</a:t>
+            </a:r>
+            <a:r>
+              <a:rPr>
+                <a:solidFill>
+                  <a:srgbClr val="003B4F"/>
+                </a:solidFill>
+                <a:latin typeface="Courier"/>
+              </a:rPr>
+              <a:t> </a:t>
+            </a:r>
+            <a:r>
+              <a:rPr>
+                <a:solidFill>
+                  <a:srgbClr val="5E5E5E"/>
+                </a:solidFill>
+                <a:latin typeface="Courier"/>
+              </a:rPr>
+              <a:t>/</a:t>
+            </a:r>
+            <a:r>
+              <a:rPr>
+                <a:solidFill>
+                  <a:srgbClr val="003B4F"/>
+                </a:solidFill>
+                <a:latin typeface="Courier"/>
+              </a:rPr>
+              <a:t> </a:t>
+            </a:r>
+            <a:r>
+              <a:rPr>
+                <a:solidFill>
+                  <a:srgbClr val="AD0000"/>
+                </a:solidFill>
+                <a:latin typeface="Courier"/>
+              </a:rPr>
+              <a:t>7</a:t>
+            </a:r>
+            <a:br/>
+            <a:r>
+              <a:rPr>
+                <a:solidFill>
+                  <a:srgbClr val="AD0000"/>
+                </a:solidFill>
+                <a:latin typeface="Courier"/>
+              </a:rPr>
+              <a:t>2</a:t>
+            </a:r>
+            <a:r>
+              <a:rPr>
+                <a:solidFill>
+                  <a:srgbClr val="003B4F"/>
+                </a:solidFill>
+                <a:latin typeface="Courier"/>
+              </a:rPr>
+              <a:t> </a:t>
+            </a:r>
+            <a:r>
+              <a:rPr>
+                <a:solidFill>
+                  <a:srgbClr val="5E5E5E"/>
+                </a:solidFill>
+                <a:latin typeface="Courier"/>
+              </a:rPr>
+              <a:t>^</a:t>
+            </a:r>
+            <a:r>
+              <a:rPr>
+                <a:solidFill>
+                  <a:srgbClr val="003B4F"/>
+                </a:solidFill>
+                <a:latin typeface="Courier"/>
+              </a:rPr>
+              <a:t> </a:t>
+            </a:r>
+            <a:r>
+              <a:rPr>
+                <a:solidFill>
+                  <a:srgbClr val="AD0000"/>
+                </a:solidFill>
+                <a:latin typeface="Courier"/>
+              </a:rPr>
+              <a:t>10</a:t>
+            </a:r>
+            <a:br/>
+            <a:br/>
+            <a:r>
+              <a:rPr>
+                <a:solidFill>
+                  <a:srgbClr val="003B4F"/>
+                </a:solidFill>
+                <a:latin typeface="Courier"/>
+              </a:rPr>
+              <a:t>x &lt;- </a:t>
+            </a:r>
+            <a:r>
+              <a:rPr>
+                <a:solidFill>
+                  <a:srgbClr val="AD0000"/>
+                </a:solidFill>
+                <a:latin typeface="Courier"/>
+              </a:rPr>
+              <a:t>7</a:t>
+            </a:r>
+            <a:r>
+              <a:rPr>
+                <a:solidFill>
+                  <a:srgbClr val="003B4F"/>
+                </a:solidFill>
+                <a:latin typeface="Courier"/>
+              </a:rPr>
+              <a:t>      </a:t>
+            </a:r>
+            <a:r>
+              <a:rPr>
+                <a:solidFill>
+                  <a:srgbClr val="5E5E5E"/>
+                </a:solidFill>
+                <a:latin typeface="Courier"/>
+              </a:rPr>
+              <a:t># store 7 under the name x</a:t>
+            </a:r>
+            <a:br/>
+            <a:r>
+              <a:rPr>
+                <a:solidFill>
+                  <a:srgbClr val="003B4F"/>
+                </a:solidFill>
+                <a:latin typeface="Courier"/>
+              </a:rPr>
+              <a:t>x           </a:t>
+            </a:r>
+            <a:r>
+              <a:rPr>
+                <a:solidFill>
+                  <a:srgbClr val="5E5E5E"/>
+                </a:solidFill>
+                <a:latin typeface="Courier"/>
+              </a:rPr>
+              <a:t># read it back</a:t>
+            </a:r>
+            <a:br/>
+            <a:r>
+              <a:rPr>
+                <a:solidFill>
+                  <a:srgbClr val="003B4F"/>
+                </a:solidFill>
+                <a:latin typeface="Courier"/>
+              </a:rPr>
+              <a:t>x </a:t>
+            </a:r>
+            <a:r>
+              <a:rPr>
+                <a:solidFill>
+                  <a:srgbClr val="5E5E5E"/>
+                </a:solidFill>
+                <a:latin typeface="Courier"/>
+              </a:rPr>
+              <a:t>*</a:t>
+            </a:r>
+            <a:r>
+              <a:rPr>
+                <a:solidFill>
+                  <a:srgbClr val="003B4F"/>
+                </a:solidFill>
+                <a:latin typeface="Courier"/>
+              </a:rPr>
+              <a:t> </a:t>
+            </a:r>
+            <a:r>
+              <a:rPr>
+                <a:solidFill>
+                  <a:srgbClr val="AD0000"/>
+                </a:solidFill>
+                <a:latin typeface="Courier"/>
+              </a:rPr>
+              <a:t>2</a:t>
+            </a:r>
+            <a:r>
+              <a:rPr>
+                <a:solidFill>
+                  <a:srgbClr val="003B4F"/>
+                </a:solidFill>
+                <a:latin typeface="Courier"/>
+              </a:rPr>
+              <a:t>       </a:t>
+            </a:r>
+            <a:r>
+              <a:rPr>
+                <a:solidFill>
+                  <a:srgbClr val="5E5E5E"/>
+                </a:solidFill>
+                <a:latin typeface="Courier"/>
+              </a:rPr>
+              <a:t># use it in math</a:t>
+            </a:r>
+          </a:p>
+          <a:p>
+            <a:pPr lvl="0" indent="0" marL="1270000">
+              <a:buNone/>
+            </a:pPr>
+            <a:r>
+              <a:rPr sz="2000" b="1"/>
+              <a:t>Warning</a:t>
+            </a:r>
+          </a:p>
+          <a:p>
+            <a:pPr lvl="0" indent="0" marL="1270000">
+              <a:buNone/>
+            </a:pPr>
+            <a:r>
+              <a:rPr sz="2000" b="1"/>
+              <a:t>⚠️ Watch out!</a:t>
+            </a:r>
+          </a:p>
+          <a:p>
+            <a:pPr lvl="0" indent="0" marL="1270000">
+              <a:buNone/>
+            </a:pPr>
+            <a:r>
+              <a:rPr sz="2000"/>
+              <a:t>R is case-sensitive: </a:t>
+            </a:r>
+            <a:r>
+              <a:rPr sz="2000">
+                <a:latin typeface="Courier"/>
+              </a:rPr>
+              <a:t>x</a:t>
+            </a:r>
+            <a:r>
+              <a:rPr sz="2000"/>
+              <a:t> and </a:t>
+            </a:r>
+            <a:r>
+              <a:rPr sz="2000">
+                <a:latin typeface="Courier"/>
+              </a:rPr>
+              <a:t>X</a:t>
+            </a:r>
+            <a:r>
+              <a:rPr sz="2000"/>
+              <a:t> are different objects. Use </a:t>
+            </a:r>
+            <a:r>
+              <a:rPr sz="2000">
+                <a:latin typeface="Courier"/>
+              </a:rPr>
+              <a:t>&lt;-</a:t>
+            </a:r>
+            <a:r>
+              <a:rPr sz="2000"/>
+              <a:t>, not </a:t>
+            </a:r>
+            <a:r>
+              <a:rPr sz="2000">
+                <a:latin typeface="Courier"/>
+              </a:rPr>
+              <a:t>=</a:t>
+            </a:r>
+            <a:r>
+              <a:rPr sz="2000"/>
+              <a:t>, to assign.</a:t>
+            </a:r>
+          </a:p>
+        </p:txBody>
+      </p:sp>
+      <p:sp>
+        <p:nvSpPr>
+          <p:cNvPr id="4" name="Content Placeholder 3"/>
+          <p:cNvSpPr>
+            <a:spLocks noGrp="1"/>
+          </p:cNvSpPr>
+          <p:nvPr>
+            <p:ph idx="2" sz="half"/>
+          </p:nvPr>
+        </p:nvSpPr>
+        <p:spPr/>
+        <p:txBody>
+          <a:bodyPr/>
+          <a:lstStyle/>
+          <a:p>
+            <a:pPr lvl="0" indent="0" marL="1270000">
+              <a:buNone/>
+            </a:pPr>
+            <a:r>
+              <a:rPr sz="2000" b="1"/>
+              <a:t>Note</a:t>
+            </a:r>
+          </a:p>
+          <a:p>
+            <a:pPr lvl="0" indent="0" marL="1270000">
+              <a:buNone/>
+            </a:pPr>
+            <a:r>
+              <a:rPr sz="2000" b="1"/>
+              <a:t>📖 New word</a:t>
+            </a:r>
+          </a:p>
+          <a:p>
+            <a:pPr lvl="0" indent="0" marL="1270000">
+              <a:buNone/>
+            </a:pPr>
+            <a:r>
+              <a:rPr sz="2000" b="1"/>
+              <a:t>Object</a:t>
+            </a:r>
+            <a:r>
+              <a:rPr sz="2000"/>
+              <a:t> = a named container holding a value. Look for it appear in the </a:t>
+            </a:r>
+            <a:r>
+              <a:rPr sz="2000" b="1"/>
+              <a:t>Environment</a:t>
+            </a:r>
+            <a:r>
+              <a:rPr sz="2000"/>
+              <a:t> pane the moment you create it.</a:t>
+            </a:r>
+          </a:p>
+        </p:txBody>
+      </p:sp>
+    </p:spTree>
+  </p:cSld>
+</p:sld>
+</file>
+
+<file path=ppt/slides/slide16.xml><?xml version="1.0" encoding="utf-8"?>
+<p:sld xmlns:a="http://schemas.openxmlformats.org/drawingml/2006/main" xmlns:r="http://schemas.openxmlformats.org/officeDocument/2006/relationships" xmlns:p="http://schemas.openxmlformats.org/presentationml/2006/main">
+  <p:cSld>
+    <p:spTree>
+      <p:nvGrpSpPr>
+        <p:cNvPr id="1" name=""/>
+        <p:cNvGrpSpPr/>
+        <p:nvPr/>
+      </p:nvGrpSpPr>
+      <p:grpSpPr>
+        <a:xfrm>
+          <a:off x="0" y="0"/>
+          <a:ext cx="0" cy="0"/>
+          <a:chOff x="0" y="0"/>
+          <a:chExt cx="0" cy="0"/>
+        </a:xfrm>
+      </p:grpSpPr>
+      <p:sp>
+        <p:nvSpPr>
+          <p:cNvPr id="2" name="Title 1"/>
+          <p:cNvSpPr>
+            <a:spLocks noGrp="1"/>
+          </p:cNvSpPr>
+          <p:nvPr>
+            <p:ph type="title"/>
+          </p:nvPr>
+        </p:nvSpPr>
+        <p:spPr/>
+        <p:txBody>
+          <a:bodyPr/>
+          <a:lstStyle/>
+          <a:p>
+            <a:pPr lvl="0" indent="0" marL="0">
+              <a:buNone/>
+            </a:pPr>
+            <a:r>
+              <a:rPr/>
+              <a:t>Names, comments, and functions</a:t>
+            </a:r>
+          </a:p>
+        </p:txBody>
+      </p:sp>
+      <p:sp>
+        <p:nvSpPr>
+          <p:cNvPr id="3" name="Content Placeholder 2"/>
+          <p:cNvSpPr>
+            <a:spLocks noGrp="1"/>
+          </p:cNvSpPr>
+          <p:nvPr>
+            <p:ph idx="1" sz="half"/>
+          </p:nvPr>
+        </p:nvSpPr>
+        <p:spPr/>
+        <p:txBody>
+          <a:bodyPr/>
+          <a:lstStyle/>
+          <a:p>
+            <a:pPr lvl="0"/>
+            <a:r>
+              <a:rPr/>
+              <a:t>Use </a:t>
+            </a:r>
+            <a:r>
+              <a:rPr b="1">
+                <a:latin typeface="Courier"/>
+              </a:rPr>
+              <a:t>lower_snake_case</a:t>
+            </a:r>
+            <a:r>
+              <a:rPr/>
+              <a:t>: </a:t>
+            </a:r>
+            <a:r>
+              <a:rPr>
+                <a:latin typeface="Courier"/>
+              </a:rPr>
+              <a:t>needle_length</a:t>
+            </a:r>
+            <a:r>
+              <a:rPr/>
+              <a:t>, not </a:t>
+            </a:r>
+            <a:r>
+              <a:rPr>
+                <a:latin typeface="Courier"/>
+              </a:rPr>
+              <a:t>x2</a:t>
+            </a:r>
+            <a:r>
+              <a:rPr/>
+              <a:t> or </a:t>
+            </a:r>
+            <a:r>
+              <a:rPr>
+                <a:latin typeface="Courier"/>
+              </a:rPr>
+              <a:t>NeedleLength</a:t>
+            </a:r>
+          </a:p>
+          <a:p>
+            <a:pPr lvl="0"/>
+            <a:r>
+              <a:rPr/>
+              <a:t>Anything after </a:t>
+            </a:r>
+            <a:r>
+              <a:rPr>
+                <a:latin typeface="Courier"/>
+              </a:rPr>
+              <a:t>#</a:t>
+            </a:r>
+            <a:r>
+              <a:rPr/>
+              <a:t> is a </a:t>
+            </a:r>
+            <a:r>
+              <a:rPr b="1"/>
+              <a:t>comment</a:t>
+            </a:r>
+            <a:r>
+              <a:rPr/>
+              <a:t> — a note for humans, ignored by R</a:t>
+            </a:r>
+          </a:p>
+          <a:p>
+            <a:pPr lvl="0"/>
+            <a:r>
+              <a:rPr/>
+              <a:t>A </a:t>
+            </a:r>
+            <a:r>
+              <a:rPr b="1"/>
+              <a:t>function</a:t>
+            </a:r>
+            <a:r>
+              <a:rPr/>
+              <a:t> takes </a:t>
+            </a:r>
+            <a:r>
+              <a:rPr b="1"/>
+              <a:t>arguments</a:t>
+            </a:r>
+            <a:r>
+              <a:rPr/>
+              <a:t> in </a:t>
+            </a:r>
+            <a:r>
+              <a:rPr>
+                <a:latin typeface="Courier"/>
+              </a:rPr>
+              <a:t>()</a:t>
+            </a:r>
+            <a:r>
+              <a:rPr/>
+              <a:t> and returns a result. Stuck? Ask for help with </a:t>
+            </a:r>
+            <a:r>
+              <a:rPr>
+                <a:latin typeface="Courier"/>
+              </a:rPr>
+              <a:t>?mean</a:t>
+            </a:r>
+          </a:p>
+          <a:p>
+            <a:pPr lvl="0" indent="0">
+              <a:buNone/>
+            </a:pPr>
+            <a:r>
+              <a:rPr>
+                <a:solidFill>
+                  <a:srgbClr val="5E5E5E"/>
+                </a:solidFill>
+                <a:latin typeface="Courier"/>
+              </a:rPr>
+              <a:t># average of four needle lengths, in mm</a:t>
+            </a:r>
+            <a:br/>
+            <a:r>
+              <a:rPr>
+                <a:solidFill>
+                  <a:srgbClr val="003B4F"/>
+                </a:solidFill>
+                <a:latin typeface="Courier"/>
+              </a:rPr>
+              <a:t>needle_length &lt;- </a:t>
+            </a:r>
+            <a:r>
+              <a:rPr>
+                <a:solidFill>
+                  <a:srgbClr val="4758AB"/>
+                </a:solidFill>
+                <a:latin typeface="Courier"/>
+              </a:rPr>
+              <a:t>c</a:t>
+            </a:r>
+            <a:r>
+              <a:rPr>
+                <a:solidFill>
+                  <a:srgbClr val="003B4F"/>
+                </a:solidFill>
+                <a:latin typeface="Courier"/>
+              </a:rPr>
+              <a:t>(</a:t>
+            </a:r>
+            <a:r>
+              <a:rPr>
+                <a:solidFill>
+                  <a:srgbClr val="AD0000"/>
+                </a:solidFill>
+                <a:latin typeface="Courier"/>
+              </a:rPr>
+              <a:t>20</a:t>
+            </a:r>
+            <a:r>
+              <a:rPr>
+                <a:solidFill>
+                  <a:srgbClr val="003B4F"/>
+                </a:solidFill>
+                <a:latin typeface="Courier"/>
+              </a:rPr>
+              <a:t>, </a:t>
+            </a:r>
+            <a:r>
+              <a:rPr>
+                <a:solidFill>
+                  <a:srgbClr val="AD0000"/>
+                </a:solidFill>
+                <a:latin typeface="Courier"/>
+              </a:rPr>
+              <a:t>21</a:t>
+            </a:r>
+            <a:r>
+              <a:rPr>
+                <a:solidFill>
+                  <a:srgbClr val="003B4F"/>
+                </a:solidFill>
+                <a:latin typeface="Courier"/>
+              </a:rPr>
+              <a:t>, </a:t>
+            </a:r>
+            <a:r>
+              <a:rPr>
+                <a:solidFill>
+                  <a:srgbClr val="AD0000"/>
+                </a:solidFill>
+                <a:latin typeface="Courier"/>
+              </a:rPr>
+              <a:t>23</a:t>
+            </a:r>
+            <a:r>
+              <a:rPr>
+                <a:solidFill>
+                  <a:srgbClr val="003B4F"/>
+                </a:solidFill>
+                <a:latin typeface="Courier"/>
+              </a:rPr>
+              <a:t>, </a:t>
+            </a:r>
+            <a:r>
+              <a:rPr>
+                <a:solidFill>
+                  <a:srgbClr val="AD0000"/>
+                </a:solidFill>
+                <a:latin typeface="Courier"/>
+              </a:rPr>
+              <a:t>25</a:t>
+            </a:r>
+            <a:r>
+              <a:rPr>
+                <a:solidFill>
+                  <a:srgbClr val="003B4F"/>
+                </a:solidFill>
+                <a:latin typeface="Courier"/>
+              </a:rPr>
+              <a:t>)</a:t>
+            </a:r>
+            <a:br/>
+            <a:r>
+              <a:rPr>
+                <a:solidFill>
+                  <a:srgbClr val="4758AB"/>
+                </a:solidFill>
+                <a:latin typeface="Courier"/>
+              </a:rPr>
+              <a:t>mean</a:t>
+            </a:r>
+            <a:r>
+              <a:rPr>
+                <a:solidFill>
+                  <a:srgbClr val="003B4F"/>
+                </a:solidFill>
+                <a:latin typeface="Courier"/>
+              </a:rPr>
+              <a:t>(needle_length)     </a:t>
+            </a:r>
+            <a:r>
+              <a:rPr>
+                <a:solidFill>
+                  <a:srgbClr val="5E5E5E"/>
+                </a:solidFill>
+                <a:latin typeface="Courier"/>
+              </a:rPr>
+              <a:t># a function call</a:t>
+            </a:r>
+            <a:br/>
+            <a:br/>
+            <a:r>
+              <a:rPr>
+                <a:solidFill>
+                  <a:srgbClr val="003B4F"/>
+                </a:solidFill>
+                <a:latin typeface="Courier"/>
+              </a:rPr>
+              <a:t>?mean</a:t>
+            </a:r>
+            <a:br/>
+            <a:r>
+              <a:rPr>
+                <a:solidFill>
+                  <a:srgbClr val="4758AB"/>
+                </a:solidFill>
+                <a:latin typeface="Courier"/>
+              </a:rPr>
+              <a:t>args</a:t>
+            </a:r>
+            <a:r>
+              <a:rPr>
+                <a:solidFill>
+                  <a:srgbClr val="003B4F"/>
+                </a:solidFill>
+                <a:latin typeface="Courier"/>
+              </a:rPr>
+              <a:t>(mean)</a:t>
+            </a:r>
+          </a:p>
+          <a:p>
+            <a:pPr lvl="0" indent="0" marL="1270000">
+              <a:buNone/>
+            </a:pPr>
+            <a:r>
+              <a:rPr sz="2000" b="1"/>
+              <a:t>Tip</a:t>
+            </a:r>
+          </a:p>
+          <a:p>
+            <a:pPr lvl="0" indent="0" marL="1270000">
+              <a:buNone/>
+            </a:pPr>
+            <a:r>
+              <a:rPr sz="2000" b="1"/>
+              <a:t>🖐 Try it yourself</a:t>
+            </a:r>
+          </a:p>
+          <a:p>
+            <a:pPr lvl="0" indent="0" marL="1270000">
+              <a:buNone/>
+            </a:pPr>
+            <a:r>
+              <a:rPr sz="2000"/>
+              <a:t>Predict what </a:t>
+            </a:r>
+            <a:r>
+              <a:rPr sz="2000">
+                <a:latin typeface="Courier"/>
+              </a:rPr>
+              <a:t>round(3.14159, 2)</a:t>
+            </a:r>
+            <a:r>
+              <a:rPr sz="2000"/>
+              <a:t> returns before you run it.</a:t>
+            </a:r>
+          </a:p>
+        </p:txBody>
+      </p:sp>
+      <p:sp>
+        <p:nvSpPr>
+          <p:cNvPr id="4" name="Content Placeholder 3"/>
+          <p:cNvSpPr>
+            <a:spLocks noGrp="1"/>
+          </p:cNvSpPr>
+          <p:nvPr>
+            <p:ph idx="2" sz="half"/>
+          </p:nvPr>
+        </p:nvSpPr>
+        <p:spPr/>
+        <p:txBody>
+          <a:bodyPr/>
+          <a:lstStyle/>
+          <a:p>
+            <a:pPr lvl="0" indent="0" marL="1270000">
+              <a:buNone/>
+            </a:pPr>
+            <a:r>
+              <a:rPr sz="2000" b="1"/>
+              <a:t>Note</a:t>
+            </a:r>
+          </a:p>
+          <a:p>
+            <a:pPr lvl="0" indent="0" marL="1270000">
+              <a:buNone/>
+            </a:pPr>
+            <a:r>
+              <a:rPr sz="2000" b="1"/>
+              <a:t>📖 New words</a:t>
+            </a:r>
+          </a:p>
+          <a:p>
+            <a:pPr lvl="0"/>
+            <a:r>
+              <a:rPr sz="2000" b="1"/>
+              <a:t>Comment</a:t>
+            </a:r>
+            <a:r>
+              <a:rPr sz="2000"/>
+              <a:t> — ignored by R, read by humans</a:t>
+            </a:r>
+          </a:p>
+          <a:p>
+            <a:pPr lvl="0"/>
+            <a:r>
+              <a:rPr sz="2000" b="1"/>
+              <a:t>Argument</a:t>
+            </a:r>
+            <a:r>
+              <a:rPr sz="2000"/>
+              <a:t> — an input handed to a function</a:t>
+            </a:r>
+          </a:p>
+          <a:p>
+            <a:pPr lvl="0"/>
+            <a:r>
+              <a:rPr sz="2000" b="1"/>
+              <a:t>Function</a:t>
+            </a:r>
+            <a:r>
+              <a:rPr sz="2000"/>
+              <a:t> — a named, reusable operation</a:t>
+            </a:r>
+          </a:p>
+        </p:txBody>
+      </p:sp>
+    </p:spTree>
+  </p:cSld>
+</p:sld>
+</file>
+
 <file path=ppt/slides/slide17.xml><?xml version="1.0" encoding="utf-8"?>
 <p:sld xmlns:a="http://schemas.openxmlformats.org/drawingml/2006/main" xmlns:r="http://schemas.openxmlformats.org/officeDocument/2006/relationships" xmlns:p="http://schemas.openxmlformats.org/presentationml/2006/main">
   <p:cSld>
@@ -4191,12 +5001,37 @@
       </p:grpSpPr>
       <p:sp>
         <p:nvSpPr>
+          <p:cNvPr id="2" name="Title 1"/>
+          <p:cNvSpPr>
+            <a:spLocks noGrp="1"/>
+          </p:cNvSpPr>
+          <p:nvPr>
+            <p:ph type="title"/>
+          </p:nvPr>
+        </p:nvSpPr>
+        <p:spPr/>
+        <p:txBody>
+          <a:bodyPr/>
+          <a:lstStyle/>
+          <a:p>
+            <a:pPr lvl="0" indent="0" marL="0">
+              <a:buNone/>
+            </a:pPr>
+            <a:r>
+              <a:rPr/>
+              <a:t>Vectors, data types, and scripts</a:t>
+            </a:r>
+          </a:p>
+        </p:txBody>
+      </p:sp>
+      <p:sp>
+        <p:nvSpPr>
           <p:cNvPr id="3" name="Content Placeholder 2"/>
           <p:cNvSpPr>
             <a:spLocks noGrp="1"/>
           </p:cNvSpPr>
           <p:nvPr>
-            <p:ph idx="1"/>
+            <p:ph idx="1" sz="half"/>
           </p:nvPr>
         </p:nvSpPr>
         <p:spPr/>
@@ -4205,14 +5040,341 @@
           <a:lstStyle/>
           <a:p>
             <a:pPr lvl="0" indent="0" marL="0">
-              <a:spcBef>
-                <a:spcPts val="3000"/>
-              </a:spcBef>
-              <a:buNone/>
-            </a:pPr>
+              <a:buNone/>
+            </a:pPr>
+            <a:r>
+              <a:rPr/>
+              <a:t>A </a:t>
+            </a:r>
             <a:r>
               <a:rPr b="1"/>
-              <a:t>R as a calculator, and storing values</a:t>
+              <a:t>vector</a:t>
+            </a:r>
+            <a:r>
+              <a:rPr/>
+              <a:t> is a row of values made with </a:t>
+            </a:r>
+            <a:r>
+              <a:rPr>
+                <a:latin typeface="Courier"/>
+              </a:rPr>
+              <a:t>c()</a:t>
+            </a:r>
+            <a:r>
+              <a:rPr/>
+              <a:t> — a spreadsheet column is really just a vector:</a:t>
+            </a:r>
+          </a:p>
+          <a:p>
+            <a:pPr lvl="0" indent="0">
+              <a:buNone/>
+            </a:pPr>
+            <a:r>
+              <a:rPr>
+                <a:solidFill>
+                  <a:srgbClr val="003B4F"/>
+                </a:solidFill>
+                <a:latin typeface="Courier"/>
+              </a:rPr>
+              <a:t>length_mm &lt;- </a:t>
+            </a:r>
+            <a:r>
+              <a:rPr>
+                <a:solidFill>
+                  <a:srgbClr val="4758AB"/>
+                </a:solidFill>
+                <a:latin typeface="Courier"/>
+              </a:rPr>
+              <a:t>c</a:t>
+            </a:r>
+            <a:r>
+              <a:rPr>
+                <a:solidFill>
+                  <a:srgbClr val="003B4F"/>
+                </a:solidFill>
+                <a:latin typeface="Courier"/>
+              </a:rPr>
+              <a:t>(</a:t>
+            </a:r>
+            <a:r>
+              <a:rPr>
+                <a:solidFill>
+                  <a:srgbClr val="AD0000"/>
+                </a:solidFill>
+                <a:latin typeface="Courier"/>
+              </a:rPr>
+              <a:t>20</a:t>
+            </a:r>
+            <a:r>
+              <a:rPr>
+                <a:solidFill>
+                  <a:srgbClr val="003B4F"/>
+                </a:solidFill>
+                <a:latin typeface="Courier"/>
+              </a:rPr>
+              <a:t>, </a:t>
+            </a:r>
+            <a:r>
+              <a:rPr>
+                <a:solidFill>
+                  <a:srgbClr val="AD0000"/>
+                </a:solidFill>
+                <a:latin typeface="Courier"/>
+              </a:rPr>
+              <a:t>21</a:t>
+            </a:r>
+            <a:r>
+              <a:rPr>
+                <a:solidFill>
+                  <a:srgbClr val="003B4F"/>
+                </a:solidFill>
+                <a:latin typeface="Courier"/>
+              </a:rPr>
+              <a:t>, </a:t>
+            </a:r>
+            <a:r>
+              <a:rPr>
+                <a:solidFill>
+                  <a:srgbClr val="AD0000"/>
+                </a:solidFill>
+                <a:latin typeface="Courier"/>
+              </a:rPr>
+              <a:t>23</a:t>
+            </a:r>
+            <a:r>
+              <a:rPr>
+                <a:solidFill>
+                  <a:srgbClr val="003B4F"/>
+                </a:solidFill>
+                <a:latin typeface="Courier"/>
+              </a:rPr>
+              <a:t>, </a:t>
+            </a:r>
+            <a:r>
+              <a:rPr>
+                <a:solidFill>
+                  <a:srgbClr val="AD0000"/>
+                </a:solidFill>
+                <a:latin typeface="Courier"/>
+              </a:rPr>
+              <a:t>25</a:t>
+            </a:r>
+            <a:r>
+              <a:rPr>
+                <a:solidFill>
+                  <a:srgbClr val="003B4F"/>
+                </a:solidFill>
+                <a:latin typeface="Courier"/>
+              </a:rPr>
+              <a:t>)      </a:t>
+            </a:r>
+            <a:r>
+              <a:rPr>
+                <a:solidFill>
+                  <a:srgbClr val="5E5E5E"/>
+                </a:solidFill>
+                <a:latin typeface="Courier"/>
+              </a:rPr>
+              <a:t># numeric</a:t>
+            </a:r>
+            <a:br/>
+            <a:r>
+              <a:rPr>
+                <a:solidFill>
+                  <a:srgbClr val="003B4F"/>
+                </a:solidFill>
+                <a:latin typeface="Courier"/>
+              </a:rPr>
+              <a:t>side      &lt;- </a:t>
+            </a:r>
+            <a:r>
+              <a:rPr>
+                <a:solidFill>
+                  <a:srgbClr val="4758AB"/>
+                </a:solidFill>
+                <a:latin typeface="Courier"/>
+              </a:rPr>
+              <a:t>c</a:t>
+            </a:r>
+            <a:r>
+              <a:rPr>
+                <a:solidFill>
+                  <a:srgbClr val="003B4F"/>
+                </a:solidFill>
+                <a:latin typeface="Courier"/>
+              </a:rPr>
+              <a:t>(</a:t>
+            </a:r>
+            <a:r>
+              <a:rPr>
+                <a:solidFill>
+                  <a:srgbClr val="20794D"/>
+                </a:solidFill>
+                <a:latin typeface="Courier"/>
+              </a:rPr>
+              <a:t>"n"</a:t>
+            </a:r>
+            <a:r>
+              <a:rPr>
+                <a:solidFill>
+                  <a:srgbClr val="003B4F"/>
+                </a:solidFill>
+                <a:latin typeface="Courier"/>
+              </a:rPr>
+              <a:t>, </a:t>
+            </a:r>
+            <a:r>
+              <a:rPr>
+                <a:solidFill>
+                  <a:srgbClr val="20794D"/>
+                </a:solidFill>
+                <a:latin typeface="Courier"/>
+              </a:rPr>
+              <a:t>"s"</a:t>
+            </a:r>
+            <a:r>
+              <a:rPr>
+                <a:solidFill>
+                  <a:srgbClr val="003B4F"/>
+                </a:solidFill>
+                <a:latin typeface="Courier"/>
+              </a:rPr>
+              <a:t>)            </a:t>
+            </a:r>
+            <a:r>
+              <a:rPr>
+                <a:solidFill>
+                  <a:srgbClr val="5E5E5E"/>
+                </a:solidFill>
+                <a:latin typeface="Courier"/>
+              </a:rPr>
+              <a:t># character — needs quotes</a:t>
+            </a:r>
+          </a:p>
+          <a:p>
+            <a:pPr lvl="0" indent="0" marL="0">
+              <a:buNone/>
+            </a:pPr>
+            <a:r>
+              <a:rPr/>
+              <a:t>The </a:t>
+            </a:r>
+            <a:r>
+              <a:rPr b="1"/>
+              <a:t>console forgets</a:t>
+            </a:r>
+            <a:r>
+              <a:rPr/>
+              <a:t>. A </a:t>
+            </a:r>
+            <a:r>
+              <a:rPr b="1"/>
+              <a:t>script</a:t>
+            </a:r>
+            <a:r>
+              <a:rPr/>
+              <a:t> (</a:t>
+            </a:r>
+            <a:r>
+              <a:rPr>
+                <a:latin typeface="Courier"/>
+              </a:rPr>
+              <a:t>.R</a:t>
+            </a:r>
+            <a:r>
+              <a:rPr/>
+              <a:t> file) remembers:</a:t>
+            </a:r>
+          </a:p>
+          <a:p>
+            <a:pPr lvl="0"/>
+            <a:r>
+              <a:rPr b="1"/>
+              <a:t>File → New File → R File</a:t>
+            </a:r>
+            <a:r>
+              <a:rPr/>
+              <a:t>, save it, run lines with Ctrl/Cmd+Enter</a:t>
+            </a:r>
+          </a:p>
+          <a:p>
+            <a:pPr lvl="0" indent="0" marL="1270000">
+              <a:buNone/>
+            </a:pPr>
+            <a:r>
+              <a:rPr sz="2000" b="1"/>
+              <a:t>Warning</a:t>
+            </a:r>
+          </a:p>
+          <a:p>
+            <a:pPr lvl="0" indent="0" marL="1270000">
+              <a:buNone/>
+            </a:pPr>
+            <a:r>
+              <a:rPr sz="2000" b="1"/>
+              <a:t>⚠️ Watch out!</a:t>
+            </a:r>
+          </a:p>
+          <a:p>
+            <a:pPr lvl="0" indent="0" marL="1270000">
+              <a:buNone/>
+            </a:pPr>
+            <a:r>
+              <a:rPr sz="2000"/>
+              <a:t>Without quotes, </a:t>
+            </a:r>
+            <a:r>
+              <a:rPr sz="2000">
+                <a:latin typeface="Courier"/>
+              </a:rPr>
+              <a:t>s</a:t>
+            </a:r>
+            <a:r>
+              <a:rPr sz="2000"/>
+              <a:t> means “find an object called s,” not the text “s.” R will error if no such object exists.</a:t>
+            </a:r>
+          </a:p>
+        </p:txBody>
+      </p:sp>
+      <p:sp>
+        <p:nvSpPr>
+          <p:cNvPr id="4" name="Content Placeholder 3"/>
+          <p:cNvSpPr>
+            <a:spLocks noGrp="1"/>
+          </p:cNvSpPr>
+          <p:nvPr>
+            <p:ph idx="2" sz="half"/>
+          </p:nvPr>
+        </p:nvSpPr>
+        <p:spPr/>
+        <p:txBody>
+          <a:bodyPr/>
+          <a:lstStyle/>
+          <a:p>
+            <a:pPr lvl="0" indent="0" marL="1270000">
+              <a:buNone/>
+            </a:pPr>
+            <a:r>
+              <a:rPr sz="2000" b="1"/>
+              <a:t>Note</a:t>
+            </a:r>
+          </a:p>
+          <a:p>
+            <a:pPr lvl="0" indent="0" marL="1270000">
+              <a:buNone/>
+            </a:pPr>
+            <a:r>
+              <a:rPr sz="2000" b="1"/>
+              <a:t>✅ Key idea</a:t>
+            </a:r>
+          </a:p>
+          <a:p>
+            <a:pPr lvl="0" indent="0" marL="1270000">
+              <a:buNone/>
+            </a:pPr>
+            <a:r>
+              <a:rPr sz="2000"/>
+              <a:t>Console = scratch paper. Script = the lab notebook you keep and rerun.</a:t>
             </a:r>
           </a:p>
         </p:txBody>
@@ -4241,6 +5403,31 @@
       </p:grpSpPr>
       <p:sp>
         <p:nvSpPr>
+          <p:cNvPr id="2" name="Title 1"/>
+          <p:cNvSpPr>
+            <a:spLocks noGrp="1"/>
+          </p:cNvSpPr>
+          <p:nvPr>
+            <p:ph type="title"/>
+          </p:nvPr>
+        </p:nvSpPr>
+        <p:spPr/>
+        <p:txBody>
+          <a:bodyPr/>
+          <a:lstStyle/>
+          <a:p>
+            <a:pPr lvl="0" indent="0" marL="0">
+              <a:buNone/>
+            </a:pPr>
+            <a:r>
+              <a:rPr/>
+              <a:t>Packages — extending what R can do</a:t>
+            </a:r>
+          </a:p>
+        </p:txBody>
+      </p:sp>
+      <p:sp>
+        <p:nvSpPr>
           <p:cNvPr id="3" name="Content Placeholder 2"/>
           <p:cNvSpPr>
             <a:spLocks noGrp="1"/>
@@ -4258,16 +5445,20 @@
               <a:buNone/>
             </a:pPr>
             <a:r>
-              <a:rPr/>
-              <a:t>Type math into the </a:t>
-            </a:r>
-            <a:r>
               <a:rPr b="1"/>
-              <a:t>console</a:t>
-            </a:r>
-            <a:r>
-              <a:rPr/>
-              <a:t> and press Enter:</a:t>
+              <a:t>Install once</a:t>
+            </a:r>
+            <a:r>
+              <a:rPr/>
+              <a:t>, in the console. </a:t>
+            </a:r>
+            <a:r>
+              <a:rPr b="1"/>
+              <a:t>Load every session</a:t>
+            </a:r>
+            <a:r>
+              <a:rPr/>
+              <a:t>, at the top of every script:</a:t>
             </a:r>
           </a:p>
           <a:p>
@@ -4277,11 +5468,11 @@
             <a:r>
               <a:rPr>
                 <a:solidFill>
-                  <a:srgbClr val="AD0000"/>
-                </a:solidFill>
-                <a:latin typeface="Courier"/>
-              </a:rPr>
-              <a:t>3</a:t>
+                  <a:srgbClr val="4758AB"/>
+                </a:solidFill>
+                <a:latin typeface="Courier"/>
+              </a:rPr>
+              <a:t>install.packages</a:t>
             </a:r>
             <a:r>
               <a:rPr>
@@ -4290,7 +5481,45 @@
                 </a:solidFill>
                 <a:latin typeface="Courier"/>
               </a:rPr>
-              <a:t> </a:t>
+              <a:t>(</a:t>
+            </a:r>
+            <a:r>
+              <a:rPr>
+                <a:solidFill>
+                  <a:srgbClr val="20794D"/>
+                </a:solidFill>
+                <a:latin typeface="Courier"/>
+              </a:rPr>
+              <a:t>"tidyverse"</a:t>
+            </a:r>
+            <a:r>
+              <a:rPr>
+                <a:solidFill>
+                  <a:srgbClr val="003B4F"/>
+                </a:solidFill>
+                <a:latin typeface="Courier"/>
+              </a:rPr>
+              <a:t>)</a:t>
+            </a:r>
+            <a:br/>
+            <a:br/>
+            <a:r>
+              <a:rPr>
+                <a:solidFill>
+                  <a:srgbClr val="4758AB"/>
+                </a:solidFill>
+                <a:latin typeface="Courier"/>
+              </a:rPr>
+              <a:t>library</a:t>
+            </a:r>
+            <a:r>
+              <a:rPr>
+                <a:solidFill>
+                  <a:srgbClr val="003B4F"/>
+                </a:solidFill>
+                <a:latin typeface="Courier"/>
+              </a:rPr>
+              <a:t>(tidyverse)   </a:t>
             </a:r>
             <a:r>
               <a:rPr>
@@ -4299,259 +5528,7 @@
                 </a:solidFill>
                 <a:latin typeface="Courier"/>
               </a:rPr>
-              <a:t>+</a:t>
-            </a:r>
-            <a:r>
-              <a:rPr>
-                <a:solidFill>
-                  <a:srgbClr val="003B4F"/>
-                </a:solidFill>
-                <a:latin typeface="Courier"/>
-              </a:rPr>
-              <a:t> </a:t>
-            </a:r>
-            <a:r>
-              <a:rPr>
-                <a:solidFill>
-                  <a:srgbClr val="AD0000"/>
-                </a:solidFill>
-                <a:latin typeface="Courier"/>
-              </a:rPr>
-              <a:t>5</a:t>
-            </a:r>
-            <a:br/>
-            <a:r>
-              <a:rPr>
-                <a:solidFill>
-                  <a:srgbClr val="AD0000"/>
-                </a:solidFill>
-                <a:latin typeface="Courier"/>
-              </a:rPr>
-              <a:t>12</a:t>
-            </a:r>
-            <a:r>
-              <a:rPr>
-                <a:solidFill>
-                  <a:srgbClr val="003B4F"/>
-                </a:solidFill>
-                <a:latin typeface="Courier"/>
-              </a:rPr>
-              <a:t> </a:t>
-            </a:r>
-            <a:r>
-              <a:rPr>
-                <a:solidFill>
-                  <a:srgbClr val="5E5E5E"/>
-                </a:solidFill>
-                <a:latin typeface="Courier"/>
-              </a:rPr>
-              <a:t>/</a:t>
-            </a:r>
-            <a:r>
-              <a:rPr>
-                <a:solidFill>
-                  <a:srgbClr val="003B4F"/>
-                </a:solidFill>
-                <a:latin typeface="Courier"/>
-              </a:rPr>
-              <a:t> </a:t>
-            </a:r>
-            <a:r>
-              <a:rPr>
-                <a:solidFill>
-                  <a:srgbClr val="AD0000"/>
-                </a:solidFill>
-                <a:latin typeface="Courier"/>
-              </a:rPr>
-              <a:t>7</a:t>
-            </a:r>
-            <a:br/>
-            <a:r>
-              <a:rPr>
-                <a:solidFill>
-                  <a:srgbClr val="AD0000"/>
-                </a:solidFill>
-                <a:latin typeface="Courier"/>
-              </a:rPr>
-              <a:t>2</a:t>
-            </a:r>
-            <a:r>
-              <a:rPr>
-                <a:solidFill>
-                  <a:srgbClr val="003B4F"/>
-                </a:solidFill>
-                <a:latin typeface="Courier"/>
-              </a:rPr>
-              <a:t> </a:t>
-            </a:r>
-            <a:r>
-              <a:rPr>
-                <a:solidFill>
-                  <a:srgbClr val="5E5E5E"/>
-                </a:solidFill>
-                <a:latin typeface="Courier"/>
-              </a:rPr>
-              <a:t>^</a:t>
-            </a:r>
-            <a:r>
-              <a:rPr>
-                <a:solidFill>
-                  <a:srgbClr val="003B4F"/>
-                </a:solidFill>
-                <a:latin typeface="Courier"/>
-              </a:rPr>
-              <a:t> </a:t>
-            </a:r>
-            <a:r>
-              <a:rPr>
-                <a:solidFill>
-                  <a:srgbClr val="AD0000"/>
-                </a:solidFill>
-                <a:latin typeface="Courier"/>
-              </a:rPr>
-              <a:t>10</a:t>
-            </a:r>
-          </a:p>
-          <a:p>
-            <a:pPr lvl="0" indent="0" marL="0">
-              <a:buNone/>
-            </a:pPr>
-            <a:r>
-              <a:rPr/>
-              <a:t>To keep a value, give it a name with the </a:t>
-            </a:r>
-            <a:r>
-              <a:rPr b="1"/>
-              <a:t>assignment operator</a:t>
-            </a:r>
-            <a:r>
-              <a:rPr/>
-              <a:t> </a:t>
-            </a:r>
-            <a:r>
-              <a:rPr>
-                <a:latin typeface="Courier"/>
-              </a:rPr>
-              <a:t>&lt;-</a:t>
-            </a:r>
-            <a:r>
-              <a:rPr/>
-              <a:t>:</a:t>
-            </a:r>
-          </a:p>
-          <a:p>
-            <a:pPr lvl="0" indent="0">
-              <a:buNone/>
-            </a:pPr>
-            <a:r>
-              <a:rPr>
-                <a:solidFill>
-                  <a:srgbClr val="003B4F"/>
-                </a:solidFill>
-                <a:latin typeface="Courier"/>
-              </a:rPr>
-              <a:t>x &lt;- </a:t>
-            </a:r>
-            <a:r>
-              <a:rPr>
-                <a:solidFill>
-                  <a:srgbClr val="AD0000"/>
-                </a:solidFill>
-                <a:latin typeface="Courier"/>
-              </a:rPr>
-              <a:t>7</a:t>
-            </a:r>
-            <a:r>
-              <a:rPr>
-                <a:solidFill>
-                  <a:srgbClr val="003B4F"/>
-                </a:solidFill>
-                <a:latin typeface="Courier"/>
-              </a:rPr>
-              <a:t>      </a:t>
-            </a:r>
-            <a:r>
-              <a:rPr>
-                <a:solidFill>
-                  <a:srgbClr val="5E5E5E"/>
-                </a:solidFill>
-                <a:latin typeface="Courier"/>
-              </a:rPr>
-              <a:t># store 7 under the name x</a:t>
-            </a:r>
-            <a:br/>
-            <a:r>
-              <a:rPr>
-                <a:solidFill>
-                  <a:srgbClr val="003B4F"/>
-                </a:solidFill>
-                <a:latin typeface="Courier"/>
-              </a:rPr>
-              <a:t>x           </a:t>
-            </a:r>
-            <a:r>
-              <a:rPr>
-                <a:solidFill>
-                  <a:srgbClr val="5E5E5E"/>
-                </a:solidFill>
-                <a:latin typeface="Courier"/>
-              </a:rPr>
-              <a:t># read it back</a:t>
-            </a:r>
-            <a:br/>
-            <a:r>
-              <a:rPr>
-                <a:solidFill>
-                  <a:srgbClr val="003B4F"/>
-                </a:solidFill>
-                <a:latin typeface="Courier"/>
-              </a:rPr>
-              <a:t>x </a:t>
-            </a:r>
-            <a:r>
-              <a:rPr>
-                <a:solidFill>
-                  <a:srgbClr val="5E5E5E"/>
-                </a:solidFill>
-                <a:latin typeface="Courier"/>
-              </a:rPr>
-              <a:t>*</a:t>
-            </a:r>
-            <a:r>
-              <a:rPr>
-                <a:solidFill>
-                  <a:srgbClr val="003B4F"/>
-                </a:solidFill>
-                <a:latin typeface="Courier"/>
-              </a:rPr>
-              <a:t> </a:t>
-            </a:r>
-            <a:r>
-              <a:rPr>
-                <a:solidFill>
-                  <a:srgbClr val="AD0000"/>
-                </a:solidFill>
-                <a:latin typeface="Courier"/>
-              </a:rPr>
-              <a:t>2</a:t>
-            </a:r>
-            <a:r>
-              <a:rPr>
-                <a:solidFill>
-                  <a:srgbClr val="003B4F"/>
-                </a:solidFill>
-                <a:latin typeface="Courier"/>
-              </a:rPr>
-              <a:t>       </a:t>
-            </a:r>
-            <a:r>
-              <a:rPr>
-                <a:solidFill>
-                  <a:srgbClr val="5E5E5E"/>
-                </a:solidFill>
-                <a:latin typeface="Courier"/>
-              </a:rPr>
-              <a:t># use it in math</a:t>
+              <a:t># wrangling + ggplot2</a:t>
             </a:r>
           </a:p>
           <a:p>
@@ -4577,48 +5554,22 @@
               <a:buNone/>
             </a:pPr>
             <a:r>
+              <a:rPr sz="2000" i="1"/>
+              <a:t>“could not find function…”</a:t>
+            </a:r>
+            <a:r>
               <a:rPr sz="2000"/>
-              <a:t>R is case-sensitive: </a:t>
+              <a:t> almost always means you forgot the </a:t>
             </a:r>
             <a:r>
               <a:rPr sz="2000">
                 <a:latin typeface="Courier"/>
               </a:rPr>
-              <a:t>x</a:t>
+              <a:t>library()</a:t>
             </a:r>
             <a:r>
               <a:rPr sz="2000"/>
-              <a:t> and </a:t>
-            </a:r>
-            <a:r>
-              <a:rPr sz="2000">
-                <a:latin typeface="Courier"/>
-              </a:rPr>
-              <a:t>X</a:t>
-            </a:r>
-            <a:r>
-              <a:rPr sz="2000"/>
-              <a:t> are different objects. Use </a:t>
-            </a:r>
-            <a:r>
-              <a:rPr sz="2000">
-                <a:latin typeface="Courier"/>
-              </a:rPr>
-              <a:t>&lt;-</a:t>
-            </a:r>
-            <a:r>
-              <a:rPr sz="2000"/>
-              <a:t>, not </a:t>
-            </a:r>
-            <a:r>
-              <a:rPr sz="2000">
-                <a:latin typeface="Courier"/>
-              </a:rPr>
-              <a:t>=</a:t>
-            </a:r>
-            <a:r>
-              <a:rPr sz="2000"/>
-              <a:t>, to assign.</a:t>
+              <a:t> line for that session.</a:t>
             </a:r>
           </a:p>
         </p:txBody>
@@ -4652,28 +5603,29 @@
             </a:pPr>
             <a:r>
               <a:rPr sz="2000" b="1"/>
-              <a:t>📖 New word</a:t>
-            </a:r>
-          </a:p>
-          <a:p>
-            <a:pPr lvl="0" indent="0" marL="1270000">
-              <a:buNone/>
-            </a:pPr>
+              <a:t>📖 New words</a:t>
+            </a:r>
+          </a:p>
+          <a:p>
+            <a:pPr lvl="0"/>
             <a:r>
               <a:rPr sz="2000" b="1"/>
-              <a:t>Object</a:t>
+              <a:t>Package</a:t>
             </a:r>
             <a:r>
               <a:rPr sz="2000"/>
-              <a:t> = a named container holding a value. Look for it appear in the </a:t>
-            </a:r>
+              <a:t> — the installed toolbox (once)</a:t>
+            </a:r>
+          </a:p>
+          <a:p>
+            <a:pPr lvl="0"/>
             <a:r>
               <a:rPr sz="2000" b="1"/>
-              <a:t>Environment</a:t>
+              <a:t>Library</a:t>
             </a:r>
             <a:r>
               <a:rPr sz="2000"/>
-              <a:t> pane the moment you create it.</a:t>
+              <a:t> — loading it for today’s session (every time)</a:t>
             </a:r>
           </a:p>
         </p:txBody>
@@ -4702,6 +5654,31 @@
       </p:grpSpPr>
       <p:sp>
         <p:nvSpPr>
+          <p:cNvPr id="2" name="Title 1"/>
+          <p:cNvSpPr>
+            <a:spLocks noGrp="1"/>
+          </p:cNvSpPr>
+          <p:nvPr>
+            <p:ph type="title"/>
+          </p:nvPr>
+        </p:nvSpPr>
+        <p:spPr/>
+        <p:txBody>
+          <a:bodyPr/>
+          <a:lstStyle/>
+          <a:p>
+            <a:pPr lvl="0" indent="0" marL="0">
+              <a:buNone/>
+            </a:pPr>
+            <a:r>
+              <a:rPr/>
+              <a:t>Part 4 · Load Data and Make Your First Plot</a:t>
+            </a:r>
+          </a:p>
+        </p:txBody>
+      </p:sp>
+      <p:sp>
+        <p:nvSpPr>
           <p:cNvPr id="3" name="Content Placeholder 2"/>
           <p:cNvSpPr>
             <a:spLocks noGrp="1"/>
@@ -4723,7 +5700,7 @@
             </a:pPr>
             <a:r>
               <a:rPr b="1"/>
-              <a:t>Names, comments, and functions</a:t>
+              <a:t>Bring the data in</a:t>
             </a:r>
           </a:p>
         </p:txBody>
@@ -4961,71 +5938,22 @@
           <a:bodyPr/>
           <a:lstStyle/>
           <a:p>
-            <a:pPr lvl="0"/>
-            <a:r>
-              <a:rPr/>
-              <a:t>Use </a:t>
-            </a:r>
-            <a:r>
-              <a:rPr b="1">
-                <a:latin typeface="Courier"/>
-              </a:rPr>
-              <a:t>lower_snake_case</a:t>
-            </a:r>
-            <a:r>
-              <a:rPr/>
-              <a:t>: </a:t>
-            </a:r>
-            <a:r>
-              <a:rPr>
-                <a:latin typeface="Courier"/>
-              </a:rPr>
-              <a:t>needle_length</a:t>
-            </a:r>
-            <a:r>
-              <a:rPr/>
-              <a:t>, not </a:t>
-            </a:r>
-            <a:r>
-              <a:rPr>
-                <a:latin typeface="Courier"/>
-              </a:rPr>
-              <a:t>x2</a:t>
-            </a:r>
-            <a:r>
-              <a:rPr/>
-              <a:t> or </a:t>
-            </a:r>
-            <a:r>
-              <a:rPr>
-                <a:latin typeface="Courier"/>
-              </a:rPr>
-              <a:t>NeedleLength</a:t>
-            </a:r>
-          </a:p>
-          <a:p>
-            <a:pPr lvl="0"/>
-            <a:r>
-              <a:rPr/>
-              <a:t>Anything after </a:t>
-            </a:r>
-            <a:r>
-              <a:rPr>
-                <a:latin typeface="Courier"/>
-              </a:rPr>
-              <a:t>#</a:t>
-            </a:r>
-            <a:r>
-              <a:rPr/>
-              <a:t> is a </a:t>
-            </a:r>
-            <a:r>
-              <a:rPr b="1"/>
-              <a:t>comment</a:t>
-            </a:r>
-            <a:r>
-              <a:rPr/>
-              <a:t> — a note for humans, ignored by R</a:t>
+            <a:pPr lvl="0" indent="0" marL="0">
+              <a:buNone/>
+            </a:pPr>
+            <a:r>
+              <a:rPr/>
+              <a:t>Put the file in </a:t>
+            </a:r>
+            <a:r>
+              <a:rPr>
+                <a:latin typeface="Courier"/>
+              </a:rPr>
+              <a:t>data/</a:t>
+            </a:r>
+            <a:r>
+              <a:rPr/>
+              <a:t>, then:</a:t>
             </a:r>
           </a:p>
           <a:p>
@@ -5035,13 +5963,23 @@
             <a:r>
               <a:rPr>
                 <a:solidFill>
-                  <a:srgbClr val="5E5E5E"/>
-                </a:solidFill>
-                <a:latin typeface="Courier"/>
-              </a:rPr>
-              <a:t># average of four needle lengths, in mm</a:t>
+                  <a:srgbClr val="4758AB"/>
+                </a:solidFill>
+                <a:latin typeface="Courier"/>
+              </a:rPr>
+              <a:t>library</a:t>
+            </a:r>
+            <a:r>
+              <a:rPr>
+                <a:solidFill>
+                  <a:srgbClr val="003B4F"/>
+                </a:solidFill>
+                <a:latin typeface="Courier"/>
+              </a:rPr>
+              <a:t>(tidyverse)</a:t>
             </a:r>
             <a:br/>
+            <a:br/>
             <a:r>
               <a:rPr>
                 <a:solidFill>
@@ -5049,7 +5987,7 @@
                 </a:solidFill>
                 <a:latin typeface="Courier"/>
               </a:rPr>
-              <a:t>needle_length &lt;- </a:t>
+              <a:t>pine_df &lt;- </a:t>
             </a:r>
             <a:r>
               <a:rPr>
@@ -5058,7 +5996,7 @@
                 </a:solidFill>
                 <a:latin typeface="Courier"/>
               </a:rPr>
-              <a:t>c</a:t>
+              <a:t>read_csv</a:t>
             </a:r>
             <a:r>
               <a:rPr>
@@ -5072,11 +6010,11 @@
             <a:r>
               <a:rPr>
                 <a:solidFill>
-                  <a:srgbClr val="AD0000"/>
-                </a:solidFill>
-                <a:latin typeface="Courier"/>
-              </a:rPr>
-              <a:t>20</a:t>
+                  <a:srgbClr val="20794D"/>
+                </a:solidFill>
+                <a:latin typeface="Courier"/>
+              </a:rPr>
+              <a:t>"data/pine_needles.csv"</a:t>
             </a:r>
             <a:r>
               <a:rPr>
@@ -5085,212 +6023,9 @@
                 </a:solidFill>
                 <a:latin typeface="Courier"/>
               </a:rPr>
-              <a:t>, </a:t>
-            </a:r>
-            <a:r>
-              <a:rPr>
-                <a:solidFill>
-                  <a:srgbClr val="AD0000"/>
-                </a:solidFill>
-                <a:latin typeface="Courier"/>
-              </a:rPr>
-              <a:t>21</a:t>
-            </a:r>
-            <a:r>
-              <a:rPr>
-                <a:solidFill>
-                  <a:srgbClr val="003B4F"/>
-                </a:solidFill>
-                <a:latin typeface="Courier"/>
-              </a:rPr>
-              <a:t>, </a:t>
-            </a:r>
-            <a:r>
-              <a:rPr>
-                <a:solidFill>
-                  <a:srgbClr val="AD0000"/>
-                </a:solidFill>
-                <a:latin typeface="Courier"/>
-              </a:rPr>
-              <a:t>23</a:t>
-            </a:r>
-            <a:r>
-              <a:rPr>
-                <a:solidFill>
-                  <a:srgbClr val="003B4F"/>
-                </a:solidFill>
-                <a:latin typeface="Courier"/>
-              </a:rPr>
-              <a:t>, </a:t>
-            </a:r>
-            <a:r>
-              <a:rPr>
-                <a:solidFill>
-                  <a:srgbClr val="AD0000"/>
-                </a:solidFill>
-                <a:latin typeface="Courier"/>
-              </a:rPr>
-              <a:t>25</a:t>
-            </a:r>
-            <a:r>
-              <a:rPr>
-                <a:solidFill>
-                  <a:srgbClr val="003B4F"/>
-                </a:solidFill>
-                <a:latin typeface="Courier"/>
-              </a:rPr>
               <a:t>)</a:t>
             </a:r>
-            <a:br/>
-            <a:r>
-              <a:rPr>
-                <a:solidFill>
-                  <a:srgbClr val="4758AB"/>
-                </a:solidFill>
-                <a:latin typeface="Courier"/>
-              </a:rPr>
-              <a:t>mean</a:t>
-            </a:r>
-            <a:r>
-              <a:rPr>
-                <a:solidFill>
-                  <a:srgbClr val="003B4F"/>
-                </a:solidFill>
-                <a:latin typeface="Courier"/>
-              </a:rPr>
-              <a:t>(needle_length)     </a:t>
-            </a:r>
-            <a:r>
-              <a:rPr>
-                <a:solidFill>
-                  <a:srgbClr val="5E5E5E"/>
-                </a:solidFill>
-                <a:latin typeface="Courier"/>
-              </a:rPr>
-              <a:t># a function call</a:t>
-            </a:r>
-          </a:p>
-          <a:p>
-            <a:pPr lvl="0" indent="0" marL="0">
-              <a:buNone/>
-            </a:pPr>
-            <a:r>
-              <a:rPr/>
-              <a:t>A </a:t>
-            </a:r>
-            <a:r>
-              <a:rPr b="1"/>
-              <a:t>function</a:t>
-            </a:r>
-            <a:r>
-              <a:rPr/>
-              <a:t> takes </a:t>
-            </a:r>
-            <a:r>
-              <a:rPr b="1"/>
-              <a:t>arguments</a:t>
-            </a:r>
-            <a:r>
-              <a:rPr/>
-              <a:t> in </a:t>
-            </a:r>
-            <a:r>
-              <a:rPr>
-                <a:latin typeface="Courier"/>
-              </a:rPr>
-              <a:t>()</a:t>
-            </a:r>
-            <a:r>
-              <a:rPr/>
-              <a:t> and returns a result. Stuck? Ask for help:</a:t>
-            </a:r>
-          </a:p>
-          <a:p>
-            <a:pPr lvl="0" indent="0">
-              <a:buNone/>
-            </a:pPr>
-            <a:r>
-              <a:rPr>
-                <a:solidFill>
-                  <a:srgbClr val="003B4F"/>
-                </a:solidFill>
-                <a:latin typeface="Courier"/>
-              </a:rPr>
-              <a:t>?mean</a:t>
-            </a:r>
-            <a:br/>
-            <a:r>
-              <a:rPr>
-                <a:solidFill>
-                  <a:srgbClr val="4758AB"/>
-                </a:solidFill>
-                <a:latin typeface="Courier"/>
-              </a:rPr>
-              <a:t>args</a:t>
-            </a:r>
-            <a:r>
-              <a:rPr>
-                <a:solidFill>
-                  <a:srgbClr val="003B4F"/>
-                </a:solidFill>
-                <a:latin typeface="Courier"/>
-              </a:rPr>
-              <a:t>(mean)</a:t>
-            </a:r>
-          </a:p>
-          <a:p>
-            <a:pPr lvl="0" indent="0" marL="1270000">
-              <a:buNone/>
-            </a:pPr>
-            <a:r>
-              <a:rPr sz="2000" b="1"/>
-              <a:t>Tip</a:t>
-            </a:r>
-          </a:p>
-          <a:p>
-            <a:pPr lvl="0" indent="0" marL="1270000">
-              <a:buNone/>
-            </a:pPr>
-            <a:r>
-              <a:rPr sz="2000" b="1"/>
-              <a:t>🖐 Try it yourself</a:t>
-            </a:r>
-          </a:p>
-          <a:p>
-            <a:pPr lvl="0" indent="0" marL="1270000">
-              <a:buNone/>
-            </a:pPr>
-            <a:r>
-              <a:rPr sz="2000"/>
-              <a:t>Predict what </a:t>
-            </a:r>
-            <a:r>
-              <a:rPr sz="2000">
-                <a:latin typeface="Courier"/>
-              </a:rPr>
-              <a:t>round(3.14159, 2)</a:t>
-            </a:r>
-            <a:r>
-              <a:rPr sz="2000"/>
-              <a:t> returns before you run it.</a:t>
-            </a:r>
-          </a:p>
-        </p:txBody>
-      </p:sp>
-      <p:sp>
-        <p:nvSpPr>
-          <p:cNvPr id="4" name="Content Placeholder 3"/>
-          <p:cNvSpPr>
-            <a:spLocks noGrp="1"/>
-          </p:cNvSpPr>
-          <p:nvPr>
-            <p:ph idx="2" sz="half"/>
-          </p:nvPr>
-        </p:nvSpPr>
-        <p:spPr/>
-        <p:txBody>
-          <a:bodyPr/>
-          <a:lstStyle/>
+          </a:p>
           <a:p>
             <a:pPr lvl="0" indent="0" marL="1270000">
               <a:buNone/>
@@ -5306,40 +6041,153 @@
             </a:pPr>
             <a:r>
               <a:rPr sz="2000" b="1"/>
-              <a:t>📖 New words</a:t>
+              <a:t>✅ Key idea</a:t>
+            </a:r>
+          </a:p>
+          <a:p>
+            <a:pPr lvl="0" indent="0" marL="1270000">
+              <a:buNone/>
+            </a:pPr>
+            <a:r>
+              <a:rPr sz="2000">
+                <a:latin typeface="Courier"/>
+              </a:rPr>
+              <a:t>read_csv()</a:t>
+            </a:r>
+            <a:r>
+              <a:rPr sz="2000"/>
+              <a:t> comes free with </a:t>
+            </a:r>
+            <a:r>
+              <a:rPr sz="2000">
+                <a:latin typeface="Courier"/>
+              </a:rPr>
+              <a:t>library(tidyverse)</a:t>
+            </a:r>
+            <a:r>
+              <a:rPr sz="2000"/>
+              <a:t>. Your file’s first row becomes the </a:t>
+            </a:r>
+            <a:r>
+              <a:rPr sz="2000" b="1"/>
+              <a:t>column names</a:t>
+            </a:r>
+            <a:r>
+              <a:rPr sz="2000"/>
+              <a:t> in R.</a:t>
+            </a:r>
+          </a:p>
+        </p:txBody>
+      </p:sp>
+      <p:sp>
+        <p:nvSpPr>
+          <p:cNvPr id="4" name="Content Placeholder 3"/>
+          <p:cNvSpPr>
+            <a:spLocks noGrp="1"/>
+          </p:cNvSpPr>
+          <p:nvPr>
+            <p:ph idx="2" sz="half"/>
+          </p:nvPr>
+        </p:nvSpPr>
+        <p:spPr/>
+        <p:txBody>
+          <a:bodyPr/>
+          <a:lstStyle/>
+          <a:p>
+            <a:pPr lvl="0" indent="0" marL="1270000">
+              <a:buNone/>
+            </a:pPr>
+            <a:r>
+              <a:rPr sz="2000" b="1"/>
+              <a:t>Note</a:t>
+            </a:r>
+          </a:p>
+          <a:p>
+            <a:pPr lvl="0" indent="0" marL="1270000">
+              <a:buNone/>
+            </a:pPr>
+            <a:r>
+              <a:rPr sz="2000" b="1"/>
+              <a:t>Our columns</a:t>
             </a:r>
           </a:p>
           <a:p>
             <a:pPr lvl="0"/>
             <a:r>
-              <a:rPr sz="2000" b="1"/>
-              <a:t>Comment</a:t>
+              <a:rPr sz="2000">
+                <a:latin typeface="Courier"/>
+              </a:rPr>
+              <a:t>n_s</a:t>
             </a:r>
             <a:r>
               <a:rPr sz="2000"/>
-              <a:t> — ignored by R, read by humans</a:t>
+              <a:t> — </a:t>
+            </a:r>
+            <a:r>
+              <a:rPr sz="2000">
+                <a:latin typeface="Courier"/>
+              </a:rPr>
+              <a:t>"n"</a:t>
+            </a:r>
+            <a:r>
+              <a:rPr sz="2000"/>
+              <a:t> (sheltered/lee) or </a:t>
+            </a:r>
+            <a:r>
+              <a:rPr sz="2000">
+                <a:latin typeface="Courier"/>
+              </a:rPr>
+              <a:t>"s"</a:t>
+            </a:r>
+            <a:r>
+              <a:rPr sz="2000"/>
+              <a:t> (exposed/windward)</a:t>
             </a:r>
           </a:p>
           <a:p>
             <a:pPr lvl="0"/>
             <a:r>
-              <a:rPr sz="2000" b="1"/>
-              <a:t>Argument</a:t>
+              <a:rPr sz="2000">
+                <a:latin typeface="Courier"/>
+              </a:rPr>
+              <a:t>wind</a:t>
             </a:r>
             <a:r>
               <a:rPr sz="2000"/>
-              <a:t> — an input handed to a function</a:t>
+              <a:t> — </a:t>
+            </a:r>
+            <a:r>
+              <a:rPr sz="2000">
+                <a:latin typeface="Courier"/>
+              </a:rPr>
+              <a:t>"lee"</a:t>
+            </a:r>
+            <a:r>
+              <a:rPr sz="2000"/>
+              <a:t> or </a:t>
+            </a:r>
+            <a:r>
+              <a:rPr sz="2000">
+                <a:latin typeface="Courier"/>
+              </a:rPr>
+              <a:t>"wind"</a:t>
+            </a:r>
+            <a:r>
+              <a:rPr sz="2000"/>
+              <a:t>, same grouping said a different way</a:t>
             </a:r>
           </a:p>
           <a:p>
             <a:pPr lvl="0"/>
             <a:r>
-              <a:rPr sz="2000" b="1"/>
-              <a:t>Function</a:t>
+              <a:rPr sz="2000">
+                <a:latin typeface="Courier"/>
+              </a:rPr>
+              <a:t>length_mm</a:t>
             </a:r>
             <a:r>
               <a:rPr sz="2000"/>
-              <a:t> — a named, reusable operation</a:t>
+              <a:t> — needle length in millimeters</a:t>
             </a:r>
           </a:p>
         </p:txBody>
@@ -5368,28 +6216,262 @@
       </p:grpSpPr>
       <p:sp>
         <p:nvSpPr>
+          <p:cNvPr id="2" name="Title 1"/>
+          <p:cNvSpPr>
+            <a:spLocks noGrp="1"/>
+          </p:cNvSpPr>
+          <p:nvPr>
+            <p:ph type="title"/>
+          </p:nvPr>
+        </p:nvSpPr>
+        <p:spPr/>
+        <p:txBody>
+          <a:bodyPr/>
+          <a:lstStyle/>
+          <a:p>
+            <a:pPr lvl="0" indent="0" marL="0">
+              <a:buNone/>
+            </a:pPr>
+            <a:r>
+              <a:rPr/>
+              <a:t>Look before you trust it</a:t>
+            </a:r>
+          </a:p>
+        </p:txBody>
+      </p:sp>
+      <p:sp>
+        <p:nvSpPr>
           <p:cNvPr id="3" name="Content Placeholder 2"/>
           <p:cNvSpPr>
             <a:spLocks noGrp="1"/>
           </p:cNvSpPr>
           <p:nvPr>
-            <p:ph idx="1"/>
-          </p:nvPr>
-        </p:nvSpPr>
-        <p:spPr/>
-        <p:txBody>
-          <a:bodyPr/>
-          <a:lstStyle/>
-          <a:p>
-            <a:pPr lvl="0" indent="0" marL="0">
-              <a:spcBef>
-                <a:spcPts val="3000"/>
-              </a:spcBef>
-              <a:buNone/>
-            </a:pPr>
-            <a:r>
-              <a:rPr b="1"/>
-              <a:t>Vectors, data types, and scripts</a:t>
+            <p:ph idx="1" sz="half"/>
+          </p:nvPr>
+        </p:nvSpPr>
+        <p:spPr/>
+        <p:txBody>
+          <a:bodyPr/>
+          <a:lstStyle/>
+          <a:p>
+            <a:pPr lvl="0" indent="0">
+              <a:buNone/>
+            </a:pPr>
+            <a:r>
+              <a:rPr>
+                <a:solidFill>
+                  <a:srgbClr val="4758AB"/>
+                </a:solidFill>
+                <a:latin typeface="Courier"/>
+              </a:rPr>
+              <a:t>glimpse</a:t>
+            </a:r>
+            <a:r>
+              <a:rPr>
+                <a:solidFill>
+                  <a:srgbClr val="003B4F"/>
+                </a:solidFill>
+                <a:latin typeface="Courier"/>
+              </a:rPr>
+              <a:t>(pine_df)</a:t>
+            </a:r>
+          </a:p>
+          <a:p>
+            <a:pPr lvl="0" indent="0">
+              <a:buNone/>
+            </a:pPr>
+            <a:r>
+              <a:rPr>
+                <a:latin typeface="Courier"/>
+              </a:rPr>
+              <a:t>Rows: 48
+Columns: 6
+$ date      &lt;chr&gt; "3/20/25", "3/20/25", "3/20/25", "3/20/25", "3/20/25", "3/20…
+$ group     &lt;chr&gt; "cephalopods", "cephalopods", "cephalopods", "cephalopods", …
+$ n_s       &lt;chr&gt; "n", "n", "n", "n", "n", "n", "s", "s", "s", "s", "s", "s", …
+$ wind      &lt;chr&gt; "lee", "lee", "lee", "lee", "lee", "lee", "wind", "wind", "w…
+$ tree_no   &lt;dbl&gt; 1, 1, 1, 1, 1, 1, 1, 1, 1, 1, 1, 1, 2, 2, 2, 2, 2, 2, 2, 2, …
+$ length_mm &lt;dbl&gt; 20, 21, 23, 25, 21, 16, 15, 16, 14, 17, 13, 15, 19, 18, 20, …</a:t>
+            </a:r>
+          </a:p>
+          <a:p>
+            <a:pPr lvl="0" indent="0">
+              <a:buNone/>
+            </a:pPr>
+            <a:r>
+              <a:rPr>
+                <a:solidFill>
+                  <a:srgbClr val="4758AB"/>
+                </a:solidFill>
+                <a:latin typeface="Courier"/>
+              </a:rPr>
+              <a:t>dim</a:t>
+            </a:r>
+            <a:r>
+              <a:rPr>
+                <a:solidFill>
+                  <a:srgbClr val="003B4F"/>
+                </a:solidFill>
+                <a:latin typeface="Courier"/>
+              </a:rPr>
+              <a:t>(pine_df)</a:t>
+            </a:r>
+          </a:p>
+          <a:p>
+            <a:pPr lvl="0" indent="0">
+              <a:buNone/>
+            </a:pPr>
+            <a:r>
+              <a:rPr>
+                <a:latin typeface="Courier"/>
+              </a:rPr>
+              <a:t>[1] 48  6</a:t>
+            </a:r>
+          </a:p>
+          <a:p>
+            <a:pPr lvl="0" indent="0" marL="1270000">
+              <a:buNone/>
+            </a:pPr>
+            <a:r>
+              <a:rPr sz="2000" b="1"/>
+              <a:t>Tip</a:t>
+            </a:r>
+          </a:p>
+          <a:p>
+            <a:pPr lvl="0" indent="0" marL="1270000">
+              <a:buNone/>
+            </a:pPr>
+            <a:r>
+              <a:rPr sz="2000" b="1"/>
+              <a:t>🖐 Notice</a:t>
+            </a:r>
+          </a:p>
+          <a:p>
+            <a:pPr lvl="0" indent="0" marL="1270000">
+              <a:buNone/>
+            </a:pPr>
+            <a:r>
+              <a:rPr sz="2000">
+                <a:latin typeface="Courier"/>
+              </a:rPr>
+              <a:t>n_s</a:t>
+            </a:r>
+            <a:r>
+              <a:rPr sz="2000"/>
+              <a:t> and </a:t>
+            </a:r>
+            <a:r>
+              <a:rPr sz="2000">
+                <a:latin typeface="Courier"/>
+              </a:rPr>
+              <a:t>wind</a:t>
+            </a:r>
+            <a:r>
+              <a:rPr sz="2000"/>
+              <a:t> always travel together — </a:t>
+            </a:r>
+            <a:r>
+              <a:rPr sz="2000">
+                <a:latin typeface="Courier"/>
+              </a:rPr>
+              <a:t>n</a:t>
+            </a:r>
+            <a:r>
+              <a:rPr sz="2000"/>
+              <a:t> with </a:t>
+            </a:r>
+            <a:r>
+              <a:rPr sz="2000">
+                <a:latin typeface="Courier"/>
+              </a:rPr>
+              <a:t>lee</a:t>
+            </a:r>
+            <a:r>
+              <a:rPr sz="2000"/>
+              <a:t>, </a:t>
+            </a:r>
+            <a:r>
+              <a:rPr sz="2000">
+                <a:latin typeface="Courier"/>
+              </a:rPr>
+              <a:t>s</a:t>
+            </a:r>
+            <a:r>
+              <a:rPr sz="2000"/>
+              <a:t> with </a:t>
+            </a:r>
+            <a:r>
+              <a:rPr sz="2000">
+                <a:latin typeface="Courier"/>
+              </a:rPr>
+              <a:t>wind</a:t>
+            </a:r>
+            <a:r>
+              <a:rPr sz="2000"/>
+              <a:t>. Two columns encoding the same grouping. Useful redundancy, or something to simplify? We’ll revisit this in Module 2.</a:t>
+            </a:r>
+          </a:p>
+        </p:txBody>
+      </p:sp>
+      <p:sp>
+        <p:nvSpPr>
+          <p:cNvPr id="4" name="Content Placeholder 3"/>
+          <p:cNvSpPr>
+            <a:spLocks noGrp="1"/>
+          </p:cNvSpPr>
+          <p:nvPr>
+            <p:ph idx="2" sz="half"/>
+          </p:nvPr>
+        </p:nvSpPr>
+        <p:spPr/>
+        <p:txBody>
+          <a:bodyPr/>
+          <a:lstStyle/>
+          <a:p>
+            <a:pPr lvl="0" indent="0" marL="1270000">
+              <a:buNone/>
+            </a:pPr>
+            <a:r>
+              <a:rPr sz="2000" b="1"/>
+              <a:t>Warning</a:t>
+            </a:r>
+          </a:p>
+          <a:p>
+            <a:pPr lvl="0" indent="0" marL="1270000">
+              <a:buNone/>
+            </a:pPr>
+            <a:r>
+              <a:rPr sz="2000" b="1"/>
+              <a:t>⚠️ Watch out!</a:t>
+            </a:r>
+          </a:p>
+          <a:p>
+            <a:pPr lvl="0" indent="0" marL="1270000">
+              <a:buNone/>
+            </a:pPr>
+            <a:r>
+              <a:rPr sz="2000"/>
+              <a:t>If a number column shows as </a:t>
+            </a:r>
+            <a:r>
+              <a:rPr sz="2000">
+                <a:latin typeface="Courier"/>
+              </a:rPr>
+              <a:t>&lt;chr&gt;</a:t>
+            </a:r>
+            <a:r>
+              <a:rPr sz="2000"/>
+              <a:t> in </a:t>
+            </a:r>
+            <a:r>
+              <a:rPr sz="2000">
+                <a:latin typeface="Courier"/>
+              </a:rPr>
+              <a:t>glimpse()</a:t>
+            </a:r>
+            <a:r>
+              <a:rPr sz="2000"/>
+              <a:t>, a stray letter or comma is hiding in that column.</a:t>
             </a:r>
           </a:p>
         </p:txBody>
@@ -5418,12 +6500,12 @@
       </p:grpSpPr>
       <p:sp>
         <p:nvSpPr>
-          <p:cNvPr id="3" name="Content Placeholder 2"/>
-          <p:cNvSpPr>
-            <a:spLocks noGrp="1"/>
-          </p:cNvSpPr>
-          <p:nvPr>
-            <p:ph idx="1" sz="half"/>
+          <p:cNvPr id="2" name="Title 1"/>
+          <p:cNvSpPr>
+            <a:spLocks noGrp="1"/>
+          </p:cNvSpPr>
+          <p:nvPr>
+            <p:ph type="title"/>
           </p:nvPr>
         </p:nvSpPr>
         <p:spPr/>
@@ -5436,25 +6518,101 @@
             </a:pPr>
             <a:r>
               <a:rPr/>
-              <a:t>A </a:t>
-            </a:r>
+              <a:t>Your first plot: </a:t>
+            </a:r>
+            <a:r>
+              <a:rPr>
+                <a:latin typeface="Courier"/>
+              </a:rPr>
+              <a:t>ggplot</a:t>
+            </a:r>
+            <a:r>
+              <a:rPr/>
+              <a:t>, built in layers</a:t>
+            </a:r>
+          </a:p>
+        </p:txBody>
+      </p:sp>
+      <p:sp>
+        <p:nvSpPr>
+          <p:cNvPr id="3" name="Text Placeholder 2"/>
+          <p:cNvSpPr>
+            <a:spLocks noGrp="1"/>
+          </p:cNvSpPr>
+          <p:nvPr>
+            <p:ph idx="1" type="body"/>
+          </p:nvPr>
+        </p:nvSpPr>
+        <p:spPr/>
+        <p:txBody>
+          <a:bodyPr/>
+          <a:lstStyle/>
+          <a:p>
+            <a:pPr lvl="0" indent="0" marL="0">
+              <a:buNone/>
+            </a:pPr>
+            <a:r>
+              <a:rPr/>
+              <a:t>Every </a:t>
+            </a:r>
+            <a:r>
+              <a:rPr>
+                <a:latin typeface="Courier"/>
+              </a:rPr>
+              <a:t>ggplot</a:t>
+            </a:r>
+            <a:r>
+              <a:rPr/>
+              <a:t> needs three things, joined with </a:t>
+            </a:r>
+            <a:r>
+              <a:rPr>
+                <a:latin typeface="Courier"/>
+              </a:rPr>
+              <a:t>+</a:t>
+            </a:r>
+            <a:r>
+              <a:rPr/>
+              <a:t>:</a:t>
+            </a:r>
+          </a:p>
+          <a:p>
+            <a:pPr lvl="0" indent="-342900" marL="342900">
+              <a:buAutoNum type="arabicPeriod"/>
+            </a:pPr>
             <a:r>
               <a:rPr b="1"/>
-              <a:t>vector</a:t>
-            </a:r>
-            <a:r>
-              <a:rPr/>
-              <a:t> is a row of values made with </a:t>
-            </a:r>
-            <a:r>
-              <a:rPr>
-                <a:latin typeface="Courier"/>
-              </a:rPr>
-              <a:t>c()</a:t>
-            </a:r>
-            <a:r>
-              <a:rPr/>
-              <a:t> — a spreadsheet column is really just a vector:</a:t>
+              <a:t>data</a:t>
+            </a:r>
+            <a:r>
+              <a:rPr/>
+              <a:t> — which data frame</a:t>
+            </a:r>
+          </a:p>
+          <a:p>
+            <a:pPr lvl="0" indent="-342900" marL="342900">
+              <a:buAutoNum type="arabicPeriod"/>
+            </a:pPr>
+            <a:r>
+              <a:rPr b="1"/>
+              <a:t>aes()</a:t>
+            </a:r>
+            <a:r>
+              <a:rPr/>
+              <a:t> — which columns map to x and y</a:t>
+            </a:r>
+          </a:p>
+          <a:p>
+            <a:pPr lvl="0" indent="-342900" marL="342900">
+              <a:buAutoNum type="arabicPeriod"/>
+            </a:pPr>
+            <a:r>
+              <a:rPr b="1"/>
+              <a:t>geom</a:t>
+            </a:r>
+            <a:r>
+              <a:rPr/>
+              <a:t> — how to draw it</a:t>
             </a:r>
           </a:p>
           <a:p>
@@ -5464,11 +6622,20 @@
             <a:r>
               <a:rPr>
                 <a:solidFill>
+                  <a:srgbClr val="4758AB"/>
+                </a:solidFill>
+                <a:latin typeface="Courier"/>
+              </a:rPr>
+              <a:t>ggplot</a:t>
+            </a:r>
+            <a:r>
+              <a:rPr>
+                <a:solidFill>
                   <a:srgbClr val="003B4F"/>
                 </a:solidFill>
                 <a:latin typeface="Courier"/>
               </a:rPr>
-              <a:t>length_mm &lt;- </a:t>
+              <a:t>(pine_df, </a:t>
             </a:r>
             <a:r>
               <a:rPr>
@@ -5477,7 +6644,7 @@
                 </a:solidFill>
                 <a:latin typeface="Courier"/>
               </a:rPr>
-              <a:t>c</a:t>
+              <a:t>aes</a:t>
             </a:r>
             <a:r>
               <a:rPr>
@@ -5491,11 +6658,11 @@
             <a:r>
               <a:rPr>
                 <a:solidFill>
-                  <a:srgbClr val="AD0000"/>
-                </a:solidFill>
-                <a:latin typeface="Courier"/>
-              </a:rPr>
-              <a:t>20</a:t>
+                  <a:srgbClr val="657422"/>
+                </a:solidFill>
+                <a:latin typeface="Courier"/>
+              </a:rPr>
+              <a:t>x =</a:t>
             </a:r>
             <a:r>
               <a:rPr>
@@ -5504,16 +6671,16 @@
                 </a:solidFill>
                 <a:latin typeface="Courier"/>
               </a:rPr>
-              <a:t>, </a:t>
-            </a:r>
-            <a:r>
-              <a:rPr>
-                <a:solidFill>
-                  <a:srgbClr val="AD0000"/>
-                </a:solidFill>
-                <a:latin typeface="Courier"/>
-              </a:rPr>
-              <a:t>21</a:t>
+              <a:t> wind, </a:t>
+            </a:r>
+            <a:r>
+              <a:rPr>
+                <a:solidFill>
+                  <a:srgbClr val="657422"/>
+                </a:solidFill>
+                <a:latin typeface="Courier"/>
+              </a:rPr>
+              <a:t>y =</a:t>
             </a:r>
             <a:r>
               <a:rPr>
@@ -5522,17 +6689,18 @@
                 </a:solidFill>
                 <a:latin typeface="Courier"/>
               </a:rPr>
-              <a:t>, </a:t>
-            </a:r>
-            <a:r>
-              <a:rPr>
-                <a:solidFill>
-                  <a:srgbClr val="AD0000"/>
-                </a:solidFill>
-                <a:latin typeface="Courier"/>
-              </a:rPr>
-              <a:t>23</a:t>
-            </a:r>
+              <a:t> length_mm)) </a:t>
+            </a:r>
+            <a:r>
+              <a:rPr>
+                <a:solidFill>
+                  <a:srgbClr val="5E5E5E"/>
+                </a:solidFill>
+                <a:latin typeface="Courier"/>
+              </a:rPr>
+              <a:t>+</a:t>
+            </a:r>
+            <a:br/>
             <a:r>
               <a:rPr>
                 <a:solidFill>
@@ -5540,16 +6708,16 @@
                 </a:solidFill>
                 <a:latin typeface="Courier"/>
               </a:rPr>
-              <a:t>, </a:t>
-            </a:r>
-            <a:r>
-              <a:rPr>
-                <a:solidFill>
-                  <a:srgbClr val="AD0000"/>
-                </a:solidFill>
-                <a:latin typeface="Courier"/>
-              </a:rPr>
-              <a:t>25</a:t>
+              <a:t>  </a:t>
+            </a:r>
+            <a:r>
+              <a:rPr>
+                <a:solidFill>
+                  <a:srgbClr val="4758AB"/>
+                </a:solidFill>
+                <a:latin typeface="Courier"/>
+              </a:rPr>
+              <a:t>geom_point</a:t>
             </a:r>
             <a:r>
               <a:rPr>
@@ -5558,137 +6726,55 @@
                 </a:solidFill>
                 <a:latin typeface="Courier"/>
               </a:rPr>
-              <a:t>)      </a:t>
-            </a:r>
-            <a:r>
-              <a:rPr>
-                <a:solidFill>
-                  <a:srgbClr val="5E5E5E"/>
-                </a:solidFill>
-                <a:latin typeface="Courier"/>
-              </a:rPr>
-              <a:t># numeric</a:t>
-            </a:r>
-            <a:br/>
-            <a:r>
-              <a:rPr>
-                <a:solidFill>
-                  <a:srgbClr val="003B4F"/>
-                </a:solidFill>
-                <a:latin typeface="Courier"/>
-              </a:rPr>
-              <a:t>side      &lt;- </a:t>
-            </a:r>
-            <a:r>
-              <a:rPr>
-                <a:solidFill>
-                  <a:srgbClr val="4758AB"/>
-                </a:solidFill>
-                <a:latin typeface="Courier"/>
-              </a:rPr>
-              <a:t>c</a:t>
-            </a:r>
-            <a:r>
-              <a:rPr>
-                <a:solidFill>
-                  <a:srgbClr val="003B4F"/>
-                </a:solidFill>
-                <a:latin typeface="Courier"/>
-              </a:rPr>
-              <a:t>(</a:t>
-            </a:r>
-            <a:r>
-              <a:rPr>
-                <a:solidFill>
-                  <a:srgbClr val="20794D"/>
-                </a:solidFill>
-                <a:latin typeface="Courier"/>
-              </a:rPr>
-              <a:t>"n"</a:t>
-            </a:r>
-            <a:r>
-              <a:rPr>
-                <a:solidFill>
-                  <a:srgbClr val="003B4F"/>
-                </a:solidFill>
-                <a:latin typeface="Courier"/>
-              </a:rPr>
-              <a:t>, </a:t>
-            </a:r>
-            <a:r>
-              <a:rPr>
-                <a:solidFill>
-                  <a:srgbClr val="20794D"/>
-                </a:solidFill>
-                <a:latin typeface="Courier"/>
-              </a:rPr>
-              <a:t>"s"</a:t>
-            </a:r>
-            <a:r>
-              <a:rPr>
-                <a:solidFill>
-                  <a:srgbClr val="003B4F"/>
-                </a:solidFill>
-                <a:latin typeface="Courier"/>
-              </a:rPr>
-              <a:t>)            </a:t>
-            </a:r>
-            <a:r>
-              <a:rPr>
-                <a:solidFill>
-                  <a:srgbClr val="5E5E5E"/>
-                </a:solidFill>
-                <a:latin typeface="Courier"/>
-              </a:rPr>
-              <a:t># character — needs quotes</a:t>
-            </a:r>
-          </a:p>
-          <a:p>
-            <a:pPr lvl="0" indent="0" marL="0">
-              <a:buNone/>
-            </a:pPr>
-            <a:r>
-              <a:rPr/>
-              <a:t>The </a:t>
-            </a:r>
-            <a:r>
-              <a:rPr b="1"/>
-              <a:t>console forgets</a:t>
-            </a:r>
-            <a:r>
-              <a:rPr/>
-              <a:t>. A </a:t>
-            </a:r>
-            <a:r>
-              <a:rPr b="1"/>
-              <a:t>script</a:t>
-            </a:r>
-            <a:r>
-              <a:rPr/>
-              <a:t> (</a:t>
-            </a:r>
-            <a:r>
-              <a:rPr>
-                <a:latin typeface="Courier"/>
-              </a:rPr>
-              <a:t>.R</a:t>
-            </a:r>
-            <a:r>
-              <a:rPr/>
-              <a:t> file) remembers:</a:t>
-            </a:r>
-          </a:p>
-          <a:p>
-            <a:pPr lvl="0"/>
-            <a:r>
-              <a:rPr b="1"/>
-              <a:t>File → New File → R File</a:t>
-            </a:r>
-            <a:r>
-              <a:rPr/>
-              <a:t>, save it, run lines with Ctrl/Cmd+Enter</a:t>
-            </a:r>
-          </a:p>
+              <a:t>()</a:t>
+            </a:r>
+          </a:p>
+        </p:txBody>
+      </p:sp>
+      <p:pic>
+        <p:nvPicPr>
+          <p:cNvPr descr="01_getting_started_lecture_files/figure-pptx/unnamed-chunk-3-1.png" id="0" name="Picture 1"/>
+          <p:cNvPicPr>
+            <a:picLocks noGrp="1" noChangeAspect="1"/>
+          </p:cNvPicPr>
+          <p:nvPr/>
+        </p:nvPicPr>
+        <p:blipFill>
+          <a:blip r:embed="rId2"/>
+          <a:stretch>
+            <a:fillRect/>
+          </a:stretch>
+        </p:blipFill>
+        <p:spPr bwMode="auto">
+          <a:xfrm>
+            <a:off x="990600" y="1625600"/>
+            <a:ext cx="2959100" cy="2959100"/>
+          </a:xfrm>
+          <a:prstGeom prst="rect">
+            <a:avLst/>
+          </a:prstGeom>
+          <a:noFill/>
+          <a:ln w="9525">
+            <a:noFill/>
+            <a:headEnd/>
+            <a:tailEnd/>
+          </a:ln>
+        </p:spPr>
+      </p:pic>
+      <p:sp>
+        <p:nvSpPr>
+          <p:cNvPr id="4" name="Content Placeholder 3"/>
+          <p:cNvSpPr>
+            <a:spLocks noGrp="1"/>
+          </p:cNvSpPr>
+          <p:nvPr>
+            <p:ph idx="2" sz="half"/>
+          </p:nvPr>
+        </p:nvSpPr>
+        <p:spPr/>
+        <p:txBody>
+          <a:bodyPr/>
+          <a:lstStyle/>
           <a:p>
             <a:pPr lvl="0" indent="0" marL="1270000">
               <a:buNone/>
@@ -5712,30 +6798,34 @@
               <a:buNone/>
             </a:pPr>
             <a:r>
+              <a:rPr sz="2000">
+                <a:latin typeface="Courier"/>
+              </a:rPr>
+              <a:t>+</a:t>
+            </a:r>
+            <a:r>
               <a:rPr sz="2000"/>
-              <a:t>Without quotes, </a:t>
-            </a:r>
-            <a:r>
-              <a:rPr sz="2000">
-                <a:latin typeface="Courier"/>
-              </a:rPr>
-              <a:t>s</a:t>
+              <a:t> sits at the </a:t>
+            </a:r>
+            <a:r>
+              <a:rPr sz="2000" b="1"/>
+              <a:t>end</a:t>
             </a:r>
             <a:r>
               <a:rPr sz="2000"/>
-              <a:t> means “find an object called s,” not the text “s.” R will error if no such object exists.</a:t>
-            </a:r>
-          </a:p>
-        </p:txBody>
-      </p:sp>
-      <p:sp>
-        <p:nvSpPr>
-          <p:cNvPr id="4" name="Content Placeholder 3"/>
-          <p:cNvSpPr>
-            <a:spLocks noGrp="1"/>
-          </p:cNvSpPr>
-          <p:nvPr>
-            <p:ph idx="2" sz="half"/>
+              <a:t> of a line, never the start.</a:t>
+            </a:r>
+          </a:p>
+        </p:txBody>
+      </p:sp>
+      <p:sp>
+        <p:nvSpPr>
+          <p:cNvPr id="5" name="Text Placeholder 4"/>
+          <p:cNvSpPr>
+            <a:spLocks noGrp="1"/>
+          </p:cNvSpPr>
+          <p:nvPr>
+            <p:ph idx="3" sz="quarter" type="body"/>
           </p:nvPr>
         </p:nvSpPr>
         <p:spPr/>
@@ -5765,8 +6855,12 @@
               <a:buNone/>
             </a:pPr>
             <a:r>
+              <a:rPr sz="2000" i="1"/>
+              <a:t>Seeing</a:t>
+            </a:r>
+            <a:r>
               <a:rPr sz="2000"/>
-              <a:t>Console = scratch paper. Script = the lab notebook you keep and rerun.</a:t>
+              <a:t> your data is the single most important habit in this course — before you summarize or test anything, plot it.</a:t>
             </a:r>
           </a:p>
         </p:txBody>
@@ -5795,12 +6889,12 @@
       </p:grpSpPr>
       <p:sp>
         <p:nvSpPr>
-          <p:cNvPr id="3" name="Content Placeholder 2"/>
-          <p:cNvSpPr>
-            <a:spLocks noGrp="1"/>
-          </p:cNvSpPr>
-          <p:nvPr>
-            <p:ph idx="1"/>
+          <p:cNvPr id="2" name="Title 1"/>
+          <p:cNvSpPr>
+            <a:spLocks noGrp="1"/>
+          </p:cNvSpPr>
+          <p:nvPr>
+            <p:ph type="title"/>
           </p:nvPr>
         </p:nvSpPr>
         <p:spPr/>
@@ -5809,67 +6903,29 @@
           <a:lstStyle/>
           <a:p>
             <a:pPr lvl="0" indent="0" marL="0">
-              <a:spcBef>
-                <a:spcPts val="3000"/>
-              </a:spcBef>
-              <a:buNone/>
-            </a:pPr>
-            <a:r>
-              <a:rPr b="1"/>
-              <a:t>Packages — extending what R can do</a:t>
-            </a:r>
-          </a:p>
-        </p:txBody>
-      </p:sp>
-    </p:spTree>
-  </p:cSld>
-</p:sld>
-</file>
-
-<file path=ppt/slides/slide24.xml><?xml version="1.0" encoding="utf-8"?>
-<p:sld xmlns:a="http://schemas.openxmlformats.org/drawingml/2006/main" xmlns:r="http://schemas.openxmlformats.org/officeDocument/2006/relationships" xmlns:p="http://schemas.openxmlformats.org/presentationml/2006/main">
-  <p:cSld>
-    <p:spTree>
-      <p:nvGrpSpPr>
-        <p:cNvPr id="1" name=""/>
-        <p:cNvGrpSpPr/>
-        <p:nvPr/>
-      </p:nvGrpSpPr>
-      <p:grpSpPr>
-        <a:xfrm>
-          <a:off x="0" y="0"/>
-          <a:ext cx="0" cy="0"/>
-          <a:chOff x="0" y="0"/>
-          <a:chExt cx="0" cy="0"/>
-        </a:xfrm>
-      </p:grpSpPr>
-      <p:sp>
-        <p:nvSpPr>
-          <p:cNvPr id="3" name="Content Placeholder 2"/>
-          <p:cNvSpPr>
-            <a:spLocks noGrp="1"/>
-          </p:cNvSpPr>
-          <p:nvPr>
-            <p:ph idx="1" sz="half"/>
-          </p:nvPr>
-        </p:nvSpPr>
-        <p:spPr/>
-        <p:txBody>
-          <a:bodyPr/>
-          <a:lstStyle/>
-          <a:p>
-            <a:pPr lvl="0" indent="0" marL="0">
-              <a:buNone/>
-            </a:pPr>
-            <a:r>
-              <a:rPr b="1"/>
-              <a:t>Install once</a:t>
-            </a:r>
-            <a:r>
-              <a:rPr/>
-              <a:t>, in the console:</a:t>
-            </a:r>
-          </a:p>
+              <a:buNone/>
+            </a:pPr>
+            <a:r>
+              <a:rPr/>
+              <a:t>One layer at a time</a:t>
+            </a:r>
+          </a:p>
+        </p:txBody>
+      </p:sp>
+      <p:sp>
+        <p:nvSpPr>
+          <p:cNvPr id="3" name="Text Placeholder 2"/>
+          <p:cNvSpPr>
+            <a:spLocks noGrp="1"/>
+          </p:cNvSpPr>
+          <p:nvPr>
+            <p:ph idx="1" type="body"/>
+          </p:nvPr>
+        </p:nvSpPr>
+        <p:spPr/>
+        <p:txBody>
+          <a:bodyPr/>
+          <a:lstStyle/>
           <a:p>
             <a:pPr lvl="0" indent="0">
               <a:buNone/>
@@ -5881,7 +6937,7 @@
                 </a:solidFill>
                 <a:latin typeface="Courier"/>
               </a:rPr>
-              <a:t>install.packages</a:t>
+              <a:t>ggplot</a:t>
             </a:r>
             <a:r>
               <a:rPr>
@@ -5890,16 +6946,234 @@
                 </a:solidFill>
                 <a:latin typeface="Courier"/>
               </a:rPr>
+              <a:t>(pine_df, </a:t>
+            </a:r>
+            <a:r>
+              <a:rPr>
+                <a:solidFill>
+                  <a:srgbClr val="4758AB"/>
+                </a:solidFill>
+                <a:latin typeface="Courier"/>
+              </a:rPr>
+              <a:t>aes</a:t>
+            </a:r>
+            <a:r>
+              <a:rPr>
+                <a:solidFill>
+                  <a:srgbClr val="003B4F"/>
+                </a:solidFill>
+                <a:latin typeface="Courier"/>
+              </a:rPr>
               <a:t>(</a:t>
             </a:r>
             <a:r>
               <a:rPr>
                 <a:solidFill>
+                  <a:srgbClr val="657422"/>
+                </a:solidFill>
+                <a:latin typeface="Courier"/>
+              </a:rPr>
+              <a:t>x =</a:t>
+            </a:r>
+            <a:r>
+              <a:rPr>
+                <a:solidFill>
+                  <a:srgbClr val="003B4F"/>
+                </a:solidFill>
+                <a:latin typeface="Courier"/>
+              </a:rPr>
+              <a:t> wind, </a:t>
+            </a:r>
+            <a:r>
+              <a:rPr>
+                <a:solidFill>
+                  <a:srgbClr val="657422"/>
+                </a:solidFill>
+                <a:latin typeface="Courier"/>
+              </a:rPr>
+              <a:t>y =</a:t>
+            </a:r>
+            <a:r>
+              <a:rPr>
+                <a:solidFill>
+                  <a:srgbClr val="003B4F"/>
+                </a:solidFill>
+                <a:latin typeface="Courier"/>
+              </a:rPr>
+              <a:t> length_mm)) </a:t>
+            </a:r>
+            <a:r>
+              <a:rPr>
+                <a:solidFill>
+                  <a:srgbClr val="5E5E5E"/>
+                </a:solidFill>
+                <a:latin typeface="Courier"/>
+              </a:rPr>
+              <a:t>+</a:t>
+            </a:r>
+            <a:br/>
+            <a:r>
+              <a:rPr>
+                <a:solidFill>
+                  <a:srgbClr val="003B4F"/>
+                </a:solidFill>
+                <a:latin typeface="Courier"/>
+              </a:rPr>
+              <a:t>  </a:t>
+            </a:r>
+            <a:r>
+              <a:rPr>
+                <a:solidFill>
+                  <a:srgbClr val="4758AB"/>
+                </a:solidFill>
+                <a:latin typeface="Courier"/>
+              </a:rPr>
+              <a:t>geom_boxplot</a:t>
+            </a:r>
+            <a:r>
+              <a:rPr>
+                <a:solidFill>
+                  <a:srgbClr val="003B4F"/>
+                </a:solidFill>
+                <a:latin typeface="Courier"/>
+              </a:rPr>
+              <a:t>() </a:t>
+            </a:r>
+            <a:r>
+              <a:rPr>
+                <a:solidFill>
+                  <a:srgbClr val="5E5E5E"/>
+                </a:solidFill>
+                <a:latin typeface="Courier"/>
+              </a:rPr>
+              <a:t>+</a:t>
+            </a:r>
+            <a:br/>
+            <a:r>
+              <a:rPr>
+                <a:solidFill>
+                  <a:srgbClr val="003B4F"/>
+                </a:solidFill>
+                <a:latin typeface="Courier"/>
+              </a:rPr>
+              <a:t>  </a:t>
+            </a:r>
+            <a:r>
+              <a:rPr>
+                <a:solidFill>
+                  <a:srgbClr val="4758AB"/>
+                </a:solidFill>
+                <a:latin typeface="Courier"/>
+              </a:rPr>
+              <a:t>geom_jitter</a:t>
+            </a:r>
+            <a:r>
+              <a:rPr>
+                <a:solidFill>
+                  <a:srgbClr val="003B4F"/>
+                </a:solidFill>
+                <a:latin typeface="Courier"/>
+              </a:rPr>
+              <a:t>(</a:t>
+            </a:r>
+            <a:r>
+              <a:rPr>
+                <a:solidFill>
+                  <a:srgbClr val="657422"/>
+                </a:solidFill>
+                <a:latin typeface="Courier"/>
+              </a:rPr>
+              <a:t>width =</a:t>
+            </a:r>
+            <a:r>
+              <a:rPr>
+                <a:solidFill>
+                  <a:srgbClr val="003B4F"/>
+                </a:solidFill>
+                <a:latin typeface="Courier"/>
+              </a:rPr>
+              <a:t> </a:t>
+            </a:r>
+            <a:r>
+              <a:rPr>
+                <a:solidFill>
+                  <a:srgbClr val="AD0000"/>
+                </a:solidFill>
+                <a:latin typeface="Courier"/>
+              </a:rPr>
+              <a:t>0.15</a:t>
+            </a:r>
+            <a:r>
+              <a:rPr>
+                <a:solidFill>
+                  <a:srgbClr val="003B4F"/>
+                </a:solidFill>
+                <a:latin typeface="Courier"/>
+              </a:rPr>
+              <a:t>, </a:t>
+            </a:r>
+            <a:r>
+              <a:rPr>
+                <a:solidFill>
+                  <a:srgbClr val="657422"/>
+                </a:solidFill>
+                <a:latin typeface="Courier"/>
+              </a:rPr>
+              <a:t>alpha =</a:t>
+            </a:r>
+            <a:r>
+              <a:rPr>
+                <a:solidFill>
+                  <a:srgbClr val="003B4F"/>
+                </a:solidFill>
+                <a:latin typeface="Courier"/>
+              </a:rPr>
+              <a:t> </a:t>
+            </a:r>
+            <a:r>
+              <a:rPr>
+                <a:solidFill>
+                  <a:srgbClr val="AD0000"/>
+                </a:solidFill>
+                <a:latin typeface="Courier"/>
+              </a:rPr>
+              <a:t>0.6</a:t>
+            </a:r>
+            <a:r>
+              <a:rPr>
+                <a:solidFill>
+                  <a:srgbClr val="003B4F"/>
+                </a:solidFill>
+                <a:latin typeface="Courier"/>
+              </a:rPr>
+              <a:t>, </a:t>
+            </a:r>
+            <a:r>
+              <a:rPr>
+                <a:solidFill>
+                  <a:srgbClr val="657422"/>
+                </a:solidFill>
+                <a:latin typeface="Courier"/>
+              </a:rPr>
+              <a:t>color =</a:t>
+            </a:r>
+            <a:r>
+              <a:rPr>
+                <a:solidFill>
+                  <a:srgbClr val="003B4F"/>
+                </a:solidFill>
+                <a:latin typeface="Courier"/>
+              </a:rPr>
+              <a:t> </a:t>
+            </a:r>
+            <a:r>
+              <a:rPr>
+                <a:solidFill>
                   <a:srgbClr val="20794D"/>
                 </a:solidFill>
                 <a:latin typeface="Courier"/>
               </a:rPr>
-              <a:t>"tidyverse"</a:t>
+              <a:t>"tomato"</a:t>
             </a:r>
             <a:r>
               <a:rPr>
@@ -5908,1179 +7182,172 @@
                 </a:solidFill>
                 <a:latin typeface="Courier"/>
               </a:rPr>
+              <a:t>) </a:t>
+            </a:r>
+            <a:r>
+              <a:rPr>
+                <a:solidFill>
+                  <a:srgbClr val="5E5E5E"/>
+                </a:solidFill>
+                <a:latin typeface="Courier"/>
+              </a:rPr>
+              <a:t>+</a:t>
+            </a:r>
+            <a:br/>
+            <a:r>
+              <a:rPr>
+                <a:solidFill>
+                  <a:srgbClr val="003B4F"/>
+                </a:solidFill>
+                <a:latin typeface="Courier"/>
+              </a:rPr>
+              <a:t>  </a:t>
+            </a:r>
+            <a:r>
+              <a:rPr>
+                <a:solidFill>
+                  <a:srgbClr val="4758AB"/>
+                </a:solidFill>
+                <a:latin typeface="Courier"/>
+              </a:rPr>
+              <a:t>labs</a:t>
+            </a:r>
+            <a:r>
+              <a:rPr>
+                <a:solidFill>
+                  <a:srgbClr val="003B4F"/>
+                </a:solidFill>
+                <a:latin typeface="Courier"/>
+              </a:rPr>
+              <a:t>(</a:t>
+            </a:r>
+            <a:r>
+              <a:rPr>
+                <a:solidFill>
+                  <a:srgbClr val="657422"/>
+                </a:solidFill>
+                <a:latin typeface="Courier"/>
+              </a:rPr>
+              <a:t>x =</a:t>
+            </a:r>
+            <a:r>
+              <a:rPr>
+                <a:solidFill>
+                  <a:srgbClr val="003B4F"/>
+                </a:solidFill>
+                <a:latin typeface="Courier"/>
+              </a:rPr>
+              <a:t> </a:t>
+            </a:r>
+            <a:r>
+              <a:rPr>
+                <a:solidFill>
+                  <a:srgbClr val="20794D"/>
+                </a:solidFill>
+                <a:latin typeface="Courier"/>
+              </a:rPr>
+              <a:t>"Side of tree"</a:t>
+            </a:r>
+            <a:r>
+              <a:rPr>
+                <a:solidFill>
+                  <a:srgbClr val="003B4F"/>
+                </a:solidFill>
+                <a:latin typeface="Courier"/>
+              </a:rPr>
+              <a:t>,</a:t>
+            </a:r>
+            <a:br/>
+            <a:r>
+              <a:rPr>
+                <a:solidFill>
+                  <a:srgbClr val="003B4F"/>
+                </a:solidFill>
+                <a:latin typeface="Courier"/>
+              </a:rPr>
+              <a:t>       </a:t>
+            </a:r>
+            <a:r>
+              <a:rPr>
+                <a:solidFill>
+                  <a:srgbClr val="657422"/>
+                </a:solidFill>
+                <a:latin typeface="Courier"/>
+              </a:rPr>
+              <a:t>y =</a:t>
+            </a:r>
+            <a:r>
+              <a:rPr>
+                <a:solidFill>
+                  <a:srgbClr val="003B4F"/>
+                </a:solidFill>
+                <a:latin typeface="Courier"/>
+              </a:rPr>
+              <a:t> </a:t>
+            </a:r>
+            <a:r>
+              <a:rPr>
+                <a:solidFill>
+                  <a:srgbClr val="20794D"/>
+                </a:solidFill>
+                <a:latin typeface="Courier"/>
+              </a:rPr>
+              <a:t>"Needle length (mm)"</a:t>
+            </a:r>
+            <a:r>
+              <a:rPr>
+                <a:solidFill>
+                  <a:srgbClr val="003B4F"/>
+                </a:solidFill>
+                <a:latin typeface="Courier"/>
+              </a:rPr>
+              <a:t>,</a:t>
+            </a:r>
+            <a:br/>
+            <a:r>
+              <a:rPr>
+                <a:solidFill>
+                  <a:srgbClr val="003B4F"/>
+                </a:solidFill>
+                <a:latin typeface="Courier"/>
+              </a:rPr>
+              <a:t>       </a:t>
+            </a:r>
+            <a:r>
+              <a:rPr>
+                <a:solidFill>
+                  <a:srgbClr val="657422"/>
+                </a:solidFill>
+                <a:latin typeface="Courier"/>
+              </a:rPr>
+              <a:t>title =</a:t>
+            </a:r>
+            <a:r>
+              <a:rPr>
+                <a:solidFill>
+                  <a:srgbClr val="003B4F"/>
+                </a:solidFill>
+                <a:latin typeface="Courier"/>
+              </a:rPr>
+              <a:t> </a:t>
+            </a:r>
+            <a:r>
+              <a:rPr>
+                <a:solidFill>
+                  <a:srgbClr val="20794D"/>
+                </a:solidFill>
+                <a:latin typeface="Courier"/>
+              </a:rPr>
+              <a:t>"Needle length by wind exposure"</a:t>
+            </a:r>
+            <a:r>
+              <a:rPr>
+                <a:solidFill>
+                  <a:srgbClr val="003B4F"/>
+                </a:solidFill>
+                <a:latin typeface="Courier"/>
+              </a:rPr>
               <a:t>)</a:t>
-            </a:r>
-          </a:p>
-          <a:p>
-            <a:pPr lvl="0" indent="0" marL="0">
-              <a:buNone/>
-            </a:pPr>
-            <a:r>
-              <a:rPr b="1"/>
-              <a:t>Load every session</a:t>
-            </a:r>
-            <a:r>
-              <a:rPr/>
-              <a:t>, at the top of every script:</a:t>
-            </a:r>
-          </a:p>
-          <a:p>
-            <a:pPr lvl="0" indent="0">
-              <a:buNone/>
-            </a:pPr>
-            <a:r>
-              <a:rPr>
-                <a:solidFill>
-                  <a:srgbClr val="4758AB"/>
-                </a:solidFill>
-                <a:latin typeface="Courier"/>
-              </a:rPr>
-              <a:t>library</a:t>
-            </a:r>
-            <a:r>
-              <a:rPr>
-                <a:solidFill>
-                  <a:srgbClr val="003B4F"/>
-                </a:solidFill>
-                <a:latin typeface="Courier"/>
-              </a:rPr>
-              <a:t>(tidyverse)   </a:t>
-            </a:r>
-            <a:r>
-              <a:rPr>
-                <a:solidFill>
-                  <a:srgbClr val="5E5E5E"/>
-                </a:solidFill>
-                <a:latin typeface="Courier"/>
-              </a:rPr>
-              <a:t># wrangling + ggplot2</a:t>
-            </a:r>
-          </a:p>
-          <a:p>
-            <a:pPr lvl="0" indent="0" marL="1270000">
-              <a:buNone/>
-            </a:pPr>
-            <a:r>
-              <a:rPr sz="2000" b="1"/>
-              <a:t>Warning</a:t>
-            </a:r>
-          </a:p>
-          <a:p>
-            <a:pPr lvl="0" indent="0" marL="1270000">
-              <a:buNone/>
-            </a:pPr>
-            <a:r>
-              <a:rPr sz="2000" b="1"/>
-              <a:t>⚠️ Watch out!</a:t>
-            </a:r>
-          </a:p>
-          <a:p>
-            <a:pPr lvl="0" indent="0" marL="1270000">
-              <a:buNone/>
-            </a:pPr>
-            <a:r>
-              <a:rPr sz="2000" i="1"/>
-              <a:t>“could not find function…”</a:t>
-            </a:r>
-            <a:r>
-              <a:rPr sz="2000"/>
-              <a:t> almost always means you forgot the </a:t>
-            </a:r>
-            <a:r>
-              <a:rPr sz="2000">
-                <a:latin typeface="Courier"/>
-              </a:rPr>
-              <a:t>library()</a:t>
-            </a:r>
-            <a:r>
-              <a:rPr sz="2000"/>
-              <a:t> line for that session.</a:t>
-            </a:r>
-          </a:p>
-        </p:txBody>
-      </p:sp>
-      <p:sp>
-        <p:nvSpPr>
-          <p:cNvPr id="4" name="Content Placeholder 3"/>
-          <p:cNvSpPr>
-            <a:spLocks noGrp="1"/>
-          </p:cNvSpPr>
-          <p:nvPr>
-            <p:ph idx="2" sz="half"/>
-          </p:nvPr>
-        </p:nvSpPr>
-        <p:spPr/>
-        <p:txBody>
-          <a:bodyPr/>
-          <a:lstStyle/>
-          <a:p>
-            <a:pPr lvl="0" indent="0" marL="1270000">
-              <a:buNone/>
-            </a:pPr>
-            <a:r>
-              <a:rPr sz="2000" b="1"/>
-              <a:t>Note</a:t>
-            </a:r>
-          </a:p>
-          <a:p>
-            <a:pPr lvl="0" indent="0" marL="1270000">
-              <a:buNone/>
-            </a:pPr>
-            <a:r>
-              <a:rPr sz="2000" b="1"/>
-              <a:t>📖 New words</a:t>
-            </a:r>
-          </a:p>
-          <a:p>
-            <a:pPr lvl="0"/>
-            <a:r>
-              <a:rPr sz="2000" b="1"/>
-              <a:t>Package</a:t>
-            </a:r>
-            <a:r>
-              <a:rPr sz="2000"/>
-              <a:t> — the installed toolbox (once)</a:t>
-            </a:r>
-          </a:p>
-          <a:p>
-            <a:pPr lvl="0"/>
-            <a:r>
-              <a:rPr sz="2000" b="1"/>
-              <a:t>Library</a:t>
-            </a:r>
-            <a:r>
-              <a:rPr sz="2000"/>
-              <a:t> — loading it for today’s session (every time)</a:t>
-            </a:r>
-          </a:p>
-        </p:txBody>
-      </p:sp>
-    </p:spTree>
-  </p:cSld>
-</p:sld>
-</file>
-
-<file path=ppt/slides/slide25.xml><?xml version="1.0" encoding="utf-8"?>
-<p:sld xmlns:a="http://schemas.openxmlformats.org/drawingml/2006/main" xmlns:r="http://schemas.openxmlformats.org/officeDocument/2006/relationships" xmlns:p="http://schemas.openxmlformats.org/presentationml/2006/main">
-  <p:cSld>
-    <p:spTree>
-      <p:nvGrpSpPr>
-        <p:cNvPr id="1" name=""/>
-        <p:cNvGrpSpPr/>
-        <p:nvPr/>
-      </p:nvGrpSpPr>
-      <p:grpSpPr>
-        <a:xfrm>
-          <a:off x="0" y="0"/>
-          <a:ext cx="0" cy="0"/>
-          <a:chOff x="0" y="0"/>
-          <a:chExt cx="0" cy="0"/>
-        </a:xfrm>
-      </p:grpSpPr>
-      <p:sp>
-        <p:nvSpPr>
-          <p:cNvPr id="2" name="Title 1"/>
-          <p:cNvSpPr>
-            <a:spLocks noGrp="1"/>
-          </p:cNvSpPr>
-          <p:nvPr>
-            <p:ph type="title"/>
-          </p:nvPr>
-        </p:nvSpPr>
-        <p:spPr/>
-        <p:txBody>
-          <a:bodyPr/>
-          <a:lstStyle/>
-          <a:p>
-            <a:pPr lvl="0" indent="0" marL="0">
-              <a:buNone/>
-            </a:pPr>
-            <a:r>
-              <a:rPr/>
-              <a:t>Part 4 · Load Data and Make Your First Plot</a:t>
-            </a:r>
-          </a:p>
-        </p:txBody>
-      </p:sp>
-      <p:sp>
-        <p:nvSpPr>
-          <p:cNvPr id="3" name="Content Placeholder 2"/>
-          <p:cNvSpPr>
-            <a:spLocks noGrp="1"/>
-          </p:cNvSpPr>
-          <p:nvPr>
-            <p:ph idx="1"/>
-          </p:nvPr>
-        </p:nvSpPr>
-        <p:spPr/>
-        <p:txBody>
-          <a:bodyPr/>
-          <a:lstStyle/>
-          <a:p>
-            <a:pPr lvl="0" indent="0" marL="0">
-              <a:spcBef>
-                <a:spcPts val="3000"/>
-              </a:spcBef>
-              <a:buNone/>
-            </a:pPr>
-            <a:r>
-              <a:rPr b="1"/>
-              <a:t>Bring the data in</a:t>
-            </a:r>
-          </a:p>
-        </p:txBody>
-      </p:sp>
-    </p:spTree>
-  </p:cSld>
-</p:sld>
-</file>
-
-<file path=ppt/slides/slide26.xml><?xml version="1.0" encoding="utf-8"?>
-<p:sld xmlns:a="http://schemas.openxmlformats.org/drawingml/2006/main" xmlns:r="http://schemas.openxmlformats.org/officeDocument/2006/relationships" xmlns:p="http://schemas.openxmlformats.org/presentationml/2006/main">
-  <p:cSld>
-    <p:spTree>
-      <p:nvGrpSpPr>
-        <p:cNvPr id="1" name=""/>
-        <p:cNvGrpSpPr/>
-        <p:nvPr/>
-      </p:nvGrpSpPr>
-      <p:grpSpPr>
-        <a:xfrm>
-          <a:off x="0" y="0"/>
-          <a:ext cx="0" cy="0"/>
-          <a:chOff x="0" y="0"/>
-          <a:chExt cx="0" cy="0"/>
-        </a:xfrm>
-      </p:grpSpPr>
-      <p:sp>
-        <p:nvSpPr>
-          <p:cNvPr id="3" name="Content Placeholder 2"/>
-          <p:cNvSpPr>
-            <a:spLocks noGrp="1"/>
-          </p:cNvSpPr>
-          <p:nvPr>
-            <p:ph idx="1" sz="half"/>
-          </p:nvPr>
-        </p:nvSpPr>
-        <p:spPr/>
-        <p:txBody>
-          <a:bodyPr/>
-          <a:lstStyle/>
-          <a:p>
-            <a:pPr lvl="0" indent="0" marL="0">
-              <a:buNone/>
-            </a:pPr>
-            <a:r>
-              <a:rPr/>
-              <a:t>Put the file in </a:t>
-            </a:r>
-            <a:r>
-              <a:rPr>
-                <a:latin typeface="Courier"/>
-              </a:rPr>
-              <a:t>data/</a:t>
-            </a:r>
-            <a:r>
-              <a:rPr/>
-              <a:t>, then:</a:t>
-            </a:r>
-          </a:p>
-          <a:p>
-            <a:pPr lvl="0" indent="0">
-              <a:buNone/>
-            </a:pPr>
-            <a:r>
-              <a:rPr>
-                <a:solidFill>
-                  <a:srgbClr val="4758AB"/>
-                </a:solidFill>
-                <a:latin typeface="Courier"/>
-              </a:rPr>
-              <a:t>library</a:t>
-            </a:r>
-            <a:r>
-              <a:rPr>
-                <a:solidFill>
-                  <a:srgbClr val="003B4F"/>
-                </a:solidFill>
-                <a:latin typeface="Courier"/>
-              </a:rPr>
-              <a:t>(tidyverse)</a:t>
-            </a:r>
-            <a:br/>
-            <a:br/>
-            <a:r>
-              <a:rPr>
-                <a:solidFill>
-                  <a:srgbClr val="003B4F"/>
-                </a:solidFill>
-                <a:latin typeface="Courier"/>
-              </a:rPr>
-              <a:t>pine_df &lt;- </a:t>
-            </a:r>
-            <a:r>
-              <a:rPr>
-                <a:solidFill>
-                  <a:srgbClr val="4758AB"/>
-                </a:solidFill>
-                <a:latin typeface="Courier"/>
-              </a:rPr>
-              <a:t>read_csv</a:t>
-            </a:r>
-            <a:r>
-              <a:rPr>
-                <a:solidFill>
-                  <a:srgbClr val="003B4F"/>
-                </a:solidFill>
-                <a:latin typeface="Courier"/>
-              </a:rPr>
-              <a:t>(</a:t>
-            </a:r>
-            <a:r>
-              <a:rPr>
-                <a:solidFill>
-                  <a:srgbClr val="20794D"/>
-                </a:solidFill>
-                <a:latin typeface="Courier"/>
-              </a:rPr>
-              <a:t>"data/pine_needles.csv"</a:t>
-            </a:r>
-            <a:r>
-              <a:rPr>
-                <a:solidFill>
-                  <a:srgbClr val="003B4F"/>
-                </a:solidFill>
-                <a:latin typeface="Courier"/>
-              </a:rPr>
-              <a:t>)</a:t>
-            </a:r>
-          </a:p>
-          <a:p>
-            <a:pPr lvl="0" indent="0" marL="1270000">
-              <a:buNone/>
-            </a:pPr>
-            <a:r>
-              <a:rPr sz="2000" b="1"/>
-              <a:t>Note</a:t>
-            </a:r>
-          </a:p>
-          <a:p>
-            <a:pPr lvl="0" indent="0" marL="1270000">
-              <a:buNone/>
-            </a:pPr>
-            <a:r>
-              <a:rPr sz="2000" b="1"/>
-              <a:t>✅ Key idea</a:t>
-            </a:r>
-          </a:p>
-          <a:p>
-            <a:pPr lvl="0" indent="0" marL="1270000">
-              <a:buNone/>
-            </a:pPr>
-            <a:r>
-              <a:rPr sz="2000">
-                <a:latin typeface="Courier"/>
-              </a:rPr>
-              <a:t>read_csv()</a:t>
-            </a:r>
-            <a:r>
-              <a:rPr sz="2000"/>
-              <a:t> comes free with </a:t>
-            </a:r>
-            <a:r>
-              <a:rPr sz="2000">
-                <a:latin typeface="Courier"/>
-              </a:rPr>
-              <a:t>library(tidyverse)</a:t>
-            </a:r>
-            <a:r>
-              <a:rPr sz="2000"/>
-              <a:t>. Your file’s first row becomes the </a:t>
-            </a:r>
-            <a:r>
-              <a:rPr sz="2000" b="1"/>
-              <a:t>column names</a:t>
-            </a:r>
-            <a:r>
-              <a:rPr sz="2000"/>
-              <a:t> in R.</a:t>
-            </a:r>
-          </a:p>
-        </p:txBody>
-      </p:sp>
-      <p:sp>
-        <p:nvSpPr>
-          <p:cNvPr id="4" name="Content Placeholder 3"/>
-          <p:cNvSpPr>
-            <a:spLocks noGrp="1"/>
-          </p:cNvSpPr>
-          <p:nvPr>
-            <p:ph idx="2" sz="half"/>
-          </p:nvPr>
-        </p:nvSpPr>
-        <p:spPr/>
-        <p:txBody>
-          <a:bodyPr/>
-          <a:lstStyle/>
-          <a:p>
-            <a:pPr lvl="0" indent="0" marL="1270000">
-              <a:buNone/>
-            </a:pPr>
-            <a:r>
-              <a:rPr sz="2000" b="1"/>
-              <a:t>Note</a:t>
-            </a:r>
-          </a:p>
-          <a:p>
-            <a:pPr lvl="0" indent="0" marL="1270000">
-              <a:buNone/>
-            </a:pPr>
-            <a:r>
-              <a:rPr sz="2000" b="1"/>
-              <a:t>Our columns</a:t>
-            </a:r>
-          </a:p>
-          <a:p>
-            <a:pPr lvl="0"/>
-            <a:r>
-              <a:rPr sz="2000">
-                <a:latin typeface="Courier"/>
-              </a:rPr>
-              <a:t>n_s</a:t>
-            </a:r>
-            <a:r>
-              <a:rPr sz="2000"/>
-              <a:t> — </a:t>
-            </a:r>
-            <a:r>
-              <a:rPr sz="2000">
-                <a:latin typeface="Courier"/>
-              </a:rPr>
-              <a:t>"n"</a:t>
-            </a:r>
-            <a:r>
-              <a:rPr sz="2000"/>
-              <a:t> (sheltered/lee) or </a:t>
-            </a:r>
-            <a:r>
-              <a:rPr sz="2000">
-                <a:latin typeface="Courier"/>
-              </a:rPr>
-              <a:t>"s"</a:t>
-            </a:r>
-            <a:r>
-              <a:rPr sz="2000"/>
-              <a:t> (exposed/windward)</a:t>
-            </a:r>
-          </a:p>
-          <a:p>
-            <a:pPr lvl="0"/>
-            <a:r>
-              <a:rPr sz="2000">
-                <a:latin typeface="Courier"/>
-              </a:rPr>
-              <a:t>wind</a:t>
-            </a:r>
-            <a:r>
-              <a:rPr sz="2000"/>
-              <a:t> — </a:t>
-            </a:r>
-            <a:r>
-              <a:rPr sz="2000">
-                <a:latin typeface="Courier"/>
-              </a:rPr>
-              <a:t>"lee"</a:t>
-            </a:r>
-            <a:r>
-              <a:rPr sz="2000"/>
-              <a:t> or </a:t>
-            </a:r>
-            <a:r>
-              <a:rPr sz="2000">
-                <a:latin typeface="Courier"/>
-              </a:rPr>
-              <a:t>"wind"</a:t>
-            </a:r>
-            <a:r>
-              <a:rPr sz="2000"/>
-              <a:t>, same grouping said a different way</a:t>
-            </a:r>
-          </a:p>
-          <a:p>
-            <a:pPr lvl="0"/>
-            <a:r>
-              <a:rPr sz="2000">
-                <a:latin typeface="Courier"/>
-              </a:rPr>
-              <a:t>length_mm</a:t>
-            </a:r>
-            <a:r>
-              <a:rPr sz="2000"/>
-              <a:t> — needle length in millimeters</a:t>
-            </a:r>
-          </a:p>
-        </p:txBody>
-      </p:sp>
-    </p:spTree>
-  </p:cSld>
-</p:sld>
-</file>
-
-<file path=ppt/slides/slide27.xml><?xml version="1.0" encoding="utf-8"?>
-<p:sld xmlns:a="http://schemas.openxmlformats.org/drawingml/2006/main" xmlns:r="http://schemas.openxmlformats.org/officeDocument/2006/relationships" xmlns:p="http://schemas.openxmlformats.org/presentationml/2006/main">
-  <p:cSld>
-    <p:spTree>
-      <p:nvGrpSpPr>
-        <p:cNvPr id="1" name=""/>
-        <p:cNvGrpSpPr/>
-        <p:nvPr/>
-      </p:nvGrpSpPr>
-      <p:grpSpPr>
-        <a:xfrm>
-          <a:off x="0" y="0"/>
-          <a:ext cx="0" cy="0"/>
-          <a:chOff x="0" y="0"/>
-          <a:chExt cx="0" cy="0"/>
-        </a:xfrm>
-      </p:grpSpPr>
-      <p:sp>
-        <p:nvSpPr>
-          <p:cNvPr id="3" name="Content Placeholder 2"/>
-          <p:cNvSpPr>
-            <a:spLocks noGrp="1"/>
-          </p:cNvSpPr>
-          <p:nvPr>
-            <p:ph idx="1"/>
-          </p:nvPr>
-        </p:nvSpPr>
-        <p:spPr/>
-        <p:txBody>
-          <a:bodyPr/>
-          <a:lstStyle/>
-          <a:p>
-            <a:pPr lvl="0" indent="0" marL="0">
-              <a:spcBef>
-                <a:spcPts val="3000"/>
-              </a:spcBef>
-              <a:buNone/>
-            </a:pPr>
-            <a:r>
-              <a:rPr b="1"/>
-              <a:t>Look before you trust it</a:t>
-            </a:r>
-          </a:p>
-        </p:txBody>
-      </p:sp>
-    </p:spTree>
-  </p:cSld>
-</p:sld>
-</file>
-
-<file path=ppt/slides/slide28.xml><?xml version="1.0" encoding="utf-8"?>
-<p:sld xmlns:a="http://schemas.openxmlformats.org/drawingml/2006/main" xmlns:r="http://schemas.openxmlformats.org/officeDocument/2006/relationships" xmlns:p="http://schemas.openxmlformats.org/presentationml/2006/main">
-  <p:cSld>
-    <p:spTree>
-      <p:nvGrpSpPr>
-        <p:cNvPr id="1" name=""/>
-        <p:cNvGrpSpPr/>
-        <p:nvPr/>
-      </p:nvGrpSpPr>
-      <p:grpSpPr>
-        <a:xfrm>
-          <a:off x="0" y="0"/>
-          <a:ext cx="0" cy="0"/>
-          <a:chOff x="0" y="0"/>
-          <a:chExt cx="0" cy="0"/>
-        </a:xfrm>
-      </p:grpSpPr>
-      <p:sp>
-        <p:nvSpPr>
-          <p:cNvPr id="3" name="Content Placeholder 2"/>
-          <p:cNvSpPr>
-            <a:spLocks noGrp="1"/>
-          </p:cNvSpPr>
-          <p:nvPr>
-            <p:ph idx="1" sz="half"/>
-          </p:nvPr>
-        </p:nvSpPr>
-        <p:spPr/>
-        <p:txBody>
-          <a:bodyPr/>
-          <a:lstStyle/>
-          <a:p>
-            <a:pPr lvl="0" indent="0">
-              <a:buNone/>
-            </a:pPr>
-            <a:r>
-              <a:rPr>
-                <a:solidFill>
-                  <a:srgbClr val="4758AB"/>
-                </a:solidFill>
-                <a:latin typeface="Courier"/>
-              </a:rPr>
-              <a:t>glimpse</a:t>
-            </a:r>
-            <a:r>
-              <a:rPr>
-                <a:solidFill>
-                  <a:srgbClr val="003B4F"/>
-                </a:solidFill>
-                <a:latin typeface="Courier"/>
-              </a:rPr>
-              <a:t>(pine_df)</a:t>
-            </a:r>
-          </a:p>
-          <a:p>
-            <a:pPr lvl="0" indent="0">
-              <a:buNone/>
-            </a:pPr>
-            <a:r>
-              <a:rPr>
-                <a:latin typeface="Courier"/>
-              </a:rPr>
-              <a:t>Rows: 48
-Columns: 6
-$ date      &lt;chr&gt; "3/20/25", "3/20/25", "3/20/25", "3/20/25", "3/20/25", "3/20…
-$ group     &lt;chr&gt; "cephalopods", "cephalopods", "cephalopods", "cephalopods", …
-$ n_s       &lt;chr&gt; "n", "n", "n", "n", "n", "n", "s", "s", "s", "s", "s", "s", …
-$ wind      &lt;chr&gt; "lee", "lee", "lee", "lee", "lee", "lee", "wind", "wind", "w…
-$ tree_no   &lt;dbl&gt; 1, 1, 1, 1, 1, 1, 1, 1, 1, 1, 1, 1, 2, 2, 2, 2, 2, 2, 2, 2, …
-$ length_mm &lt;dbl&gt; 20, 21, 23, 25, 21, 16, 15, 16, 14, 17, 13, 15, 19, 18, 20, …</a:t>
-            </a:r>
-          </a:p>
-          <a:p>
-            <a:pPr lvl="0" indent="0">
-              <a:buNone/>
-            </a:pPr>
-            <a:r>
-              <a:rPr>
-                <a:solidFill>
-                  <a:srgbClr val="4758AB"/>
-                </a:solidFill>
-                <a:latin typeface="Courier"/>
-              </a:rPr>
-              <a:t>dim</a:t>
-            </a:r>
-            <a:r>
-              <a:rPr>
-                <a:solidFill>
-                  <a:srgbClr val="003B4F"/>
-                </a:solidFill>
-                <a:latin typeface="Courier"/>
-              </a:rPr>
-              <a:t>(pine_df)</a:t>
-            </a:r>
-          </a:p>
-          <a:p>
-            <a:pPr lvl="0" indent="0">
-              <a:buNone/>
-            </a:pPr>
-            <a:r>
-              <a:rPr>
-                <a:latin typeface="Courier"/>
-              </a:rPr>
-              <a:t>[1] 48  6</a:t>
-            </a:r>
-          </a:p>
-          <a:p>
-            <a:pPr lvl="0" indent="0" marL="1270000">
-              <a:buNone/>
-            </a:pPr>
-            <a:r>
-              <a:rPr sz="2000" b="1"/>
-              <a:t>Tip</a:t>
-            </a:r>
-          </a:p>
-          <a:p>
-            <a:pPr lvl="0" indent="0" marL="1270000">
-              <a:buNone/>
-            </a:pPr>
-            <a:r>
-              <a:rPr sz="2000" b="1"/>
-              <a:t>🖐 Notice</a:t>
-            </a:r>
-          </a:p>
-          <a:p>
-            <a:pPr lvl="0" indent="0" marL="1270000">
-              <a:buNone/>
-            </a:pPr>
-            <a:r>
-              <a:rPr sz="2000">
-                <a:latin typeface="Courier"/>
-              </a:rPr>
-              <a:t>n_s</a:t>
-            </a:r>
-            <a:r>
-              <a:rPr sz="2000"/>
-              <a:t> and </a:t>
-            </a:r>
-            <a:r>
-              <a:rPr sz="2000">
-                <a:latin typeface="Courier"/>
-              </a:rPr>
-              <a:t>wind</a:t>
-            </a:r>
-            <a:r>
-              <a:rPr sz="2000"/>
-              <a:t> always travel together — </a:t>
-            </a:r>
-            <a:r>
-              <a:rPr sz="2000">
-                <a:latin typeface="Courier"/>
-              </a:rPr>
-              <a:t>n</a:t>
-            </a:r>
-            <a:r>
-              <a:rPr sz="2000"/>
-              <a:t> with </a:t>
-            </a:r>
-            <a:r>
-              <a:rPr sz="2000">
-                <a:latin typeface="Courier"/>
-              </a:rPr>
-              <a:t>lee</a:t>
-            </a:r>
-            <a:r>
-              <a:rPr sz="2000"/>
-              <a:t>, </a:t>
-            </a:r>
-            <a:r>
-              <a:rPr sz="2000">
-                <a:latin typeface="Courier"/>
-              </a:rPr>
-              <a:t>s</a:t>
-            </a:r>
-            <a:r>
-              <a:rPr sz="2000"/>
-              <a:t> with </a:t>
-            </a:r>
-            <a:r>
-              <a:rPr sz="2000">
-                <a:latin typeface="Courier"/>
-              </a:rPr>
-              <a:t>wind</a:t>
-            </a:r>
-            <a:r>
-              <a:rPr sz="2000"/>
-              <a:t>. Two columns encoding the same grouping. Useful redundancy, or something to simplify? We’ll revisit this in Module 2.</a:t>
-            </a:r>
-          </a:p>
-        </p:txBody>
-      </p:sp>
-      <p:sp>
-        <p:nvSpPr>
-          <p:cNvPr id="4" name="Content Placeholder 3"/>
-          <p:cNvSpPr>
-            <a:spLocks noGrp="1"/>
-          </p:cNvSpPr>
-          <p:nvPr>
-            <p:ph idx="2" sz="half"/>
-          </p:nvPr>
-        </p:nvSpPr>
-        <p:spPr/>
-        <p:txBody>
-          <a:bodyPr/>
-          <a:lstStyle/>
-          <a:p>
-            <a:pPr lvl="0" indent="0" marL="1270000">
-              <a:buNone/>
-            </a:pPr>
-            <a:r>
-              <a:rPr sz="2000" b="1"/>
-              <a:t>Warning</a:t>
-            </a:r>
-          </a:p>
-          <a:p>
-            <a:pPr lvl="0" indent="0" marL="1270000">
-              <a:buNone/>
-            </a:pPr>
-            <a:r>
-              <a:rPr sz="2000" b="1"/>
-              <a:t>⚠️ Watch out!</a:t>
-            </a:r>
-          </a:p>
-          <a:p>
-            <a:pPr lvl="0" indent="0" marL="1270000">
-              <a:buNone/>
-            </a:pPr>
-            <a:r>
-              <a:rPr sz="2000"/>
-              <a:t>If a number column shows as </a:t>
-            </a:r>
-            <a:r>
-              <a:rPr sz="2000">
-                <a:latin typeface="Courier"/>
-              </a:rPr>
-              <a:t>&lt;chr&gt;</a:t>
-            </a:r>
-            <a:r>
-              <a:rPr sz="2000"/>
-              <a:t> in </a:t>
-            </a:r>
-            <a:r>
-              <a:rPr sz="2000">
-                <a:latin typeface="Courier"/>
-              </a:rPr>
-              <a:t>glimpse()</a:t>
-            </a:r>
-            <a:r>
-              <a:rPr sz="2000"/>
-              <a:t>, a stray letter or comma is hiding in that column.</a:t>
-            </a:r>
-          </a:p>
-        </p:txBody>
-      </p:sp>
-    </p:spTree>
-  </p:cSld>
-</p:sld>
-</file>
-
-<file path=ppt/slides/slide29.xml><?xml version="1.0" encoding="utf-8"?>
-<p:sld xmlns:a="http://schemas.openxmlformats.org/drawingml/2006/main" xmlns:r="http://schemas.openxmlformats.org/officeDocument/2006/relationships" xmlns:p="http://schemas.openxmlformats.org/presentationml/2006/main">
-  <p:cSld>
-    <p:spTree>
-      <p:nvGrpSpPr>
-        <p:cNvPr id="1" name=""/>
-        <p:cNvGrpSpPr/>
-        <p:nvPr/>
-      </p:nvGrpSpPr>
-      <p:grpSpPr>
-        <a:xfrm>
-          <a:off x="0" y="0"/>
-          <a:ext cx="0" cy="0"/>
-          <a:chOff x="0" y="0"/>
-          <a:chExt cx="0" cy="0"/>
-        </a:xfrm>
-      </p:grpSpPr>
-      <p:sp>
-        <p:nvSpPr>
-          <p:cNvPr id="3" name="Content Placeholder 2"/>
-          <p:cNvSpPr>
-            <a:spLocks noGrp="1"/>
-          </p:cNvSpPr>
-          <p:nvPr>
-            <p:ph idx="1"/>
-          </p:nvPr>
-        </p:nvSpPr>
-        <p:spPr/>
-        <p:txBody>
-          <a:bodyPr/>
-          <a:lstStyle/>
-          <a:p>
-            <a:pPr lvl="0" indent="0" marL="0">
-              <a:spcBef>
-                <a:spcPts val="3000"/>
-              </a:spcBef>
-              <a:buNone/>
-            </a:pPr>
-            <a:r>
-              <a:rPr b="1"/>
-              <a:t>Your first plot: </a:t>
-            </a:r>
-            <a:r>
-              <a:rPr b="1">
-                <a:latin typeface="Courier"/>
-              </a:rPr>
-              <a:t>ggplot</a:t>
-            </a:r>
-            <a:r>
-              <a:rPr b="1"/>
-              <a:t>, built in layers</a:t>
-            </a:r>
-          </a:p>
-        </p:txBody>
-      </p:sp>
-    </p:spTree>
-  </p:cSld>
-</p:sld>
-</file>
-
-<file path=ppt/slides/slide3.xml><?xml version="1.0" encoding="utf-8"?>
-<p:sld xmlns:a="http://schemas.openxmlformats.org/drawingml/2006/main" xmlns:r="http://schemas.openxmlformats.org/officeDocument/2006/relationships" xmlns:p="http://schemas.openxmlformats.org/presentationml/2006/main">
-  <p:cSld>
-    <p:spTree>
-      <p:nvGrpSpPr>
-        <p:cNvPr id="1" name=""/>
-        <p:cNvGrpSpPr/>
-        <p:nvPr/>
-      </p:nvGrpSpPr>
-      <p:grpSpPr>
-        <a:xfrm>
-          <a:off x="0" y="0"/>
-          <a:ext cx="0" cy="0"/>
-          <a:chOff x="0" y="0"/>
-          <a:chExt cx="0" cy="0"/>
-        </a:xfrm>
-      </p:grpSpPr>
-      <p:sp>
-        <p:nvSpPr>
-          <p:cNvPr id="2" name="Title 1"/>
-          <p:cNvSpPr>
-            <a:spLocks noGrp="1"/>
-          </p:cNvSpPr>
-          <p:nvPr>
-            <p:ph type="title"/>
-          </p:nvPr>
-        </p:nvSpPr>
-        <p:spPr/>
-        <p:txBody>
-          <a:bodyPr/>
-          <a:lstStyle/>
-          <a:p>
-            <a:pPr lvl="0" indent="0" marL="0">
-              <a:buNone/>
-            </a:pPr>
-            <a:r>
-              <a:rPr/>
-              <a:t>Part 1 · Asking a Good Question</a:t>
-            </a:r>
-          </a:p>
-        </p:txBody>
-      </p:sp>
-      <p:sp>
-        <p:nvSpPr>
-          <p:cNvPr id="3" name="Content Placeholder 2"/>
-          <p:cNvSpPr>
-            <a:spLocks noGrp="1"/>
-          </p:cNvSpPr>
-          <p:nvPr>
-            <p:ph idx="1"/>
-          </p:nvPr>
-        </p:nvSpPr>
-        <p:spPr/>
-        <p:txBody>
-          <a:bodyPr/>
-          <a:lstStyle/>
-          <a:p>
-            <a:pPr lvl="0" indent="0" marL="0">
-              <a:spcBef>
-                <a:spcPts val="3000"/>
-              </a:spcBef>
-              <a:buNone/>
-            </a:pPr>
-            <a:r>
-              <a:rPr b="1"/>
-              <a:t>What makes something science?</a:t>
-            </a:r>
-          </a:p>
-        </p:txBody>
-      </p:sp>
-    </p:spTree>
-  </p:cSld>
-</p:sld>
-</file>
-
-<file path=ppt/slides/slide30.xml><?xml version="1.0" encoding="utf-8"?>
-<p:sld xmlns:a="http://schemas.openxmlformats.org/drawingml/2006/main" xmlns:r="http://schemas.openxmlformats.org/officeDocument/2006/relationships" xmlns:p="http://schemas.openxmlformats.org/presentationml/2006/main">
-  <p:cSld>
-    <p:spTree>
-      <p:nvGrpSpPr>
-        <p:cNvPr id="1" name=""/>
-        <p:cNvGrpSpPr/>
-        <p:nvPr/>
-      </p:nvGrpSpPr>
-      <p:grpSpPr>
-        <a:xfrm>
-          <a:off x="0" y="0"/>
-          <a:ext cx="0" cy="0"/>
-          <a:chOff x="0" y="0"/>
-          <a:chExt cx="0" cy="0"/>
-        </a:xfrm>
-      </p:grpSpPr>
-      <p:sp>
-        <p:nvSpPr>
-          <p:cNvPr id="3" name="Text Placeholder 2"/>
-          <p:cNvSpPr>
-            <a:spLocks noGrp="1"/>
-          </p:cNvSpPr>
-          <p:nvPr>
-            <p:ph idx="1" type="body"/>
-          </p:nvPr>
-        </p:nvSpPr>
-        <p:spPr/>
-        <p:txBody>
-          <a:bodyPr/>
-          <a:lstStyle/>
-          <a:p>
-            <a:pPr lvl="0" indent="0" marL="0">
-              <a:buNone/>
-            </a:pPr>
-            <a:r>
-              <a:rPr/>
-              <a:t>Every </a:t>
-            </a:r>
-            <a:r>
-              <a:rPr>
-                <a:latin typeface="Courier"/>
-              </a:rPr>
-              <a:t>ggplot</a:t>
-            </a:r>
-            <a:r>
-              <a:rPr/>
-              <a:t> needs three things, joined with </a:t>
-            </a:r>
-            <a:r>
-              <a:rPr>
-                <a:latin typeface="Courier"/>
-              </a:rPr>
-              <a:t>+</a:t>
-            </a:r>
-            <a:r>
-              <a:rPr/>
-              <a:t>:</a:t>
-            </a:r>
-          </a:p>
-          <a:p>
-            <a:pPr lvl="0" indent="-342900" marL="342900">
-              <a:buAutoNum type="arabicPeriod"/>
-            </a:pPr>
-            <a:r>
-              <a:rPr b="1"/>
-              <a:t>data</a:t>
-            </a:r>
-            <a:r>
-              <a:rPr/>
-              <a:t> — which data frame</a:t>
-            </a:r>
-          </a:p>
-          <a:p>
-            <a:pPr lvl="0" indent="-342900" marL="342900">
-              <a:buAutoNum type="arabicPeriod"/>
-            </a:pPr>
-            <a:r>
-              <a:rPr b="1"/>
-              <a:t>aes()</a:t>
-            </a:r>
-            <a:r>
-              <a:rPr/>
-              <a:t> — which columns map to x and y</a:t>
-            </a:r>
-          </a:p>
-          <a:p>
-            <a:pPr lvl="0" indent="-342900" marL="342900">
-              <a:buAutoNum type="arabicPeriod"/>
-            </a:pPr>
-            <a:r>
-              <a:rPr b="1"/>
-              <a:t>geom</a:t>
-            </a:r>
-            <a:r>
-              <a:rPr/>
-              <a:t> — how to draw it</a:t>
-            </a:r>
-          </a:p>
-          <a:p>
-            <a:pPr lvl="0" indent="0">
-              <a:buNone/>
-            </a:pPr>
-            <a:r>
-              <a:rPr>
-                <a:solidFill>
-                  <a:srgbClr val="4758AB"/>
-                </a:solidFill>
-                <a:latin typeface="Courier"/>
-              </a:rPr>
-              <a:t>ggplot</a:t>
-            </a:r>
-            <a:r>
-              <a:rPr>
-                <a:solidFill>
-                  <a:srgbClr val="003B4F"/>
-                </a:solidFill>
-                <a:latin typeface="Courier"/>
-              </a:rPr>
-              <a:t>(pine_df, </a:t>
-            </a:r>
-            <a:r>
-              <a:rPr>
-                <a:solidFill>
-                  <a:srgbClr val="4758AB"/>
-                </a:solidFill>
-                <a:latin typeface="Courier"/>
-              </a:rPr>
-              <a:t>aes</a:t>
-            </a:r>
-            <a:r>
-              <a:rPr>
-                <a:solidFill>
-                  <a:srgbClr val="003B4F"/>
-                </a:solidFill>
-                <a:latin typeface="Courier"/>
-              </a:rPr>
-              <a:t>(</a:t>
-            </a:r>
-            <a:r>
-              <a:rPr>
-                <a:solidFill>
-                  <a:srgbClr val="657422"/>
-                </a:solidFill>
-                <a:latin typeface="Courier"/>
-              </a:rPr>
-              <a:t>x =</a:t>
-            </a:r>
-            <a:r>
-              <a:rPr>
-                <a:solidFill>
-                  <a:srgbClr val="003B4F"/>
-                </a:solidFill>
-                <a:latin typeface="Courier"/>
-              </a:rPr>
-              <a:t> wind, </a:t>
-            </a:r>
-            <a:r>
-              <a:rPr>
-                <a:solidFill>
-                  <a:srgbClr val="657422"/>
-                </a:solidFill>
-                <a:latin typeface="Courier"/>
-              </a:rPr>
-              <a:t>y =</a:t>
-            </a:r>
-            <a:r>
-              <a:rPr>
-                <a:solidFill>
-                  <a:srgbClr val="003B4F"/>
-                </a:solidFill>
-                <a:latin typeface="Courier"/>
-              </a:rPr>
-              <a:t> length_mm)) </a:t>
-            </a:r>
-            <a:r>
-              <a:rPr>
-                <a:solidFill>
-                  <a:srgbClr val="5E5E5E"/>
-                </a:solidFill>
-                <a:latin typeface="Courier"/>
-              </a:rPr>
-              <a:t>+</a:t>
-            </a:r>
-            <a:br/>
-            <a:r>
-              <a:rPr>
-                <a:solidFill>
-                  <a:srgbClr val="003B4F"/>
-                </a:solidFill>
-                <a:latin typeface="Courier"/>
-              </a:rPr>
-              <a:t>  </a:t>
-            </a:r>
-            <a:r>
-              <a:rPr>
-                <a:solidFill>
-                  <a:srgbClr val="4758AB"/>
-                </a:solidFill>
-                <a:latin typeface="Courier"/>
-              </a:rPr>
-              <a:t>geom_point</a:t>
-            </a:r>
-            <a:r>
-              <a:rPr>
-                <a:solidFill>
-                  <a:srgbClr val="003B4F"/>
-                </a:solidFill>
-                <a:latin typeface="Courier"/>
-              </a:rPr>
-              <a:t>()</a:t>
             </a:r>
           </a:p>
         </p:txBody>
@@ -7135,7 +7402,7 @@
             </a:pPr>
             <a:r>
               <a:rPr sz="2000" b="1"/>
-              <a:t>Warning</a:t>
+              <a:t>Tip</a:t>
             </a:r>
           </a:p>
           <a:p>
@@ -7144,7 +7411,7 @@
             </a:pPr>
             <a:r>
               <a:rPr sz="2000" b="1"/>
-              <a:t>⚠️ Watch out!</a:t>
+              <a:t>🖐 Try it yourself</a:t>
             </a:r>
           </a:p>
           <a:p>
@@ -7152,22 +7419,28 @@
               <a:buNone/>
             </a:pPr>
             <a:r>
+              <a:rPr sz="2000"/>
+              <a:t>Swap </a:t>
+            </a:r>
+            <a:r>
               <a:rPr sz="2000">
                 <a:latin typeface="Courier"/>
               </a:rPr>
-              <a:t>+</a:t>
+              <a:t>wind</a:t>
             </a:r>
             <a:r>
               <a:rPr sz="2000"/>
-              <a:t> sits at the </a:t>
-            </a:r>
-            <a:r>
-              <a:rPr sz="2000" b="1"/>
-              <a:t>end</a:t>
+              <a:t> for </a:t>
+            </a:r>
+            <a:r>
+              <a:rPr sz="2000">
+                <a:latin typeface="Courier"/>
+              </a:rPr>
+              <a:t>group</a:t>
             </a:r>
             <a:r>
               <a:rPr sz="2000"/>
-              <a:t> of a line, never the start.</a:t>
+              <a:t>. What does that plot tell you instead?</a:t>
             </a:r>
           </a:p>
         </p:txBody>
@@ -7209,12 +7482,8 @@
               <a:buNone/>
             </a:pPr>
             <a:r>
-              <a:rPr sz="2000" i="1"/>
-              <a:t>Seeing</a:t>
-            </a:r>
-            <a:r>
               <a:rPr sz="2000"/>
-              <a:t> your data is the single most important habit in this course — before you summarize or test anything, plot it.</a:t>
+              <a:t>A boxplot shows the summary; the jittered points show every real value underneath it. Show both when you can.</a:t>
             </a:r>
           </a:p>
         </p:txBody>
@@ -7224,7 +7493,7 @@
 </p:sld>
 </file>
 
-<file path=ppt/slides/slide31.xml><?xml version="1.0" encoding="utf-8"?>
+<file path=ppt/slides/slide24.xml><?xml version="1.0" encoding="utf-8"?>
 <p:sld xmlns:a="http://schemas.openxmlformats.org/drawingml/2006/main" xmlns:r="http://schemas.openxmlformats.org/officeDocument/2006/relationships" xmlns:p="http://schemas.openxmlformats.org/presentationml/2006/main">
   <p:cSld>
     <p:spTree>
@@ -7243,28 +7512,750 @@
       </p:grpSpPr>
       <p:sp>
         <p:nvSpPr>
+          <p:cNvPr id="2" name="Title 1"/>
+          <p:cNvSpPr>
+            <a:spLocks noGrp="1"/>
+          </p:cNvSpPr>
+          <p:nvPr>
+            <p:ph type="title"/>
+          </p:nvPr>
+        </p:nvSpPr>
+        <p:spPr/>
+        <p:txBody>
+          <a:bodyPr/>
+          <a:lstStyle/>
+          <a:p>
+            <a:pPr lvl="0" indent="0" marL="0">
+              <a:buNone/>
+            </a:pPr>
+            <a:r>
+              <a:rPr/>
+              <a:t>Save your plot</a:t>
+            </a:r>
+          </a:p>
+        </p:txBody>
+      </p:sp>
+      <p:sp>
+        <p:nvSpPr>
           <p:cNvPr id="3" name="Content Placeholder 2"/>
           <p:cNvSpPr>
             <a:spLocks noGrp="1"/>
           </p:cNvSpPr>
           <p:nvPr>
-            <p:ph idx="1"/>
-          </p:nvPr>
-        </p:nvSpPr>
-        <p:spPr/>
-        <p:txBody>
-          <a:bodyPr/>
-          <a:lstStyle/>
-          <a:p>
-            <a:pPr lvl="0" indent="0" marL="0">
-              <a:spcBef>
-                <a:spcPts val="3000"/>
-              </a:spcBef>
-              <a:buNone/>
-            </a:pPr>
-            <a:r>
-              <a:rPr b="1"/>
-              <a:t>One layer at a time</a:t>
+            <p:ph idx="1" sz="half"/>
+          </p:nvPr>
+        </p:nvSpPr>
+        <p:spPr/>
+        <p:txBody>
+          <a:bodyPr/>
+          <a:lstStyle/>
+          <a:p>
+            <a:pPr lvl="0" indent="0">
+              <a:buNone/>
+            </a:pPr>
+            <a:r>
+              <a:rPr>
+                <a:solidFill>
+                  <a:srgbClr val="003B4F"/>
+                </a:solidFill>
+                <a:latin typeface="Courier"/>
+              </a:rPr>
+              <a:t>needle_plot &lt;- </a:t>
+            </a:r>
+            <a:r>
+              <a:rPr>
+                <a:solidFill>
+                  <a:srgbClr val="4758AB"/>
+                </a:solidFill>
+                <a:latin typeface="Courier"/>
+              </a:rPr>
+              <a:t>ggplot</a:t>
+            </a:r>
+            <a:r>
+              <a:rPr>
+                <a:solidFill>
+                  <a:srgbClr val="003B4F"/>
+                </a:solidFill>
+                <a:latin typeface="Courier"/>
+              </a:rPr>
+              <a:t>(pine_df, </a:t>
+            </a:r>
+            <a:r>
+              <a:rPr>
+                <a:solidFill>
+                  <a:srgbClr val="4758AB"/>
+                </a:solidFill>
+                <a:latin typeface="Courier"/>
+              </a:rPr>
+              <a:t>aes</a:t>
+            </a:r>
+            <a:r>
+              <a:rPr>
+                <a:solidFill>
+                  <a:srgbClr val="003B4F"/>
+                </a:solidFill>
+                <a:latin typeface="Courier"/>
+              </a:rPr>
+              <a:t>(</a:t>
+            </a:r>
+            <a:r>
+              <a:rPr>
+                <a:solidFill>
+                  <a:srgbClr val="657422"/>
+                </a:solidFill>
+                <a:latin typeface="Courier"/>
+              </a:rPr>
+              <a:t>x =</a:t>
+            </a:r>
+            <a:r>
+              <a:rPr>
+                <a:solidFill>
+                  <a:srgbClr val="003B4F"/>
+                </a:solidFill>
+                <a:latin typeface="Courier"/>
+              </a:rPr>
+              <a:t> wind, </a:t>
+            </a:r>
+            <a:r>
+              <a:rPr>
+                <a:solidFill>
+                  <a:srgbClr val="657422"/>
+                </a:solidFill>
+                <a:latin typeface="Courier"/>
+              </a:rPr>
+              <a:t>y =</a:t>
+            </a:r>
+            <a:r>
+              <a:rPr>
+                <a:solidFill>
+                  <a:srgbClr val="003B4F"/>
+                </a:solidFill>
+                <a:latin typeface="Courier"/>
+              </a:rPr>
+              <a:t> length_mm)) </a:t>
+            </a:r>
+            <a:r>
+              <a:rPr>
+                <a:solidFill>
+                  <a:srgbClr val="5E5E5E"/>
+                </a:solidFill>
+                <a:latin typeface="Courier"/>
+              </a:rPr>
+              <a:t>+</a:t>
+            </a:r>
+            <a:br/>
+            <a:r>
+              <a:rPr>
+                <a:solidFill>
+                  <a:srgbClr val="003B4F"/>
+                </a:solidFill>
+                <a:latin typeface="Courier"/>
+              </a:rPr>
+              <a:t>  </a:t>
+            </a:r>
+            <a:r>
+              <a:rPr>
+                <a:solidFill>
+                  <a:srgbClr val="4758AB"/>
+                </a:solidFill>
+                <a:latin typeface="Courier"/>
+              </a:rPr>
+              <a:t>geom_boxplot</a:t>
+            </a:r>
+            <a:r>
+              <a:rPr>
+                <a:solidFill>
+                  <a:srgbClr val="003B4F"/>
+                </a:solidFill>
+                <a:latin typeface="Courier"/>
+              </a:rPr>
+              <a:t>() </a:t>
+            </a:r>
+            <a:r>
+              <a:rPr>
+                <a:solidFill>
+                  <a:srgbClr val="5E5E5E"/>
+                </a:solidFill>
+                <a:latin typeface="Courier"/>
+              </a:rPr>
+              <a:t>+</a:t>
+            </a:r>
+            <a:br/>
+            <a:r>
+              <a:rPr>
+                <a:solidFill>
+                  <a:srgbClr val="003B4F"/>
+                </a:solidFill>
+                <a:latin typeface="Courier"/>
+              </a:rPr>
+              <a:t>  </a:t>
+            </a:r>
+            <a:r>
+              <a:rPr>
+                <a:solidFill>
+                  <a:srgbClr val="4758AB"/>
+                </a:solidFill>
+                <a:latin typeface="Courier"/>
+              </a:rPr>
+              <a:t>geom_jitter</a:t>
+            </a:r>
+            <a:r>
+              <a:rPr>
+                <a:solidFill>
+                  <a:srgbClr val="003B4F"/>
+                </a:solidFill>
+                <a:latin typeface="Courier"/>
+              </a:rPr>
+              <a:t>(</a:t>
+            </a:r>
+            <a:r>
+              <a:rPr>
+                <a:solidFill>
+                  <a:srgbClr val="657422"/>
+                </a:solidFill>
+                <a:latin typeface="Courier"/>
+              </a:rPr>
+              <a:t>width =</a:t>
+            </a:r>
+            <a:r>
+              <a:rPr>
+                <a:solidFill>
+                  <a:srgbClr val="003B4F"/>
+                </a:solidFill>
+                <a:latin typeface="Courier"/>
+              </a:rPr>
+              <a:t> </a:t>
+            </a:r>
+            <a:r>
+              <a:rPr>
+                <a:solidFill>
+                  <a:srgbClr val="AD0000"/>
+                </a:solidFill>
+                <a:latin typeface="Courier"/>
+              </a:rPr>
+              <a:t>0.15</a:t>
+            </a:r>
+            <a:r>
+              <a:rPr>
+                <a:solidFill>
+                  <a:srgbClr val="003B4F"/>
+                </a:solidFill>
+                <a:latin typeface="Courier"/>
+              </a:rPr>
+              <a:t>, </a:t>
+            </a:r>
+            <a:r>
+              <a:rPr>
+                <a:solidFill>
+                  <a:srgbClr val="657422"/>
+                </a:solidFill>
+                <a:latin typeface="Courier"/>
+              </a:rPr>
+              <a:t>alpha =</a:t>
+            </a:r>
+            <a:r>
+              <a:rPr>
+                <a:solidFill>
+                  <a:srgbClr val="003B4F"/>
+                </a:solidFill>
+                <a:latin typeface="Courier"/>
+              </a:rPr>
+              <a:t> </a:t>
+            </a:r>
+            <a:r>
+              <a:rPr>
+                <a:solidFill>
+                  <a:srgbClr val="AD0000"/>
+                </a:solidFill>
+                <a:latin typeface="Courier"/>
+              </a:rPr>
+              <a:t>0.6</a:t>
+            </a:r>
+            <a:r>
+              <a:rPr>
+                <a:solidFill>
+                  <a:srgbClr val="003B4F"/>
+                </a:solidFill>
+                <a:latin typeface="Courier"/>
+              </a:rPr>
+              <a:t>, </a:t>
+            </a:r>
+            <a:r>
+              <a:rPr>
+                <a:solidFill>
+                  <a:srgbClr val="657422"/>
+                </a:solidFill>
+                <a:latin typeface="Courier"/>
+              </a:rPr>
+              <a:t>color =</a:t>
+            </a:r>
+            <a:r>
+              <a:rPr>
+                <a:solidFill>
+                  <a:srgbClr val="003B4F"/>
+                </a:solidFill>
+                <a:latin typeface="Courier"/>
+              </a:rPr>
+              <a:t> </a:t>
+            </a:r>
+            <a:r>
+              <a:rPr>
+                <a:solidFill>
+                  <a:srgbClr val="20794D"/>
+                </a:solidFill>
+                <a:latin typeface="Courier"/>
+              </a:rPr>
+              <a:t>"tomato"</a:t>
+            </a:r>
+            <a:r>
+              <a:rPr>
+                <a:solidFill>
+                  <a:srgbClr val="003B4F"/>
+                </a:solidFill>
+                <a:latin typeface="Courier"/>
+              </a:rPr>
+              <a:t>) </a:t>
+            </a:r>
+            <a:r>
+              <a:rPr>
+                <a:solidFill>
+                  <a:srgbClr val="5E5E5E"/>
+                </a:solidFill>
+                <a:latin typeface="Courier"/>
+              </a:rPr>
+              <a:t>+</a:t>
+            </a:r>
+            <a:br/>
+            <a:r>
+              <a:rPr>
+                <a:solidFill>
+                  <a:srgbClr val="003B4F"/>
+                </a:solidFill>
+                <a:latin typeface="Courier"/>
+              </a:rPr>
+              <a:t>  </a:t>
+            </a:r>
+            <a:r>
+              <a:rPr>
+                <a:solidFill>
+                  <a:srgbClr val="4758AB"/>
+                </a:solidFill>
+                <a:latin typeface="Courier"/>
+              </a:rPr>
+              <a:t>labs</a:t>
+            </a:r>
+            <a:r>
+              <a:rPr>
+                <a:solidFill>
+                  <a:srgbClr val="003B4F"/>
+                </a:solidFill>
+                <a:latin typeface="Courier"/>
+              </a:rPr>
+              <a:t>(</a:t>
+            </a:r>
+            <a:r>
+              <a:rPr>
+                <a:solidFill>
+                  <a:srgbClr val="657422"/>
+                </a:solidFill>
+                <a:latin typeface="Courier"/>
+              </a:rPr>
+              <a:t>x =</a:t>
+            </a:r>
+            <a:r>
+              <a:rPr>
+                <a:solidFill>
+                  <a:srgbClr val="003B4F"/>
+                </a:solidFill>
+                <a:latin typeface="Courier"/>
+              </a:rPr>
+              <a:t> </a:t>
+            </a:r>
+            <a:r>
+              <a:rPr>
+                <a:solidFill>
+                  <a:srgbClr val="20794D"/>
+                </a:solidFill>
+                <a:latin typeface="Courier"/>
+              </a:rPr>
+              <a:t>"Side of tree"</a:t>
+            </a:r>
+            <a:r>
+              <a:rPr>
+                <a:solidFill>
+                  <a:srgbClr val="003B4F"/>
+                </a:solidFill>
+                <a:latin typeface="Courier"/>
+              </a:rPr>
+              <a:t>, </a:t>
+            </a:r>
+            <a:r>
+              <a:rPr>
+                <a:solidFill>
+                  <a:srgbClr val="657422"/>
+                </a:solidFill>
+                <a:latin typeface="Courier"/>
+              </a:rPr>
+              <a:t>y =</a:t>
+            </a:r>
+            <a:r>
+              <a:rPr>
+                <a:solidFill>
+                  <a:srgbClr val="003B4F"/>
+                </a:solidFill>
+                <a:latin typeface="Courier"/>
+              </a:rPr>
+              <a:t> </a:t>
+            </a:r>
+            <a:r>
+              <a:rPr>
+                <a:solidFill>
+                  <a:srgbClr val="20794D"/>
+                </a:solidFill>
+                <a:latin typeface="Courier"/>
+              </a:rPr>
+              <a:t>"Needle length (mm)"</a:t>
+            </a:r>
+            <a:r>
+              <a:rPr>
+                <a:solidFill>
+                  <a:srgbClr val="003B4F"/>
+                </a:solidFill>
+                <a:latin typeface="Courier"/>
+              </a:rPr>
+              <a:t>)</a:t>
+            </a:r>
+            <a:br/>
+            <a:br/>
+            <a:r>
+              <a:rPr>
+                <a:solidFill>
+                  <a:srgbClr val="4758AB"/>
+                </a:solidFill>
+                <a:latin typeface="Courier"/>
+              </a:rPr>
+              <a:t>ggsave</a:t>
+            </a:r>
+            <a:r>
+              <a:rPr>
+                <a:solidFill>
+                  <a:srgbClr val="003B4F"/>
+                </a:solidFill>
+                <a:latin typeface="Courier"/>
+              </a:rPr>
+              <a:t>(</a:t>
+            </a:r>
+            <a:r>
+              <a:rPr>
+                <a:solidFill>
+                  <a:srgbClr val="20794D"/>
+                </a:solidFill>
+                <a:latin typeface="Courier"/>
+              </a:rPr>
+              <a:t>"figures/needle_length.png"</a:t>
+            </a:r>
+            <a:r>
+              <a:rPr>
+                <a:solidFill>
+                  <a:srgbClr val="003B4F"/>
+                </a:solidFill>
+                <a:latin typeface="Courier"/>
+              </a:rPr>
+              <a:t>,</a:t>
+            </a:r>
+            <a:br/>
+            <a:r>
+              <a:rPr>
+                <a:solidFill>
+                  <a:srgbClr val="003B4F"/>
+                </a:solidFill>
+                <a:latin typeface="Courier"/>
+              </a:rPr>
+              <a:t>       </a:t>
+            </a:r>
+            <a:r>
+              <a:rPr>
+                <a:solidFill>
+                  <a:srgbClr val="657422"/>
+                </a:solidFill>
+                <a:latin typeface="Courier"/>
+              </a:rPr>
+              <a:t>plot =</a:t>
+            </a:r>
+            <a:r>
+              <a:rPr>
+                <a:solidFill>
+                  <a:srgbClr val="003B4F"/>
+                </a:solidFill>
+                <a:latin typeface="Courier"/>
+              </a:rPr>
+              <a:t> needle_plot,</a:t>
+            </a:r>
+            <a:br/>
+            <a:r>
+              <a:rPr>
+                <a:solidFill>
+                  <a:srgbClr val="003B4F"/>
+                </a:solidFill>
+                <a:latin typeface="Courier"/>
+              </a:rPr>
+              <a:t>       </a:t>
+            </a:r>
+            <a:r>
+              <a:rPr>
+                <a:solidFill>
+                  <a:srgbClr val="657422"/>
+                </a:solidFill>
+                <a:latin typeface="Courier"/>
+              </a:rPr>
+              <a:t>width =</a:t>
+            </a:r>
+            <a:r>
+              <a:rPr>
+                <a:solidFill>
+                  <a:srgbClr val="003B4F"/>
+                </a:solidFill>
+                <a:latin typeface="Courier"/>
+              </a:rPr>
+              <a:t> </a:t>
+            </a:r>
+            <a:r>
+              <a:rPr>
+                <a:solidFill>
+                  <a:srgbClr val="AD0000"/>
+                </a:solidFill>
+                <a:latin typeface="Courier"/>
+              </a:rPr>
+              <a:t>3</a:t>
+            </a:r>
+            <a:r>
+              <a:rPr>
+                <a:solidFill>
+                  <a:srgbClr val="003B4F"/>
+                </a:solidFill>
+                <a:latin typeface="Courier"/>
+              </a:rPr>
+              <a:t>, </a:t>
+            </a:r>
+            <a:r>
+              <a:rPr>
+                <a:solidFill>
+                  <a:srgbClr val="657422"/>
+                </a:solidFill>
+                <a:latin typeface="Courier"/>
+              </a:rPr>
+              <a:t>height =</a:t>
+            </a:r>
+            <a:r>
+              <a:rPr>
+                <a:solidFill>
+                  <a:srgbClr val="003B4F"/>
+                </a:solidFill>
+                <a:latin typeface="Courier"/>
+              </a:rPr>
+              <a:t> </a:t>
+            </a:r>
+            <a:r>
+              <a:rPr>
+                <a:solidFill>
+                  <a:srgbClr val="AD0000"/>
+                </a:solidFill>
+                <a:latin typeface="Courier"/>
+              </a:rPr>
+              <a:t>3</a:t>
+            </a:r>
+            <a:r>
+              <a:rPr>
+                <a:solidFill>
+                  <a:srgbClr val="003B4F"/>
+                </a:solidFill>
+                <a:latin typeface="Courier"/>
+              </a:rPr>
+              <a:t>, </a:t>
+            </a:r>
+            <a:r>
+              <a:rPr>
+                <a:solidFill>
+                  <a:srgbClr val="657422"/>
+                </a:solidFill>
+                <a:latin typeface="Courier"/>
+              </a:rPr>
+              <a:t>units =</a:t>
+            </a:r>
+            <a:r>
+              <a:rPr>
+                <a:solidFill>
+                  <a:srgbClr val="003B4F"/>
+                </a:solidFill>
+                <a:latin typeface="Courier"/>
+              </a:rPr>
+              <a:t> </a:t>
+            </a:r>
+            <a:r>
+              <a:rPr>
+                <a:solidFill>
+                  <a:srgbClr val="20794D"/>
+                </a:solidFill>
+                <a:latin typeface="Courier"/>
+              </a:rPr>
+              <a:t>"in"</a:t>
+            </a:r>
+            <a:r>
+              <a:rPr>
+                <a:solidFill>
+                  <a:srgbClr val="003B4F"/>
+                </a:solidFill>
+                <a:latin typeface="Courier"/>
+              </a:rPr>
+              <a:t>, </a:t>
+            </a:r>
+            <a:r>
+              <a:rPr>
+                <a:solidFill>
+                  <a:srgbClr val="657422"/>
+                </a:solidFill>
+                <a:latin typeface="Courier"/>
+              </a:rPr>
+              <a:t>dpi =</a:t>
+            </a:r>
+            <a:r>
+              <a:rPr>
+                <a:solidFill>
+                  <a:srgbClr val="003B4F"/>
+                </a:solidFill>
+                <a:latin typeface="Courier"/>
+              </a:rPr>
+              <a:t> </a:t>
+            </a:r>
+            <a:r>
+              <a:rPr>
+                <a:solidFill>
+                  <a:srgbClr val="AD0000"/>
+                </a:solidFill>
+                <a:latin typeface="Courier"/>
+              </a:rPr>
+              <a:t>300</a:t>
+            </a:r>
+            <a:r>
+              <a:rPr>
+                <a:solidFill>
+                  <a:srgbClr val="003B4F"/>
+                </a:solidFill>
+                <a:latin typeface="Courier"/>
+              </a:rPr>
+              <a:t>)</a:t>
+            </a:r>
+          </a:p>
+          <a:p>
+            <a:pPr lvl="0" indent="0" marL="1270000">
+              <a:buNone/>
+            </a:pPr>
+            <a:r>
+              <a:rPr sz="2000" b="1"/>
+              <a:t>Warning</a:t>
+            </a:r>
+          </a:p>
+          <a:p>
+            <a:pPr lvl="0" indent="0" marL="1270000">
+              <a:buNone/>
+            </a:pPr>
+            <a:r>
+              <a:rPr sz="2000" b="1"/>
+              <a:t>⚠️ Watch out!</a:t>
+            </a:r>
+          </a:p>
+          <a:p>
+            <a:pPr lvl="0" indent="0" marL="1270000">
+              <a:buNone/>
+            </a:pPr>
+            <a:r>
+              <a:rPr sz="2000">
+                <a:latin typeface="Courier"/>
+              </a:rPr>
+              <a:t>ggsave()</a:t>
+            </a:r>
+            <a:r>
+              <a:rPr sz="2000"/>
+              <a:t> wants the </a:t>
+            </a:r>
+            <a:r>
+              <a:rPr sz="2000" b="1"/>
+              <a:t>filename first</a:t>
+            </a:r>
+            <a:r>
+              <a:rPr sz="2000"/>
+              <a:t>, then </a:t>
+            </a:r>
+            <a:r>
+              <a:rPr sz="2000">
+                <a:latin typeface="Courier"/>
+              </a:rPr>
+              <a:t>plot =</a:t>
+            </a:r>
+            <a:r>
+              <a:rPr sz="2000"/>
+              <a:t>. Always use </a:t>
+            </a:r>
+            <a:r>
+              <a:rPr sz="2000">
+                <a:latin typeface="Courier"/>
+              </a:rPr>
+              <a:t>dpi = 300</a:t>
+            </a:r>
+            <a:r>
+              <a:rPr sz="2000"/>
+              <a:t> — print/poster quality.</a:t>
+            </a:r>
+          </a:p>
+        </p:txBody>
+      </p:sp>
+      <p:sp>
+        <p:nvSpPr>
+          <p:cNvPr id="4" name="Content Placeholder 3"/>
+          <p:cNvSpPr>
+            <a:spLocks noGrp="1"/>
+          </p:cNvSpPr>
+          <p:nvPr>
+            <p:ph idx="2" sz="half"/>
+          </p:nvPr>
+        </p:nvSpPr>
+        <p:spPr/>
+        <p:txBody>
+          <a:bodyPr/>
+          <a:lstStyle/>
+          <a:p>
+            <a:pPr lvl="0" indent="0" marL="1270000">
+              <a:buNone/>
+            </a:pPr>
+            <a:r>
+              <a:rPr sz="2000" b="1"/>
+              <a:t>Note</a:t>
+            </a:r>
+          </a:p>
+          <a:p>
+            <a:pPr lvl="0" indent="0" marL="1270000">
+              <a:buNone/>
+            </a:pPr>
+            <a:r>
+              <a:rPr sz="2000" b="1"/>
+              <a:t>📖 File format tip</a:t>
+            </a:r>
+          </a:p>
+          <a:p>
+            <a:pPr lvl="0" indent="0" marL="1270000">
+              <a:buNone/>
+            </a:pPr>
+            <a:r>
+              <a:rPr sz="2000"/>
+              <a:t>Save figures as </a:t>
+            </a:r>
+            <a:r>
+              <a:rPr sz="2000" b="1"/>
+              <a:t>PNG</a:t>
+            </a:r>
+            <a:r>
+              <a:rPr sz="2000"/>
+              <a:t> for reports and submissions.</a:t>
             </a:r>
           </a:p>
         </p:txBody>
@@ -7274,7 +8265,7 @@
 </p:sld>
 </file>
 
-<file path=ppt/slides/slide32.xml><?xml version="1.0" encoding="utf-8"?>
+<file path=ppt/slides/slide25.xml><?xml version="1.0" encoding="utf-8"?>
 <p:sld xmlns:a="http://schemas.openxmlformats.org/drawingml/2006/main" xmlns:r="http://schemas.openxmlformats.org/officeDocument/2006/relationships" xmlns:p="http://schemas.openxmlformats.org/presentationml/2006/main">
   <p:cSld>
     <p:spTree>
@@ -7293,488 +8284,98 @@
       </p:grpSpPr>
       <p:sp>
         <p:nvSpPr>
-          <p:cNvPr id="3" name="Text Placeholder 2"/>
-          <p:cNvSpPr>
-            <a:spLocks noGrp="1"/>
-          </p:cNvSpPr>
-          <p:nvPr>
-            <p:ph idx="1" type="body"/>
-          </p:nvPr>
-        </p:nvSpPr>
-        <p:spPr/>
-        <p:txBody>
-          <a:bodyPr/>
-          <a:lstStyle/>
-          <a:p>
-            <a:pPr lvl="0" indent="0">
-              <a:buNone/>
-            </a:pPr>
-            <a:r>
-              <a:rPr>
-                <a:solidFill>
-                  <a:srgbClr val="4758AB"/>
-                </a:solidFill>
+          <p:cNvPr id="2" name="Title 1"/>
+          <p:cNvSpPr>
+            <a:spLocks noGrp="1"/>
+          </p:cNvSpPr>
+          <p:nvPr>
+            <p:ph type="title"/>
+          </p:nvPr>
+        </p:nvSpPr>
+        <p:spPr/>
+        <p:txBody>
+          <a:bodyPr/>
+          <a:lstStyle/>
+          <a:p>
+            <a:pPr lvl="0" indent="0" marL="0">
+              <a:buNone/>
+            </a:pPr>
+            <a:r>
+              <a:rPr/>
+              <a:t>Wrap-up</a:t>
+            </a:r>
+          </a:p>
+        </p:txBody>
+      </p:sp>
+      <p:sp>
+        <p:nvSpPr>
+          <p:cNvPr id="3" name="Content Placeholder 2"/>
+          <p:cNvSpPr>
+            <a:spLocks noGrp="1"/>
+          </p:cNvSpPr>
+          <p:nvPr>
+            <p:ph idx="1" sz="half"/>
+          </p:nvPr>
+        </p:nvSpPr>
+        <p:spPr/>
+        <p:txBody>
+          <a:bodyPr/>
+          <a:lstStyle/>
+          <a:p>
+            <a:pPr lvl="0" indent="0" marL="0">
+              <a:buNone/>
+            </a:pPr>
+            <a:r>
+              <a:rPr/>
+              <a:t>Today you:</a:t>
+            </a:r>
+          </a:p>
+          <a:p>
+            <a:pPr lvl="0"/>
+            <a:r>
+              <a:rPr/>
+              <a:t>Turned a question into a testable </a:t>
+            </a:r>
+            <a:r>
+              <a:rPr b="1"/>
+              <a:t>H₀ / Hₐ</a:t>
+            </a:r>
+          </a:p>
+          <a:p>
+            <a:pPr lvl="0"/>
+            <a:r>
+              <a:rPr/>
+              <a:t>Organized a project folder with </a:t>
+            </a:r>
+            <a:r>
+              <a:rPr b="1"/>
+              <a:t>data/scripts/figures</a:t>
+            </a:r>
+          </a:p>
+          <a:p>
+            <a:pPr lvl="0"/>
+            <a:r>
+              <a:rPr/>
+              <a:t>Ran your first R code — objects, functions, vectors, packages</a:t>
+            </a:r>
+          </a:p>
+          <a:p>
+            <a:pPr lvl="0"/>
+            <a:r>
+              <a:rPr/>
+              <a:t>Loaded real data and made — and saved — your </a:t>
+            </a:r>
+            <a:r>
+              <a:rPr b="1"/>
+              <a:t>first </a:t>
+            </a:r>
+            <a:r>
+              <a:rPr b="1">
                 <a:latin typeface="Courier"/>
               </a:rPr>
               <a:t>ggplot</a:t>
             </a:r>
-            <a:r>
-              <a:rPr>
-                <a:solidFill>
-                  <a:srgbClr val="003B4F"/>
-                </a:solidFill>
-                <a:latin typeface="Courier"/>
-              </a:rPr>
-              <a:t>(pine_df, </a:t>
-            </a:r>
-            <a:r>
-              <a:rPr>
-                <a:solidFill>
-                  <a:srgbClr val="4758AB"/>
-                </a:solidFill>
-                <a:latin typeface="Courier"/>
-              </a:rPr>
-              <a:t>aes</a:t>
-            </a:r>
-            <a:r>
-              <a:rPr>
-                <a:solidFill>
-                  <a:srgbClr val="003B4F"/>
-                </a:solidFill>
-                <a:latin typeface="Courier"/>
-              </a:rPr>
-              <a:t>(</a:t>
-            </a:r>
-            <a:r>
-              <a:rPr>
-                <a:solidFill>
-                  <a:srgbClr val="657422"/>
-                </a:solidFill>
-                <a:latin typeface="Courier"/>
-              </a:rPr>
-              <a:t>x =</a:t>
-            </a:r>
-            <a:r>
-              <a:rPr>
-                <a:solidFill>
-                  <a:srgbClr val="003B4F"/>
-                </a:solidFill>
-                <a:latin typeface="Courier"/>
-              </a:rPr>
-              <a:t> wind, </a:t>
-            </a:r>
-            <a:r>
-              <a:rPr>
-                <a:solidFill>
-                  <a:srgbClr val="657422"/>
-                </a:solidFill>
-                <a:latin typeface="Courier"/>
-              </a:rPr>
-              <a:t>y =</a:t>
-            </a:r>
-            <a:r>
-              <a:rPr>
-                <a:solidFill>
-                  <a:srgbClr val="003B4F"/>
-                </a:solidFill>
-                <a:latin typeface="Courier"/>
-              </a:rPr>
-              <a:t> length_mm)) </a:t>
-            </a:r>
-            <a:r>
-              <a:rPr>
-                <a:solidFill>
-                  <a:srgbClr val="5E5E5E"/>
-                </a:solidFill>
-                <a:latin typeface="Courier"/>
-              </a:rPr>
-              <a:t>+</a:t>
-            </a:r>
-            <a:br/>
-            <a:r>
-              <a:rPr>
-                <a:solidFill>
-                  <a:srgbClr val="003B4F"/>
-                </a:solidFill>
-                <a:latin typeface="Courier"/>
-              </a:rPr>
-              <a:t>  </a:t>
-            </a:r>
-            <a:r>
-              <a:rPr>
-                <a:solidFill>
-                  <a:srgbClr val="4758AB"/>
-                </a:solidFill>
-                <a:latin typeface="Courier"/>
-              </a:rPr>
-              <a:t>geom_boxplot</a:t>
-            </a:r>
-            <a:r>
-              <a:rPr>
-                <a:solidFill>
-                  <a:srgbClr val="003B4F"/>
-                </a:solidFill>
-                <a:latin typeface="Courier"/>
-              </a:rPr>
-              <a:t>() </a:t>
-            </a:r>
-            <a:r>
-              <a:rPr>
-                <a:solidFill>
-                  <a:srgbClr val="5E5E5E"/>
-                </a:solidFill>
-                <a:latin typeface="Courier"/>
-              </a:rPr>
-              <a:t>+</a:t>
-            </a:r>
-            <a:br/>
-            <a:r>
-              <a:rPr>
-                <a:solidFill>
-                  <a:srgbClr val="003B4F"/>
-                </a:solidFill>
-                <a:latin typeface="Courier"/>
-              </a:rPr>
-              <a:t>  </a:t>
-            </a:r>
-            <a:r>
-              <a:rPr>
-                <a:solidFill>
-                  <a:srgbClr val="4758AB"/>
-                </a:solidFill>
-                <a:latin typeface="Courier"/>
-              </a:rPr>
-              <a:t>geom_jitter</a:t>
-            </a:r>
-            <a:r>
-              <a:rPr>
-                <a:solidFill>
-                  <a:srgbClr val="003B4F"/>
-                </a:solidFill>
-                <a:latin typeface="Courier"/>
-              </a:rPr>
-              <a:t>(</a:t>
-            </a:r>
-            <a:r>
-              <a:rPr>
-                <a:solidFill>
-                  <a:srgbClr val="657422"/>
-                </a:solidFill>
-                <a:latin typeface="Courier"/>
-              </a:rPr>
-              <a:t>width =</a:t>
-            </a:r>
-            <a:r>
-              <a:rPr>
-                <a:solidFill>
-                  <a:srgbClr val="003B4F"/>
-                </a:solidFill>
-                <a:latin typeface="Courier"/>
-              </a:rPr>
-              <a:t> </a:t>
-            </a:r>
-            <a:r>
-              <a:rPr>
-                <a:solidFill>
-                  <a:srgbClr val="AD0000"/>
-                </a:solidFill>
-                <a:latin typeface="Courier"/>
-              </a:rPr>
-              <a:t>0.15</a:t>
-            </a:r>
-            <a:r>
-              <a:rPr>
-                <a:solidFill>
-                  <a:srgbClr val="003B4F"/>
-                </a:solidFill>
-                <a:latin typeface="Courier"/>
-              </a:rPr>
-              <a:t>, </a:t>
-            </a:r>
-            <a:r>
-              <a:rPr>
-                <a:solidFill>
-                  <a:srgbClr val="657422"/>
-                </a:solidFill>
-                <a:latin typeface="Courier"/>
-              </a:rPr>
-              <a:t>alpha =</a:t>
-            </a:r>
-            <a:r>
-              <a:rPr>
-                <a:solidFill>
-                  <a:srgbClr val="003B4F"/>
-                </a:solidFill>
-                <a:latin typeface="Courier"/>
-              </a:rPr>
-              <a:t> </a:t>
-            </a:r>
-            <a:r>
-              <a:rPr>
-                <a:solidFill>
-                  <a:srgbClr val="AD0000"/>
-                </a:solidFill>
-                <a:latin typeface="Courier"/>
-              </a:rPr>
-              <a:t>0.6</a:t>
-            </a:r>
-            <a:r>
-              <a:rPr>
-                <a:solidFill>
-                  <a:srgbClr val="003B4F"/>
-                </a:solidFill>
-                <a:latin typeface="Courier"/>
-              </a:rPr>
-              <a:t>, </a:t>
-            </a:r>
-            <a:r>
-              <a:rPr>
-                <a:solidFill>
-                  <a:srgbClr val="657422"/>
-                </a:solidFill>
-                <a:latin typeface="Courier"/>
-              </a:rPr>
-              <a:t>color =</a:t>
-            </a:r>
-            <a:r>
-              <a:rPr>
-                <a:solidFill>
-                  <a:srgbClr val="003B4F"/>
-                </a:solidFill>
-                <a:latin typeface="Courier"/>
-              </a:rPr>
-              <a:t> </a:t>
-            </a:r>
-            <a:r>
-              <a:rPr>
-                <a:solidFill>
-                  <a:srgbClr val="20794D"/>
-                </a:solidFill>
-                <a:latin typeface="Courier"/>
-              </a:rPr>
-              <a:t>"tomato"</a:t>
-            </a:r>
-            <a:r>
-              <a:rPr>
-                <a:solidFill>
-                  <a:srgbClr val="003B4F"/>
-                </a:solidFill>
-                <a:latin typeface="Courier"/>
-              </a:rPr>
-              <a:t>) </a:t>
-            </a:r>
-            <a:r>
-              <a:rPr>
-                <a:solidFill>
-                  <a:srgbClr val="5E5E5E"/>
-                </a:solidFill>
-                <a:latin typeface="Courier"/>
-              </a:rPr>
-              <a:t>+</a:t>
-            </a:r>
-            <a:br/>
-            <a:r>
-              <a:rPr>
-                <a:solidFill>
-                  <a:srgbClr val="003B4F"/>
-                </a:solidFill>
-                <a:latin typeface="Courier"/>
-              </a:rPr>
-              <a:t>  </a:t>
-            </a:r>
-            <a:r>
-              <a:rPr>
-                <a:solidFill>
-                  <a:srgbClr val="4758AB"/>
-                </a:solidFill>
-                <a:latin typeface="Courier"/>
-              </a:rPr>
-              <a:t>labs</a:t>
-            </a:r>
-            <a:r>
-              <a:rPr>
-                <a:solidFill>
-                  <a:srgbClr val="003B4F"/>
-                </a:solidFill>
-                <a:latin typeface="Courier"/>
-              </a:rPr>
-              <a:t>(</a:t>
-            </a:r>
-            <a:r>
-              <a:rPr>
-                <a:solidFill>
-                  <a:srgbClr val="657422"/>
-                </a:solidFill>
-                <a:latin typeface="Courier"/>
-              </a:rPr>
-              <a:t>x =</a:t>
-            </a:r>
-            <a:r>
-              <a:rPr>
-                <a:solidFill>
-                  <a:srgbClr val="003B4F"/>
-                </a:solidFill>
-                <a:latin typeface="Courier"/>
-              </a:rPr>
-              <a:t> </a:t>
-            </a:r>
-            <a:r>
-              <a:rPr>
-                <a:solidFill>
-                  <a:srgbClr val="20794D"/>
-                </a:solidFill>
-                <a:latin typeface="Courier"/>
-              </a:rPr>
-              <a:t>"Side of tree"</a:t>
-            </a:r>
-            <a:r>
-              <a:rPr>
-                <a:solidFill>
-                  <a:srgbClr val="003B4F"/>
-                </a:solidFill>
-                <a:latin typeface="Courier"/>
-              </a:rPr>
-              <a:t>,</a:t>
-            </a:r>
-            <a:br/>
-            <a:r>
-              <a:rPr>
-                <a:solidFill>
-                  <a:srgbClr val="003B4F"/>
-                </a:solidFill>
-                <a:latin typeface="Courier"/>
-              </a:rPr>
-              <a:t>       </a:t>
-            </a:r>
-            <a:r>
-              <a:rPr>
-                <a:solidFill>
-                  <a:srgbClr val="657422"/>
-                </a:solidFill>
-                <a:latin typeface="Courier"/>
-              </a:rPr>
-              <a:t>y =</a:t>
-            </a:r>
-            <a:r>
-              <a:rPr>
-                <a:solidFill>
-                  <a:srgbClr val="003B4F"/>
-                </a:solidFill>
-                <a:latin typeface="Courier"/>
-              </a:rPr>
-              <a:t> </a:t>
-            </a:r>
-            <a:r>
-              <a:rPr>
-                <a:solidFill>
-                  <a:srgbClr val="20794D"/>
-                </a:solidFill>
-                <a:latin typeface="Courier"/>
-              </a:rPr>
-              <a:t>"Needle length (mm)"</a:t>
-            </a:r>
-            <a:r>
-              <a:rPr>
-                <a:solidFill>
-                  <a:srgbClr val="003B4F"/>
-                </a:solidFill>
-                <a:latin typeface="Courier"/>
-              </a:rPr>
-              <a:t>,</a:t>
-            </a:r>
-            <a:br/>
-            <a:r>
-              <a:rPr>
-                <a:solidFill>
-                  <a:srgbClr val="003B4F"/>
-                </a:solidFill>
-                <a:latin typeface="Courier"/>
-              </a:rPr>
-              <a:t>       </a:t>
-            </a:r>
-            <a:r>
-              <a:rPr>
-                <a:solidFill>
-                  <a:srgbClr val="657422"/>
-                </a:solidFill>
-                <a:latin typeface="Courier"/>
-              </a:rPr>
-              <a:t>title =</a:t>
-            </a:r>
-            <a:r>
-              <a:rPr>
-                <a:solidFill>
-                  <a:srgbClr val="003B4F"/>
-                </a:solidFill>
-                <a:latin typeface="Courier"/>
-              </a:rPr>
-              <a:t> </a:t>
-            </a:r>
-            <a:r>
-              <a:rPr>
-                <a:solidFill>
-                  <a:srgbClr val="20794D"/>
-                </a:solidFill>
-                <a:latin typeface="Courier"/>
-              </a:rPr>
-              <a:t>"Needle length by wind exposure"</a:t>
-            </a:r>
-            <a:r>
-              <a:rPr>
-                <a:solidFill>
-                  <a:srgbClr val="003B4F"/>
-                </a:solidFill>
-                <a:latin typeface="Courier"/>
-              </a:rPr>
-              <a:t>)</a:t>
-            </a:r>
-          </a:p>
-        </p:txBody>
-      </p:sp>
-      <p:pic>
-        <p:nvPicPr>
-          <p:cNvPr descr="01_getting_started_lecture_files/figure-pptx/unnamed-chunk-5-1.png" id="0" name="Picture 1"/>
-          <p:cNvPicPr>
-            <a:picLocks noGrp="1" noChangeAspect="1"/>
-          </p:cNvPicPr>
-          <p:nvPr/>
-        </p:nvPicPr>
-        <p:blipFill>
-          <a:blip r:embed="rId2"/>
-          <a:stretch>
-            <a:fillRect/>
-          </a:stretch>
-        </p:blipFill>
-        <p:spPr bwMode="auto">
-          <a:xfrm>
-            <a:off x="990600" y="1625600"/>
-            <a:ext cx="2959100" cy="2959100"/>
-          </a:xfrm>
-          <a:prstGeom prst="rect">
-            <a:avLst/>
-          </a:prstGeom>
-          <a:noFill/>
-          <a:ln w="9525">
-            <a:noFill/>
-            <a:headEnd/>
-            <a:tailEnd/>
-          </a:ln>
-        </p:spPr>
-      </p:pic>
-      <p:sp>
-        <p:nvSpPr>
-          <p:cNvPr id="4" name="Content Placeholder 3"/>
-          <p:cNvSpPr>
-            <a:spLocks noGrp="1"/>
-          </p:cNvSpPr>
-          <p:nvPr>
-            <p:ph idx="2" sz="half"/>
-          </p:nvPr>
-        </p:nvSpPr>
-        <p:spPr/>
-        <p:txBody>
-          <a:bodyPr/>
-          <a:lstStyle/>
+          </a:p>
           <a:p>
             <a:pPr lvl="0" indent="0" marL="1270000">
               <a:buNone/>
@@ -7790,7 +8391,7 @@
             </a:pPr>
             <a:r>
               <a:rPr sz="2000" b="1"/>
-              <a:t>🖐 Try it yourself</a:t>
+              <a:t>🖐 Before next class</a:t>
             </a:r>
           </a:p>
           <a:p>
@@ -7799,39 +8400,69 @@
             </a:pPr>
             <a:r>
               <a:rPr sz="2000"/>
-              <a:t>Swap </a:t>
+              <a:t>Finish the worksheet: load </a:t>
             </a:r>
             <a:r>
               <a:rPr sz="2000">
                 <a:latin typeface="Courier"/>
               </a:rPr>
-              <a:t>wind</a:t>
+              <a:t>pine_needles.csv</a:t>
             </a:r>
             <a:r>
               <a:rPr sz="2000"/>
-              <a:t> for </a:t>
+              <a:t>, run </a:t>
             </a:r>
             <a:r>
               <a:rPr sz="2000">
                 <a:latin typeface="Courier"/>
               </a:rPr>
-              <a:t>group</a:t>
+              <a:t>glimpse()</a:t>
             </a:r>
             <a:r>
               <a:rPr sz="2000"/>
-              <a:t>. What does that plot tell you instead?</a:t>
-            </a:r>
-          </a:p>
-        </p:txBody>
-      </p:sp>
-      <p:sp>
-        <p:nvSpPr>
-          <p:cNvPr id="5" name="Text Placeholder 4"/>
-          <p:cNvSpPr>
-            <a:spLocks noGrp="1"/>
-          </p:cNvSpPr>
-          <p:nvPr>
-            <p:ph idx="3" sz="quarter" type="body"/>
+              <a:t>, and make one more plot — </a:t>
+            </a:r>
+            <a:r>
+              <a:rPr sz="2000">
+                <a:latin typeface="Courier"/>
+              </a:rPr>
+              <a:t>length_mm</a:t>
+            </a:r>
+            <a:r>
+              <a:rPr sz="2000"/>
+              <a:t> by </a:t>
+            </a:r>
+            <a:r>
+              <a:rPr sz="2000">
+                <a:latin typeface="Courier"/>
+              </a:rPr>
+              <a:t>n_s</a:t>
+            </a:r>
+            <a:r>
+              <a:rPr sz="2000"/>
+              <a:t> this time. Save it to </a:t>
+            </a:r>
+            <a:r>
+              <a:rPr sz="2000">
+                <a:latin typeface="Courier"/>
+              </a:rPr>
+              <a:t>figures/</a:t>
+            </a:r>
+            <a:r>
+              <a:rPr sz="2000"/>
+              <a:t>.</a:t>
+            </a:r>
+          </a:p>
+        </p:txBody>
+      </p:sp>
+      <p:sp>
+        <p:nvSpPr>
+          <p:cNvPr id="4" name="Content Placeholder 3"/>
+          <p:cNvSpPr>
+            <a:spLocks noGrp="1"/>
+          </p:cNvSpPr>
+          <p:nvPr>
+            <p:ph idx="2" sz="half"/>
           </p:nvPr>
         </p:nvSpPr>
         <p:spPr/>
@@ -7853,16 +8484,70 @@
             </a:pPr>
             <a:r>
               <a:rPr sz="2000" b="1"/>
-              <a:t>✅ Key idea</a:t>
-            </a:r>
-          </a:p>
-          <a:p>
-            <a:pPr lvl="0" indent="0" marL="1270000">
-              <a:buNone/>
-            </a:pPr>
+              <a:t>Up next — Module 2</a:t>
+            </a:r>
+          </a:p>
+          <a:p>
+            <a:pPr lvl="0"/>
+            <a:r>
+              <a:rPr sz="2000">
+                <a:latin typeface="Courier"/>
+              </a:rPr>
+              <a:t>filter()</a:t>
+            </a:r>
             <a:r>
               <a:rPr sz="2000"/>
-              <a:t>A boxplot shows the summary; the jittered points show every real value underneath it. Show both when you can.</a:t>
+              <a:t>, </a:t>
+            </a:r>
+            <a:r>
+              <a:rPr sz="2000">
+                <a:latin typeface="Courier"/>
+              </a:rPr>
+              <a:t>select()</a:t>
+            </a:r>
+            <a:r>
+              <a:rPr sz="2000"/>
+              <a:t>, </a:t>
+            </a:r>
+            <a:r>
+              <a:rPr sz="2000">
+                <a:latin typeface="Courier"/>
+              </a:rPr>
+              <a:t>mutate()</a:t>
+            </a:r>
+            <a:r>
+              <a:rPr sz="2000"/>
+              <a:t>, </a:t>
+            </a:r>
+            <a:r>
+              <a:rPr sz="2000">
+                <a:latin typeface="Courier"/>
+              </a:rPr>
+              <a:t>arrange()</a:t>
+            </a:r>
+          </a:p>
+          <a:p>
+            <a:pPr lvl="0"/>
+            <a:r>
+              <a:rPr sz="2000"/>
+              <a:t>Cleaning a genuinely messy version of this dataset</a:t>
+            </a:r>
+          </a:p>
+          <a:p>
+            <a:pPr lvl="0"/>
+            <a:r>
+              <a:rPr sz="2000"/>
+              <a:t>The pipe </a:t>
+            </a:r>
+            <a:r>
+              <a:rPr sz="2000">
+                <a:latin typeface="Courier"/>
+              </a:rPr>
+              <a:t>|&gt;</a:t>
+            </a:r>
+            <a:r>
+              <a:rPr sz="2000"/>
+              <a:t> and building a pipeline</a:t>
             </a:r>
           </a:p>
         </p:txBody>
@@ -7872,7 +8557,7 @@
 </p:sld>
 </file>
 
-<file path=ppt/slides/slide33.xml><?xml version="1.0" encoding="utf-8"?>
+<file path=ppt/slides/slide26.xml><?xml version="1.0" encoding="utf-8"?>
 <p:sld xmlns:a="http://schemas.openxmlformats.org/drawingml/2006/main" xmlns:r="http://schemas.openxmlformats.org/officeDocument/2006/relationships" xmlns:p="http://schemas.openxmlformats.org/presentationml/2006/main">
   <p:cSld>
     <p:spTree>
@@ -7891,6 +8576,31 @@
       </p:grpSpPr>
       <p:sp>
         <p:nvSpPr>
+          <p:cNvPr id="2" name="Title 1"/>
+          <p:cNvSpPr>
+            <a:spLocks noGrp="1"/>
+          </p:cNvSpPr>
+          <p:nvPr>
+            <p:ph type="title"/>
+          </p:nvPr>
+        </p:nvSpPr>
+        <p:spPr/>
+        <p:txBody>
+          <a:bodyPr/>
+          <a:lstStyle/>
+          <a:p>
+            <a:pPr lvl="0" indent="0" marL="0">
+              <a:buNone/>
+            </a:pPr>
+            <a:r>
+              <a:rPr/>
+              <a:t>Getting unstuck</a:t>
+            </a:r>
+          </a:p>
+        </p:txBody>
+      </p:sp>
+      <p:sp>
+        <p:nvSpPr>
           <p:cNvPr id="3" name="Content Placeholder 2"/>
           <p:cNvSpPr>
             <a:spLocks noGrp="1"/>
@@ -7905,14 +8615,134 @@
           <a:lstStyle/>
           <a:p>
             <a:pPr lvl="0" indent="0" marL="0">
-              <a:spcBef>
-                <a:spcPts val="3000"/>
-              </a:spcBef>
-              <a:buNone/>
-            </a:pPr>
+              <a:buNone/>
+            </a:pPr>
+            <a:r>
+              <a:rPr/>
+              <a:t>When code breaks — and it will, that is normal:</a:t>
+            </a:r>
+          </a:p>
+          <a:p>
+            <a:pPr lvl="0" indent="-342900" marL="342900">
+              <a:buAutoNum type="arabicPeriod"/>
+            </a:pPr>
+            <a:r>
+              <a:rPr/>
+              <a:t>Read the </a:t>
+            </a:r>
             <a:r>
               <a:rPr b="1"/>
-              <a:t>Save your plot</a:t>
+              <a:t>error message</a:t>
+            </a:r>
+            <a:r>
+              <a:rPr/>
+              <a:t> out loud; it usually names the line</a:t>
+            </a:r>
+          </a:p>
+          <a:p>
+            <a:pPr lvl="0" indent="-342900" marL="342900">
+              <a:buAutoNum type="arabicPeriod"/>
+            </a:pPr>
+            <a:r>
+              <a:rPr/>
+              <a:t>Check the usual suspects: </a:t>
+            </a:r>
+            <a:r>
+              <a:rPr>
+                <a:latin typeface="Courier"/>
+              </a:rPr>
+              <a:t>library(tidyverse)</a:t>
+            </a:r>
+            <a:r>
+              <a:rPr/>
+              <a:t> loaded? Spelling? A missing </a:t>
+            </a:r>
+            <a:r>
+              <a:rPr>
+                <a:latin typeface="Courier"/>
+              </a:rPr>
+              <a:t>)</a:t>
+            </a:r>
+            <a:r>
+              <a:rPr/>
+              <a:t> or </a:t>
+            </a:r>
+            <a:r>
+              <a:rPr>
+                <a:latin typeface="Courier"/>
+              </a:rPr>
+              <a:t>+</a:t>
+            </a:r>
+            <a:r>
+              <a:rPr/>
+              <a:t> at the </a:t>
+            </a:r>
+            <a:r>
+              <a:rPr i="1"/>
+              <a:t>start</a:t>
+            </a:r>
+            <a:r>
+              <a:rPr/>
+              <a:t> of a line?</a:t>
+            </a:r>
+          </a:p>
+          <a:p>
+            <a:pPr lvl="0" indent="-342900" marL="342900">
+              <a:buAutoNum type="arabicPeriod"/>
+            </a:pPr>
+            <a:r>
+              <a:rPr>
+                <a:latin typeface="Courier"/>
+              </a:rPr>
+              <a:t>?function_name</a:t>
+            </a:r>
+            <a:r>
+              <a:rPr/>
+              <a:t> opens the help page</a:t>
+            </a:r>
+          </a:p>
+          <a:p>
+            <a:pPr lvl="0" indent="-342900" marL="342900">
+              <a:buAutoNum type="arabicPeriod"/>
+            </a:pPr>
+            <a:r>
+              <a:rPr/>
+              <a:t>Bring the </a:t>
+            </a:r>
+            <a:r>
+              <a:rPr b="1"/>
+              <a:t>exact error</a:t>
+            </a:r>
+            <a:r>
+              <a:rPr/>
+              <a:t> (copy-paste it) to class or office hours</a:t>
+            </a:r>
+          </a:p>
+          <a:p>
+            <a:pPr lvl="0" indent="0" marL="1270000">
+              <a:buNone/>
+            </a:pPr>
+            <a:r>
+              <a:rPr sz="2000" b="1"/>
+              <a:t>Note</a:t>
+            </a:r>
+          </a:p>
+          <a:p>
+            <a:pPr lvl="0" indent="0" marL="1270000">
+              <a:buNone/>
+            </a:pPr>
+            <a:r>
+              <a:rPr sz="2000" b="1"/>
+              <a:t>✅ Key idea</a:t>
+            </a:r>
+          </a:p>
+          <a:p>
+            <a:pPr lvl="0" indent="0" marL="1270000">
+              <a:buNone/>
+            </a:pPr>
+            <a:r>
+              <a:rPr sz="2000"/>
+              <a:t>Every working scientist googles error messages daily. Getting stuck is not failing — it is the job.</a:t>
             </a:r>
           </a:p>
         </p:txBody>
@@ -7922,7 +8752,7 @@
 </p:sld>
 </file>
 
-<file path=ppt/slides/slide34.xml><?xml version="1.0" encoding="utf-8"?>
+<file path=ppt/slides/slide3.xml><?xml version="1.0" encoding="utf-8"?>
 <p:sld xmlns:a="http://schemas.openxmlformats.org/drawingml/2006/main" xmlns:r="http://schemas.openxmlformats.org/officeDocument/2006/relationships" xmlns:p="http://schemas.openxmlformats.org/presentationml/2006/main">
   <p:cSld>
     <p:spTree>
@@ -7941,759 +8771,37 @@
       </p:grpSpPr>
       <p:sp>
         <p:nvSpPr>
+          <p:cNvPr id="2" name="Title 1"/>
+          <p:cNvSpPr>
+            <a:spLocks noGrp="1"/>
+          </p:cNvSpPr>
+          <p:nvPr>
+            <p:ph type="title"/>
+          </p:nvPr>
+        </p:nvSpPr>
+        <p:spPr/>
+        <p:txBody>
+          <a:bodyPr/>
+          <a:lstStyle/>
+          <a:p>
+            <a:pPr lvl="0" indent="0" marL="0">
+              <a:buNone/>
+            </a:pPr>
+            <a:r>
+              <a:rPr/>
+              <a:t>Part 1 · Asking a Good Question</a:t>
+            </a:r>
+          </a:p>
+        </p:txBody>
+      </p:sp>
+      <p:sp>
+        <p:nvSpPr>
           <p:cNvPr id="3" name="Content Placeholder 2"/>
           <p:cNvSpPr>
             <a:spLocks noGrp="1"/>
           </p:cNvSpPr>
           <p:nvPr>
-            <p:ph idx="1" sz="half"/>
-          </p:nvPr>
-        </p:nvSpPr>
-        <p:spPr/>
-        <p:txBody>
-          <a:bodyPr/>
-          <a:lstStyle/>
-          <a:p>
-            <a:pPr lvl="0" indent="0">
-              <a:buNone/>
-            </a:pPr>
-            <a:r>
-              <a:rPr>
-                <a:solidFill>
-                  <a:srgbClr val="003B4F"/>
-                </a:solidFill>
-                <a:latin typeface="Courier"/>
-              </a:rPr>
-              <a:t>needle_plot &lt;- </a:t>
-            </a:r>
-            <a:r>
-              <a:rPr>
-                <a:solidFill>
-                  <a:srgbClr val="4758AB"/>
-                </a:solidFill>
-                <a:latin typeface="Courier"/>
-              </a:rPr>
-              <a:t>ggplot</a:t>
-            </a:r>
-            <a:r>
-              <a:rPr>
-                <a:solidFill>
-                  <a:srgbClr val="003B4F"/>
-                </a:solidFill>
-                <a:latin typeface="Courier"/>
-              </a:rPr>
-              <a:t>(pine_df, </a:t>
-            </a:r>
-            <a:r>
-              <a:rPr>
-                <a:solidFill>
-                  <a:srgbClr val="4758AB"/>
-                </a:solidFill>
-                <a:latin typeface="Courier"/>
-              </a:rPr>
-              <a:t>aes</a:t>
-            </a:r>
-            <a:r>
-              <a:rPr>
-                <a:solidFill>
-                  <a:srgbClr val="003B4F"/>
-                </a:solidFill>
-                <a:latin typeface="Courier"/>
-              </a:rPr>
-              <a:t>(</a:t>
-            </a:r>
-            <a:r>
-              <a:rPr>
-                <a:solidFill>
-                  <a:srgbClr val="657422"/>
-                </a:solidFill>
-                <a:latin typeface="Courier"/>
-              </a:rPr>
-              <a:t>x =</a:t>
-            </a:r>
-            <a:r>
-              <a:rPr>
-                <a:solidFill>
-                  <a:srgbClr val="003B4F"/>
-                </a:solidFill>
-                <a:latin typeface="Courier"/>
-              </a:rPr>
-              <a:t> wind, </a:t>
-            </a:r>
-            <a:r>
-              <a:rPr>
-                <a:solidFill>
-                  <a:srgbClr val="657422"/>
-                </a:solidFill>
-                <a:latin typeface="Courier"/>
-              </a:rPr>
-              <a:t>y =</a:t>
-            </a:r>
-            <a:r>
-              <a:rPr>
-                <a:solidFill>
-                  <a:srgbClr val="003B4F"/>
-                </a:solidFill>
-                <a:latin typeface="Courier"/>
-              </a:rPr>
-              <a:t> length_mm)) </a:t>
-            </a:r>
-            <a:r>
-              <a:rPr>
-                <a:solidFill>
-                  <a:srgbClr val="5E5E5E"/>
-                </a:solidFill>
-                <a:latin typeface="Courier"/>
-              </a:rPr>
-              <a:t>+</a:t>
-            </a:r>
-            <a:br/>
-            <a:r>
-              <a:rPr>
-                <a:solidFill>
-                  <a:srgbClr val="003B4F"/>
-                </a:solidFill>
-                <a:latin typeface="Courier"/>
-              </a:rPr>
-              <a:t>  </a:t>
-            </a:r>
-            <a:r>
-              <a:rPr>
-                <a:solidFill>
-                  <a:srgbClr val="4758AB"/>
-                </a:solidFill>
-                <a:latin typeface="Courier"/>
-              </a:rPr>
-              <a:t>geom_boxplot</a:t>
-            </a:r>
-            <a:r>
-              <a:rPr>
-                <a:solidFill>
-                  <a:srgbClr val="003B4F"/>
-                </a:solidFill>
-                <a:latin typeface="Courier"/>
-              </a:rPr>
-              <a:t>() </a:t>
-            </a:r>
-            <a:r>
-              <a:rPr>
-                <a:solidFill>
-                  <a:srgbClr val="5E5E5E"/>
-                </a:solidFill>
-                <a:latin typeface="Courier"/>
-              </a:rPr>
-              <a:t>+</a:t>
-            </a:r>
-            <a:br/>
-            <a:r>
-              <a:rPr>
-                <a:solidFill>
-                  <a:srgbClr val="003B4F"/>
-                </a:solidFill>
-                <a:latin typeface="Courier"/>
-              </a:rPr>
-              <a:t>  </a:t>
-            </a:r>
-            <a:r>
-              <a:rPr>
-                <a:solidFill>
-                  <a:srgbClr val="4758AB"/>
-                </a:solidFill>
-                <a:latin typeface="Courier"/>
-              </a:rPr>
-              <a:t>geom_jitter</a:t>
-            </a:r>
-            <a:r>
-              <a:rPr>
-                <a:solidFill>
-                  <a:srgbClr val="003B4F"/>
-                </a:solidFill>
-                <a:latin typeface="Courier"/>
-              </a:rPr>
-              <a:t>(</a:t>
-            </a:r>
-            <a:r>
-              <a:rPr>
-                <a:solidFill>
-                  <a:srgbClr val="657422"/>
-                </a:solidFill>
-                <a:latin typeface="Courier"/>
-              </a:rPr>
-              <a:t>width =</a:t>
-            </a:r>
-            <a:r>
-              <a:rPr>
-                <a:solidFill>
-                  <a:srgbClr val="003B4F"/>
-                </a:solidFill>
-                <a:latin typeface="Courier"/>
-              </a:rPr>
-              <a:t> </a:t>
-            </a:r>
-            <a:r>
-              <a:rPr>
-                <a:solidFill>
-                  <a:srgbClr val="AD0000"/>
-                </a:solidFill>
-                <a:latin typeface="Courier"/>
-              </a:rPr>
-              <a:t>0.15</a:t>
-            </a:r>
-            <a:r>
-              <a:rPr>
-                <a:solidFill>
-                  <a:srgbClr val="003B4F"/>
-                </a:solidFill>
-                <a:latin typeface="Courier"/>
-              </a:rPr>
-              <a:t>, </a:t>
-            </a:r>
-            <a:r>
-              <a:rPr>
-                <a:solidFill>
-                  <a:srgbClr val="657422"/>
-                </a:solidFill>
-                <a:latin typeface="Courier"/>
-              </a:rPr>
-              <a:t>alpha =</a:t>
-            </a:r>
-            <a:r>
-              <a:rPr>
-                <a:solidFill>
-                  <a:srgbClr val="003B4F"/>
-                </a:solidFill>
-                <a:latin typeface="Courier"/>
-              </a:rPr>
-              <a:t> </a:t>
-            </a:r>
-            <a:r>
-              <a:rPr>
-                <a:solidFill>
-                  <a:srgbClr val="AD0000"/>
-                </a:solidFill>
-                <a:latin typeface="Courier"/>
-              </a:rPr>
-              <a:t>0.6</a:t>
-            </a:r>
-            <a:r>
-              <a:rPr>
-                <a:solidFill>
-                  <a:srgbClr val="003B4F"/>
-                </a:solidFill>
-                <a:latin typeface="Courier"/>
-              </a:rPr>
-              <a:t>, </a:t>
-            </a:r>
-            <a:r>
-              <a:rPr>
-                <a:solidFill>
-                  <a:srgbClr val="657422"/>
-                </a:solidFill>
-                <a:latin typeface="Courier"/>
-              </a:rPr>
-              <a:t>color =</a:t>
-            </a:r>
-            <a:r>
-              <a:rPr>
-                <a:solidFill>
-                  <a:srgbClr val="003B4F"/>
-                </a:solidFill>
-                <a:latin typeface="Courier"/>
-              </a:rPr>
-              <a:t> </a:t>
-            </a:r>
-            <a:r>
-              <a:rPr>
-                <a:solidFill>
-                  <a:srgbClr val="20794D"/>
-                </a:solidFill>
-                <a:latin typeface="Courier"/>
-              </a:rPr>
-              <a:t>"tomato"</a:t>
-            </a:r>
-            <a:r>
-              <a:rPr>
-                <a:solidFill>
-                  <a:srgbClr val="003B4F"/>
-                </a:solidFill>
-                <a:latin typeface="Courier"/>
-              </a:rPr>
-              <a:t>) </a:t>
-            </a:r>
-            <a:r>
-              <a:rPr>
-                <a:solidFill>
-                  <a:srgbClr val="5E5E5E"/>
-                </a:solidFill>
-                <a:latin typeface="Courier"/>
-              </a:rPr>
-              <a:t>+</a:t>
-            </a:r>
-            <a:br/>
-            <a:r>
-              <a:rPr>
-                <a:solidFill>
-                  <a:srgbClr val="003B4F"/>
-                </a:solidFill>
-                <a:latin typeface="Courier"/>
-              </a:rPr>
-              <a:t>  </a:t>
-            </a:r>
-            <a:r>
-              <a:rPr>
-                <a:solidFill>
-                  <a:srgbClr val="4758AB"/>
-                </a:solidFill>
-                <a:latin typeface="Courier"/>
-              </a:rPr>
-              <a:t>labs</a:t>
-            </a:r>
-            <a:r>
-              <a:rPr>
-                <a:solidFill>
-                  <a:srgbClr val="003B4F"/>
-                </a:solidFill>
-                <a:latin typeface="Courier"/>
-              </a:rPr>
-              <a:t>(</a:t>
-            </a:r>
-            <a:r>
-              <a:rPr>
-                <a:solidFill>
-                  <a:srgbClr val="657422"/>
-                </a:solidFill>
-                <a:latin typeface="Courier"/>
-              </a:rPr>
-              <a:t>x =</a:t>
-            </a:r>
-            <a:r>
-              <a:rPr>
-                <a:solidFill>
-                  <a:srgbClr val="003B4F"/>
-                </a:solidFill>
-                <a:latin typeface="Courier"/>
-              </a:rPr>
-              <a:t> </a:t>
-            </a:r>
-            <a:r>
-              <a:rPr>
-                <a:solidFill>
-                  <a:srgbClr val="20794D"/>
-                </a:solidFill>
-                <a:latin typeface="Courier"/>
-              </a:rPr>
-              <a:t>"Side of tree"</a:t>
-            </a:r>
-            <a:r>
-              <a:rPr>
-                <a:solidFill>
-                  <a:srgbClr val="003B4F"/>
-                </a:solidFill>
-                <a:latin typeface="Courier"/>
-              </a:rPr>
-              <a:t>, </a:t>
-            </a:r>
-            <a:r>
-              <a:rPr>
-                <a:solidFill>
-                  <a:srgbClr val="657422"/>
-                </a:solidFill>
-                <a:latin typeface="Courier"/>
-              </a:rPr>
-              <a:t>y =</a:t>
-            </a:r>
-            <a:r>
-              <a:rPr>
-                <a:solidFill>
-                  <a:srgbClr val="003B4F"/>
-                </a:solidFill>
-                <a:latin typeface="Courier"/>
-              </a:rPr>
-              <a:t> </a:t>
-            </a:r>
-            <a:r>
-              <a:rPr>
-                <a:solidFill>
-                  <a:srgbClr val="20794D"/>
-                </a:solidFill>
-                <a:latin typeface="Courier"/>
-              </a:rPr>
-              <a:t>"Needle length (mm)"</a:t>
-            </a:r>
-            <a:r>
-              <a:rPr>
-                <a:solidFill>
-                  <a:srgbClr val="003B4F"/>
-                </a:solidFill>
-                <a:latin typeface="Courier"/>
-              </a:rPr>
-              <a:t>)</a:t>
-            </a:r>
-            <a:br/>
-            <a:br/>
-            <a:r>
-              <a:rPr>
-                <a:solidFill>
-                  <a:srgbClr val="4758AB"/>
-                </a:solidFill>
-                <a:latin typeface="Courier"/>
-              </a:rPr>
-              <a:t>ggsave</a:t>
-            </a:r>
-            <a:r>
-              <a:rPr>
-                <a:solidFill>
-                  <a:srgbClr val="003B4F"/>
-                </a:solidFill>
-                <a:latin typeface="Courier"/>
-              </a:rPr>
-              <a:t>(</a:t>
-            </a:r>
-            <a:r>
-              <a:rPr>
-                <a:solidFill>
-                  <a:srgbClr val="20794D"/>
-                </a:solidFill>
-                <a:latin typeface="Courier"/>
-              </a:rPr>
-              <a:t>"figures/needle_length.png"</a:t>
-            </a:r>
-            <a:r>
-              <a:rPr>
-                <a:solidFill>
-                  <a:srgbClr val="003B4F"/>
-                </a:solidFill>
-                <a:latin typeface="Courier"/>
-              </a:rPr>
-              <a:t>,</a:t>
-            </a:r>
-            <a:br/>
-            <a:r>
-              <a:rPr>
-                <a:solidFill>
-                  <a:srgbClr val="003B4F"/>
-                </a:solidFill>
-                <a:latin typeface="Courier"/>
-              </a:rPr>
-              <a:t>       </a:t>
-            </a:r>
-            <a:r>
-              <a:rPr>
-                <a:solidFill>
-                  <a:srgbClr val="657422"/>
-                </a:solidFill>
-                <a:latin typeface="Courier"/>
-              </a:rPr>
-              <a:t>plot =</a:t>
-            </a:r>
-            <a:r>
-              <a:rPr>
-                <a:solidFill>
-                  <a:srgbClr val="003B4F"/>
-                </a:solidFill>
-                <a:latin typeface="Courier"/>
-              </a:rPr>
-              <a:t> needle_plot,</a:t>
-            </a:r>
-            <a:br/>
-            <a:r>
-              <a:rPr>
-                <a:solidFill>
-                  <a:srgbClr val="003B4F"/>
-                </a:solidFill>
-                <a:latin typeface="Courier"/>
-              </a:rPr>
-              <a:t>       </a:t>
-            </a:r>
-            <a:r>
-              <a:rPr>
-                <a:solidFill>
-                  <a:srgbClr val="657422"/>
-                </a:solidFill>
-                <a:latin typeface="Courier"/>
-              </a:rPr>
-              <a:t>width =</a:t>
-            </a:r>
-            <a:r>
-              <a:rPr>
-                <a:solidFill>
-                  <a:srgbClr val="003B4F"/>
-                </a:solidFill>
-                <a:latin typeface="Courier"/>
-              </a:rPr>
-              <a:t> </a:t>
-            </a:r>
-            <a:r>
-              <a:rPr>
-                <a:solidFill>
-                  <a:srgbClr val="AD0000"/>
-                </a:solidFill>
-                <a:latin typeface="Courier"/>
-              </a:rPr>
-              <a:t>3</a:t>
-            </a:r>
-            <a:r>
-              <a:rPr>
-                <a:solidFill>
-                  <a:srgbClr val="003B4F"/>
-                </a:solidFill>
-                <a:latin typeface="Courier"/>
-              </a:rPr>
-              <a:t>, </a:t>
-            </a:r>
-            <a:r>
-              <a:rPr>
-                <a:solidFill>
-                  <a:srgbClr val="657422"/>
-                </a:solidFill>
-                <a:latin typeface="Courier"/>
-              </a:rPr>
-              <a:t>height =</a:t>
-            </a:r>
-            <a:r>
-              <a:rPr>
-                <a:solidFill>
-                  <a:srgbClr val="003B4F"/>
-                </a:solidFill>
-                <a:latin typeface="Courier"/>
-              </a:rPr>
-              <a:t> </a:t>
-            </a:r>
-            <a:r>
-              <a:rPr>
-                <a:solidFill>
-                  <a:srgbClr val="AD0000"/>
-                </a:solidFill>
-                <a:latin typeface="Courier"/>
-              </a:rPr>
-              <a:t>3</a:t>
-            </a:r>
-            <a:r>
-              <a:rPr>
-                <a:solidFill>
-                  <a:srgbClr val="003B4F"/>
-                </a:solidFill>
-                <a:latin typeface="Courier"/>
-              </a:rPr>
-              <a:t>, </a:t>
-            </a:r>
-            <a:r>
-              <a:rPr>
-                <a:solidFill>
-                  <a:srgbClr val="657422"/>
-                </a:solidFill>
-                <a:latin typeface="Courier"/>
-              </a:rPr>
-              <a:t>units =</a:t>
-            </a:r>
-            <a:r>
-              <a:rPr>
-                <a:solidFill>
-                  <a:srgbClr val="003B4F"/>
-                </a:solidFill>
-                <a:latin typeface="Courier"/>
-              </a:rPr>
-              <a:t> </a:t>
-            </a:r>
-            <a:r>
-              <a:rPr>
-                <a:solidFill>
-                  <a:srgbClr val="20794D"/>
-                </a:solidFill>
-                <a:latin typeface="Courier"/>
-              </a:rPr>
-              <a:t>"in"</a:t>
-            </a:r>
-            <a:r>
-              <a:rPr>
-                <a:solidFill>
-                  <a:srgbClr val="003B4F"/>
-                </a:solidFill>
-                <a:latin typeface="Courier"/>
-              </a:rPr>
-              <a:t>, </a:t>
-            </a:r>
-            <a:r>
-              <a:rPr>
-                <a:solidFill>
-                  <a:srgbClr val="657422"/>
-                </a:solidFill>
-                <a:latin typeface="Courier"/>
-              </a:rPr>
-              <a:t>dpi =</a:t>
-            </a:r>
-            <a:r>
-              <a:rPr>
-                <a:solidFill>
-                  <a:srgbClr val="003B4F"/>
-                </a:solidFill>
-                <a:latin typeface="Courier"/>
-              </a:rPr>
-              <a:t> </a:t>
-            </a:r>
-            <a:r>
-              <a:rPr>
-                <a:solidFill>
-                  <a:srgbClr val="AD0000"/>
-                </a:solidFill>
-                <a:latin typeface="Courier"/>
-              </a:rPr>
-              <a:t>300</a:t>
-            </a:r>
-            <a:r>
-              <a:rPr>
-                <a:solidFill>
-                  <a:srgbClr val="003B4F"/>
-                </a:solidFill>
-                <a:latin typeface="Courier"/>
-              </a:rPr>
-              <a:t>)</a:t>
-            </a:r>
-          </a:p>
-          <a:p>
-            <a:pPr lvl="0" indent="0" marL="1270000">
-              <a:buNone/>
-            </a:pPr>
-            <a:r>
-              <a:rPr sz="2000" b="1"/>
-              <a:t>Warning</a:t>
-            </a:r>
-          </a:p>
-          <a:p>
-            <a:pPr lvl="0" indent="0" marL="1270000">
-              <a:buNone/>
-            </a:pPr>
-            <a:r>
-              <a:rPr sz="2000" b="1"/>
-              <a:t>⚠️ Watch out!</a:t>
-            </a:r>
-          </a:p>
-          <a:p>
-            <a:pPr lvl="0" indent="0" marL="1270000">
-              <a:buNone/>
-            </a:pPr>
-            <a:r>
-              <a:rPr sz="2000">
-                <a:latin typeface="Courier"/>
-              </a:rPr>
-              <a:t>ggsave()</a:t>
-            </a:r>
-            <a:r>
-              <a:rPr sz="2000"/>
-              <a:t> wants the </a:t>
-            </a:r>
-            <a:r>
-              <a:rPr sz="2000" b="1"/>
-              <a:t>filename first</a:t>
-            </a:r>
-            <a:r>
-              <a:rPr sz="2000"/>
-              <a:t>, then </a:t>
-            </a:r>
-            <a:r>
-              <a:rPr sz="2000">
-                <a:latin typeface="Courier"/>
-              </a:rPr>
-              <a:t>plot =</a:t>
-            </a:r>
-            <a:r>
-              <a:rPr sz="2000"/>
-              <a:t>. Always use </a:t>
-            </a:r>
-            <a:r>
-              <a:rPr sz="2000">
-                <a:latin typeface="Courier"/>
-              </a:rPr>
-              <a:t>dpi = 300</a:t>
-            </a:r>
-            <a:r>
-              <a:rPr sz="2000"/>
-              <a:t> — print/poster quality.</a:t>
-            </a:r>
-          </a:p>
-        </p:txBody>
-      </p:sp>
-      <p:sp>
-        <p:nvSpPr>
-          <p:cNvPr id="4" name="Content Placeholder 3"/>
-          <p:cNvSpPr>
-            <a:spLocks noGrp="1"/>
-          </p:cNvSpPr>
-          <p:nvPr>
-            <p:ph idx="2" sz="half"/>
-          </p:nvPr>
-        </p:nvSpPr>
-        <p:spPr/>
-        <p:txBody>
-          <a:bodyPr/>
-          <a:lstStyle/>
-          <a:p>
-            <a:pPr lvl="0" indent="0" marL="1270000">
-              <a:buNone/>
-            </a:pPr>
-            <a:r>
-              <a:rPr sz="2000" b="1"/>
-              <a:t>Note</a:t>
-            </a:r>
-          </a:p>
-          <a:p>
-            <a:pPr lvl="0" indent="0" marL="1270000">
-              <a:buNone/>
-            </a:pPr>
-            <a:r>
-              <a:rPr sz="2000" b="1"/>
-              <a:t>📖 File format tip</a:t>
-            </a:r>
-          </a:p>
-          <a:p>
-            <a:pPr lvl="0" indent="0" marL="1270000">
-              <a:buNone/>
-            </a:pPr>
-            <a:r>
-              <a:rPr sz="2000"/>
-              <a:t>Save figures as </a:t>
-            </a:r>
-            <a:r>
-              <a:rPr sz="2000" b="1"/>
-              <a:t>PNG</a:t>
-            </a:r>
-            <a:r>
-              <a:rPr sz="2000"/>
-              <a:t> for reports and submissions.</a:t>
-            </a:r>
-          </a:p>
-        </p:txBody>
-      </p:sp>
-    </p:spTree>
-  </p:cSld>
-</p:sld>
-</file>
-
-<file path=ppt/slides/slide35.xml><?xml version="1.0" encoding="utf-8"?>
-<p:sld xmlns:a="http://schemas.openxmlformats.org/drawingml/2006/main" xmlns:r="http://schemas.openxmlformats.org/officeDocument/2006/relationships" xmlns:p="http://schemas.openxmlformats.org/presentationml/2006/main">
-  <p:cSld>
-    <p:spTree>
-      <p:nvGrpSpPr>
-        <p:cNvPr id="1" name=""/>
-        <p:cNvGrpSpPr/>
-        <p:nvPr/>
-      </p:nvGrpSpPr>
-      <p:grpSpPr>
-        <a:xfrm>
-          <a:off x="0" y="0"/>
-          <a:ext cx="0" cy="0"/>
-          <a:chOff x="0" y="0"/>
-          <a:chExt cx="0" cy="0"/>
-        </a:xfrm>
-      </p:grpSpPr>
-      <p:sp>
-        <p:nvSpPr>
-          <p:cNvPr id="2" name="Title 1"/>
-          <p:cNvSpPr>
-            <a:spLocks noGrp="1"/>
-          </p:cNvSpPr>
-          <p:nvPr>
-            <p:ph type="title"/>
+            <p:ph idx="1"/>
           </p:nvPr>
         </p:nvSpPr>
         <p:spPr/>
@@ -8702,451 +8810,14 @@
           <a:lstStyle/>
           <a:p>
             <a:pPr lvl="0" indent="0" marL="0">
-              <a:buNone/>
-            </a:pPr>
-            <a:r>
-              <a:rPr/>
-              <a:t>Wrap-up</a:t>
-            </a:r>
-          </a:p>
-        </p:txBody>
-      </p:sp>
-      <p:sp>
-        <p:nvSpPr>
-          <p:cNvPr id="3" name="Content Placeholder 2"/>
-          <p:cNvSpPr>
-            <a:spLocks noGrp="1"/>
-          </p:cNvSpPr>
-          <p:nvPr>
-            <p:ph idx="1" sz="half"/>
-          </p:nvPr>
-        </p:nvSpPr>
-        <p:spPr/>
-        <p:txBody>
-          <a:bodyPr/>
-          <a:lstStyle/>
-          <a:p>
-            <a:pPr lvl="0" indent="0" marL="0">
-              <a:buNone/>
-            </a:pPr>
-            <a:r>
-              <a:rPr/>
-              <a:t>Today you:</a:t>
-            </a:r>
-          </a:p>
-          <a:p>
-            <a:pPr lvl="0"/>
-            <a:r>
-              <a:rPr/>
-              <a:t>Turned a question into a testable </a:t>
-            </a:r>
+              <a:spcBef>
+                <a:spcPts val="3000"/>
+              </a:spcBef>
+              <a:buNone/>
+            </a:pPr>
             <a:r>
               <a:rPr b="1"/>
-              <a:t>H₀ / Hₐ</a:t>
-            </a:r>
-          </a:p>
-          <a:p>
-            <a:pPr lvl="0"/>
-            <a:r>
-              <a:rPr/>
-              <a:t>Organized a project folder with </a:t>
-            </a:r>
-            <a:r>
-              <a:rPr b="1"/>
-              <a:t>data/scripts/figures</a:t>
-            </a:r>
-          </a:p>
-          <a:p>
-            <a:pPr lvl="0"/>
-            <a:r>
-              <a:rPr/>
-              <a:t>Ran your first R code — objects, functions, vectors, packages</a:t>
-            </a:r>
-          </a:p>
-          <a:p>
-            <a:pPr lvl="0"/>
-            <a:r>
-              <a:rPr/>
-              <a:t>Loaded real data and made — and saved — your </a:t>
-            </a:r>
-            <a:r>
-              <a:rPr b="1"/>
-              <a:t>first </a:t>
-            </a:r>
-            <a:r>
-              <a:rPr b="1">
-                <a:latin typeface="Courier"/>
-              </a:rPr>
-              <a:t>ggplot</a:t>
-            </a:r>
-          </a:p>
-          <a:p>
-            <a:pPr lvl="0" indent="0" marL="1270000">
-              <a:buNone/>
-            </a:pPr>
-            <a:r>
-              <a:rPr sz="2000" b="1"/>
-              <a:t>Tip</a:t>
-            </a:r>
-          </a:p>
-          <a:p>
-            <a:pPr lvl="0" indent="0" marL="1270000">
-              <a:buNone/>
-            </a:pPr>
-            <a:r>
-              <a:rPr sz="2000" b="1"/>
-              <a:t>🖐 Before next class</a:t>
-            </a:r>
-          </a:p>
-          <a:p>
-            <a:pPr lvl="0" indent="0" marL="1270000">
-              <a:buNone/>
-            </a:pPr>
-            <a:r>
-              <a:rPr sz="2000"/>
-              <a:t>Finish the worksheet: load </a:t>
-            </a:r>
-            <a:r>
-              <a:rPr sz="2000">
-                <a:latin typeface="Courier"/>
-              </a:rPr>
-              <a:t>pine_needles.csv</a:t>
-            </a:r>
-            <a:r>
-              <a:rPr sz="2000"/>
-              <a:t>, run </a:t>
-            </a:r>
-            <a:r>
-              <a:rPr sz="2000">
-                <a:latin typeface="Courier"/>
-              </a:rPr>
-              <a:t>glimpse()</a:t>
-            </a:r>
-            <a:r>
-              <a:rPr sz="2000"/>
-              <a:t>, and make one more plot — </a:t>
-            </a:r>
-            <a:r>
-              <a:rPr sz="2000">
-                <a:latin typeface="Courier"/>
-              </a:rPr>
-              <a:t>length_mm</a:t>
-            </a:r>
-            <a:r>
-              <a:rPr sz="2000"/>
-              <a:t> by </a:t>
-            </a:r>
-            <a:r>
-              <a:rPr sz="2000">
-                <a:latin typeface="Courier"/>
-              </a:rPr>
-              <a:t>n_s</a:t>
-            </a:r>
-            <a:r>
-              <a:rPr sz="2000"/>
-              <a:t> this time. Save it to </a:t>
-            </a:r>
-            <a:r>
-              <a:rPr sz="2000">
-                <a:latin typeface="Courier"/>
-              </a:rPr>
-              <a:t>figures/</a:t>
-            </a:r>
-            <a:r>
-              <a:rPr sz="2000"/>
-              <a:t>.</a:t>
-            </a:r>
-          </a:p>
-        </p:txBody>
-      </p:sp>
-      <p:sp>
-        <p:nvSpPr>
-          <p:cNvPr id="4" name="Content Placeholder 3"/>
-          <p:cNvSpPr>
-            <a:spLocks noGrp="1"/>
-          </p:cNvSpPr>
-          <p:nvPr>
-            <p:ph idx="2" sz="half"/>
-          </p:nvPr>
-        </p:nvSpPr>
-        <p:spPr/>
-        <p:txBody>
-          <a:bodyPr/>
-          <a:lstStyle/>
-          <a:p>
-            <a:pPr lvl="0" indent="0" marL="1270000">
-              <a:buNone/>
-            </a:pPr>
-            <a:r>
-              <a:rPr sz="2000" b="1"/>
-              <a:t>Note</a:t>
-            </a:r>
-          </a:p>
-          <a:p>
-            <a:pPr lvl="0" indent="0" marL="1270000">
-              <a:buNone/>
-            </a:pPr>
-            <a:r>
-              <a:rPr sz="2000" b="1"/>
-              <a:t>Up next — Module 2</a:t>
-            </a:r>
-          </a:p>
-          <a:p>
-            <a:pPr lvl="0"/>
-            <a:r>
-              <a:rPr sz="2000">
-                <a:latin typeface="Courier"/>
-              </a:rPr>
-              <a:t>filter()</a:t>
-            </a:r>
-            <a:r>
-              <a:rPr sz="2000"/>
-              <a:t>, </a:t>
-            </a:r>
-            <a:r>
-              <a:rPr sz="2000">
-                <a:latin typeface="Courier"/>
-              </a:rPr>
-              <a:t>select()</a:t>
-            </a:r>
-            <a:r>
-              <a:rPr sz="2000"/>
-              <a:t>, </a:t>
-            </a:r>
-            <a:r>
-              <a:rPr sz="2000">
-                <a:latin typeface="Courier"/>
-              </a:rPr>
-              <a:t>mutate()</a:t>
-            </a:r>
-            <a:r>
-              <a:rPr sz="2000"/>
-              <a:t>, </a:t>
-            </a:r>
-            <a:r>
-              <a:rPr sz="2000">
-                <a:latin typeface="Courier"/>
-              </a:rPr>
-              <a:t>arrange()</a:t>
-            </a:r>
-          </a:p>
-          <a:p>
-            <a:pPr lvl="0"/>
-            <a:r>
-              <a:rPr sz="2000"/>
-              <a:t>Cleaning a genuinely messy version of this dataset</a:t>
-            </a:r>
-          </a:p>
-          <a:p>
-            <a:pPr lvl="0"/>
-            <a:r>
-              <a:rPr sz="2000"/>
-              <a:t>The pipe </a:t>
-            </a:r>
-            <a:r>
-              <a:rPr sz="2000">
-                <a:latin typeface="Courier"/>
-              </a:rPr>
-              <a:t>|&gt;</a:t>
-            </a:r>
-            <a:r>
-              <a:rPr sz="2000"/>
-              <a:t> and building a pipeline</a:t>
-            </a:r>
-          </a:p>
-        </p:txBody>
-      </p:sp>
-    </p:spTree>
-  </p:cSld>
-</p:sld>
-</file>
-
-<file path=ppt/slides/slide36.xml><?xml version="1.0" encoding="utf-8"?>
-<p:sld xmlns:a="http://schemas.openxmlformats.org/drawingml/2006/main" xmlns:r="http://schemas.openxmlformats.org/officeDocument/2006/relationships" xmlns:p="http://schemas.openxmlformats.org/presentationml/2006/main">
-  <p:cSld>
-    <p:spTree>
-      <p:nvGrpSpPr>
-        <p:cNvPr id="1" name=""/>
-        <p:cNvGrpSpPr/>
-        <p:nvPr/>
-      </p:nvGrpSpPr>
-      <p:grpSpPr>
-        <a:xfrm>
-          <a:off x="0" y="0"/>
-          <a:ext cx="0" cy="0"/>
-          <a:chOff x="0" y="0"/>
-          <a:chExt cx="0" cy="0"/>
-        </a:xfrm>
-      </p:grpSpPr>
-      <p:sp>
-        <p:nvSpPr>
-          <p:cNvPr id="2" name="Title 1"/>
-          <p:cNvSpPr>
-            <a:spLocks noGrp="1"/>
-          </p:cNvSpPr>
-          <p:nvPr>
-            <p:ph type="title"/>
-          </p:nvPr>
-        </p:nvSpPr>
-        <p:spPr/>
-        <p:txBody>
-          <a:bodyPr/>
-          <a:lstStyle/>
-          <a:p>
-            <a:pPr lvl="0" indent="0" marL="0">
-              <a:buNone/>
-            </a:pPr>
-            <a:r>
-              <a:rPr/>
-              <a:t>Getting unstuck</a:t>
-            </a:r>
-          </a:p>
-        </p:txBody>
-      </p:sp>
-      <p:sp>
-        <p:nvSpPr>
-          <p:cNvPr id="3" name="Content Placeholder 2"/>
-          <p:cNvSpPr>
-            <a:spLocks noGrp="1"/>
-          </p:cNvSpPr>
-          <p:nvPr>
-            <p:ph idx="1"/>
-          </p:nvPr>
-        </p:nvSpPr>
-        <p:spPr/>
-        <p:txBody>
-          <a:bodyPr/>
-          <a:lstStyle/>
-          <a:p>
-            <a:pPr lvl="0" indent="0" marL="0">
-              <a:buNone/>
-            </a:pPr>
-            <a:r>
-              <a:rPr/>
-              <a:t>When code breaks — and it will, that is normal:</a:t>
-            </a:r>
-          </a:p>
-          <a:p>
-            <a:pPr lvl="0" indent="-342900" marL="342900">
-              <a:buAutoNum type="arabicPeriod"/>
-            </a:pPr>
-            <a:r>
-              <a:rPr/>
-              <a:t>Read the </a:t>
-            </a:r>
-            <a:r>
-              <a:rPr b="1"/>
-              <a:t>error message</a:t>
-            </a:r>
-            <a:r>
-              <a:rPr/>
-              <a:t> out loud; it usually names the line</a:t>
-            </a:r>
-          </a:p>
-          <a:p>
-            <a:pPr lvl="0" indent="-342900" marL="342900">
-              <a:buAutoNum type="arabicPeriod"/>
-            </a:pPr>
-            <a:r>
-              <a:rPr/>
-              <a:t>Check the usual suspects: </a:t>
-            </a:r>
-            <a:r>
-              <a:rPr>
-                <a:latin typeface="Courier"/>
-              </a:rPr>
-              <a:t>library(tidyverse)</a:t>
-            </a:r>
-            <a:r>
-              <a:rPr/>
-              <a:t> loaded? Spelling? A missing </a:t>
-            </a:r>
-            <a:r>
-              <a:rPr>
-                <a:latin typeface="Courier"/>
-              </a:rPr>
-              <a:t>)</a:t>
-            </a:r>
-            <a:r>
-              <a:rPr/>
-              <a:t> or </a:t>
-            </a:r>
-            <a:r>
-              <a:rPr>
-                <a:latin typeface="Courier"/>
-              </a:rPr>
-              <a:t>+</a:t>
-            </a:r>
-            <a:r>
-              <a:rPr/>
-              <a:t> at the </a:t>
-            </a:r>
-            <a:r>
-              <a:rPr i="1"/>
-              <a:t>start</a:t>
-            </a:r>
-            <a:r>
-              <a:rPr/>
-              <a:t> of a line?</a:t>
-            </a:r>
-          </a:p>
-          <a:p>
-            <a:pPr lvl="0" indent="-342900" marL="342900">
-              <a:buAutoNum type="arabicPeriod"/>
-            </a:pPr>
-            <a:r>
-              <a:rPr>
-                <a:latin typeface="Courier"/>
-              </a:rPr>
-              <a:t>?function_name</a:t>
-            </a:r>
-            <a:r>
-              <a:rPr/>
-              <a:t> opens the help page</a:t>
-            </a:r>
-          </a:p>
-          <a:p>
-            <a:pPr lvl="0" indent="-342900" marL="342900">
-              <a:buAutoNum type="arabicPeriod"/>
-            </a:pPr>
-            <a:r>
-              <a:rPr/>
-              <a:t>Bring the </a:t>
-            </a:r>
-            <a:r>
-              <a:rPr b="1"/>
-              <a:t>exact error</a:t>
-            </a:r>
-            <a:r>
-              <a:rPr/>
-              <a:t> (copy-paste it) to class or office hours</a:t>
-            </a:r>
-          </a:p>
-          <a:p>
-            <a:pPr lvl="0" indent="0" marL="1270000">
-              <a:buNone/>
-            </a:pPr>
-            <a:r>
-              <a:rPr sz="2000" b="1"/>
-              <a:t>Note</a:t>
-            </a:r>
-          </a:p>
-          <a:p>
-            <a:pPr lvl="0" indent="0" marL="1270000">
-              <a:buNone/>
-            </a:pPr>
-            <a:r>
-              <a:rPr sz="2000" b="1"/>
-              <a:t>✅ Key idea</a:t>
-            </a:r>
-          </a:p>
-          <a:p>
-            <a:pPr lvl="0" indent="0" marL="1270000">
-              <a:buNone/>
-            </a:pPr>
-            <a:r>
-              <a:rPr sz="2000"/>
-              <a:t>Every working scientist googles error messages daily. Getting stuck is not failing — it is the job.</a:t>
+              <a:t>What makes something science?</a:t>
             </a:r>
           </a:p>
         </p:txBody>
@@ -9321,12 +8992,12 @@
       </p:grpSpPr>
       <p:sp>
         <p:nvSpPr>
-          <p:cNvPr id="3" name="Content Placeholder 2"/>
-          <p:cNvSpPr>
-            <a:spLocks noGrp="1"/>
-          </p:cNvSpPr>
-          <p:nvPr>
-            <p:ph idx="1"/>
+          <p:cNvPr id="2" name="Title 1"/>
+          <p:cNvSpPr>
+            <a:spLocks noGrp="1"/>
+          </p:cNvSpPr>
+          <p:nvPr>
+            <p:ph type="title"/>
           </p:nvPr>
         </p:nvSpPr>
         <p:spPr/>
@@ -9335,40 +9006,15 @@
           <a:lstStyle/>
           <a:p>
             <a:pPr lvl="0" indent="0" marL="0">
-              <a:spcBef>
-                <a:spcPts val="3000"/>
-              </a:spcBef>
-              <a:buNone/>
-            </a:pPr>
-            <a:r>
-              <a:rPr b="1"/>
+              <a:buNone/>
+            </a:pPr>
+            <a:r>
+              <a:rPr/>
               <a:t>Two ways of reasoning toward that question</a:t>
             </a:r>
           </a:p>
         </p:txBody>
       </p:sp>
-    </p:spTree>
-  </p:cSld>
-</p:sld>
-</file>
-
-<file path=ppt/slides/slide6.xml><?xml version="1.0" encoding="utf-8"?>
-<p:sld xmlns:a="http://schemas.openxmlformats.org/drawingml/2006/main" xmlns:r="http://schemas.openxmlformats.org/officeDocument/2006/relationships" xmlns:p="http://schemas.openxmlformats.org/presentationml/2006/main">
-  <p:cSld>
-    <p:spTree>
-      <p:nvGrpSpPr>
-        <p:cNvPr id="1" name=""/>
-        <p:cNvGrpSpPr/>
-        <p:nvPr/>
-      </p:nvGrpSpPr>
-      <p:grpSpPr>
-        <a:xfrm>
-          <a:off x="0" y="0"/>
-          <a:ext cx="0" cy="0"/>
-          <a:chOff x="0" y="0"/>
-          <a:chExt cx="0" cy="0"/>
-        </a:xfrm>
-      </p:grpSpPr>
       <p:sp>
         <p:nvSpPr>
           <p:cNvPr id="3" name="Text Placeholder 2"/>
@@ -9590,7 +9236,7 @@
 </p:sld>
 </file>
 
-<file path=ppt/slides/slide7.xml><?xml version="1.0" encoding="utf-8"?>
+<file path=ppt/slides/slide6.xml><?xml version="1.0" encoding="utf-8"?>
 <p:sld xmlns:a="http://schemas.openxmlformats.org/drawingml/2006/main" xmlns:r="http://schemas.openxmlformats.org/officeDocument/2006/relationships" xmlns:p="http://schemas.openxmlformats.org/presentationml/2006/main">
   <p:cSld>
     <p:spTree>
@@ -9650,7 +9296,7 @@
 </p:sld>
 </file>
 
-<file path=ppt/slides/slide8.xml><?xml version="1.0" encoding="utf-8"?>
+<file path=ppt/slides/slide7.xml><?xml version="1.0" encoding="utf-8"?>
 <p:sld xmlns:a="http://schemas.openxmlformats.org/drawingml/2006/main" xmlns:r="http://schemas.openxmlformats.org/officeDocument/2006/relationships" xmlns:p="http://schemas.openxmlformats.org/presentationml/2006/main">
   <p:cSld>
     <p:spTree>
@@ -9861,6 +9507,217 @@
 </p:sld>
 </file>
 
+<file path=ppt/slides/slide8.xml><?xml version="1.0" encoding="utf-8"?>
+<p:sld xmlns:a="http://schemas.openxmlformats.org/drawingml/2006/main" xmlns:r="http://schemas.openxmlformats.org/officeDocument/2006/relationships" xmlns:p="http://schemas.openxmlformats.org/presentationml/2006/main">
+  <p:cSld>
+    <p:spTree>
+      <p:nvGrpSpPr>
+        <p:cNvPr id="1" name=""/>
+        <p:cNvGrpSpPr/>
+        <p:nvPr/>
+      </p:nvGrpSpPr>
+      <p:grpSpPr>
+        <a:xfrm>
+          <a:off x="0" y="0"/>
+          <a:ext cx="0" cy="0"/>
+          <a:chOff x="0" y="0"/>
+          <a:chExt cx="0" cy="0"/>
+        </a:xfrm>
+      </p:grpSpPr>
+      <p:sp>
+        <p:nvSpPr>
+          <p:cNvPr id="2" name="Title 1"/>
+          <p:cNvSpPr>
+            <a:spLocks noGrp="1"/>
+          </p:cNvSpPr>
+          <p:nvPr>
+            <p:ph type="title"/>
+          </p:nvPr>
+        </p:nvSpPr>
+        <p:spPr/>
+        <p:txBody>
+          <a:bodyPr/>
+          <a:lstStyle/>
+          <a:p>
+            <a:pPr lvl="0" indent="0" marL="0">
+              <a:buNone/>
+            </a:pPr>
+            <a:r>
+              <a:rPr/>
+              <a:t>Designing a defensible sample</a:t>
+            </a:r>
+          </a:p>
+        </p:txBody>
+      </p:sp>
+      <p:sp>
+        <p:nvSpPr>
+          <p:cNvPr id="3" name="Content Placeholder 2"/>
+          <p:cNvSpPr>
+            <a:spLocks noGrp="1"/>
+          </p:cNvSpPr>
+          <p:nvPr>
+            <p:ph idx="1" sz="half"/>
+          </p:nvPr>
+        </p:nvSpPr>
+        <p:spPr/>
+        <p:txBody>
+          <a:bodyPr/>
+          <a:lstStyle/>
+          <a:p>
+            <a:pPr lvl="0"/>
+            <a:r>
+              <a:rPr b="1"/>
+              <a:t>Can we test this with needles from one tree?</a:t>
+            </a:r>
+            <a:r>
+              <a:rPr/>
+              <a:t> No — that tree could just happen to have short needles. Treating many needles from </a:t>
+            </a:r>
+            <a:r>
+              <a:rPr i="1"/>
+              <a:t>one</a:t>
+            </a:r>
+            <a:r>
+              <a:rPr/>
+              <a:t> tree as if they were independent replicates is called </a:t>
+            </a:r>
+            <a:r>
+              <a:rPr b="1"/>
+              <a:t>pseudoreplication</a:t>
+            </a:r>
+            <a:r>
+              <a:rPr/>
+              <a:t> (Hurlbert 1984).</a:t>
+            </a:r>
+          </a:p>
+          <a:p>
+            <a:pPr lvl="0"/>
+            <a:r>
+              <a:rPr b="1"/>
+              <a:t>The tree — not the needle — is the unit of replication.</a:t>
+            </a:r>
+            <a:r>
+              <a:rPr/>
+              <a:t> We need needles from </a:t>
+            </a:r>
+            <a:r>
+              <a:rPr i="1"/>
+              <a:t>many</a:t>
+            </a:r>
+            <a:r>
+              <a:rPr/>
+              <a:t> trees, sampled the same way each time.</a:t>
+            </a:r>
+          </a:p>
+          <a:p>
+            <a:pPr lvl="0"/>
+            <a:r>
+              <a:rPr b="1"/>
+              <a:t>Randomize</a:t>
+            </a:r>
+            <a:r>
+              <a:rPr/>
+              <a:t> which trees and branches you sample, so your own bias doesn’t sneak into the data.</a:t>
+            </a:r>
+          </a:p>
+          <a:p>
+            <a:pPr lvl="0" indent="0" marL="1270000">
+              <a:buNone/>
+            </a:pPr>
+            <a:r>
+              <a:rPr sz="2000" b="1"/>
+              <a:t>Important</a:t>
+            </a:r>
+          </a:p>
+          <a:p>
+            <a:pPr lvl="0" indent="0" marL="1270000">
+              <a:buNone/>
+            </a:pPr>
+            <a:r>
+              <a:rPr sz="2000" b="1"/>
+              <a:t>Dependent vs. independent variable</a:t>
+            </a:r>
+          </a:p>
+          <a:p>
+            <a:pPr lvl="0"/>
+            <a:r>
+              <a:rPr sz="2000" b="1"/>
+              <a:t>Independent (X):</a:t>
+            </a:r>
+            <a:r>
+              <a:rPr sz="2000"/>
+              <a:t> side of tree — what we group by</a:t>
+            </a:r>
+          </a:p>
+          <a:p>
+            <a:pPr lvl="0"/>
+            <a:r>
+              <a:rPr sz="2000" b="1"/>
+              <a:t>Dependent (Y):</a:t>
+            </a:r>
+            <a:r>
+              <a:rPr sz="2000"/>
+              <a:t> needle length — what we measure</a:t>
+            </a:r>
+          </a:p>
+        </p:txBody>
+      </p:sp>
+      <p:sp>
+        <p:nvSpPr>
+          <p:cNvPr id="4" name="Content Placeholder 3"/>
+          <p:cNvSpPr>
+            <a:spLocks noGrp="1"/>
+          </p:cNvSpPr>
+          <p:nvPr>
+            <p:ph idx="2" sz="half"/>
+          </p:nvPr>
+        </p:nvSpPr>
+        <p:spPr/>
+        <p:txBody>
+          <a:bodyPr/>
+          <a:lstStyle/>
+          <a:p>
+            <a:pPr lvl="0" indent="0" marL="1270000">
+              <a:buNone/>
+            </a:pPr>
+            <a:r>
+              <a:rPr sz="2000" b="1"/>
+              <a:t>Tip</a:t>
+            </a:r>
+          </a:p>
+          <a:p>
+            <a:pPr lvl="0" indent="0" marL="1270000">
+              <a:buNone/>
+            </a:pPr>
+            <a:r>
+              <a:rPr sz="2000" b="1"/>
+              <a:t>🖐 Today in the field</a:t>
+            </a:r>
+          </a:p>
+          <a:p>
+            <a:pPr lvl="0" indent="0" marL="1270000">
+              <a:buNone/>
+            </a:pPr>
+            <a:r>
+              <a:rPr sz="2000"/>
+              <a:t>Each group collects needles from the lee side </a:t>
+            </a:r>
+            <a:r>
+              <a:rPr sz="2000" b="1"/>
+              <a:t>and</a:t>
+            </a:r>
+            <a:r>
+              <a:rPr sz="2000"/>
+              <a:t> the windward side of the same trees, using one agreed-on method — same height, same “mature needle” definition, same spot on the branch.</a:t>
+            </a:r>
+          </a:p>
+        </p:txBody>
+      </p:sp>
+    </p:spTree>
+  </p:cSld>
+</p:sld>
+</file>
+
 <file path=ppt/slides/slide9.xml><?xml version="1.0" encoding="utf-8"?>
 <p:sld xmlns:a="http://schemas.openxmlformats.org/drawingml/2006/main" xmlns:r="http://schemas.openxmlformats.org/officeDocument/2006/relationships" xmlns:p="http://schemas.openxmlformats.org/presentationml/2006/main">
   <p:cSld>
@@ -9898,7 +9755,7 @@
             </a:pPr>
             <a:r>
               <a:rPr/>
-              <a:t>Designing a defensible sample</a:t>
+              <a:t>Part 2 · Organizing Your Project</a:t>
             </a:r>
           </a:p>
         </p:txBody>
@@ -9910,159 +9767,23 @@
             <a:spLocks noGrp="1"/>
           </p:cNvSpPr>
           <p:nvPr>
-            <p:ph idx="1" sz="half"/>
-          </p:nvPr>
-        </p:nvSpPr>
-        <p:spPr/>
-        <p:txBody>
-          <a:bodyPr/>
-          <a:lstStyle/>
-          <a:p>
-            <a:pPr lvl="0"/>
+            <p:ph idx="1"/>
+          </p:nvPr>
+        </p:nvSpPr>
+        <p:spPr/>
+        <p:txBody>
+          <a:bodyPr/>
+          <a:lstStyle/>
+          <a:p>
+            <a:pPr lvl="0" indent="0" marL="0">
+              <a:spcBef>
+                <a:spcPts val="3000"/>
+              </a:spcBef>
+              <a:buNone/>
+            </a:pPr>
             <a:r>
               <a:rPr b="1"/>
-              <a:t>Can we test this with needles from one tree?</a:t>
-            </a:r>
-            <a:r>
-              <a:rPr/>
-              <a:t> No — that tree could just happen to have short needles. Treating many needles from </a:t>
-            </a:r>
-            <a:r>
-              <a:rPr i="1"/>
-              <a:t>one</a:t>
-            </a:r>
-            <a:r>
-              <a:rPr/>
-              <a:t> tree as if they were independent replicates is called </a:t>
-            </a:r>
-            <a:r>
-              <a:rPr b="1"/>
-              <a:t>pseudoreplication</a:t>
-            </a:r>
-            <a:r>
-              <a:rPr/>
-              <a:t> (Hurlbert 1984).</a:t>
-            </a:r>
-          </a:p>
-          <a:p>
-            <a:pPr lvl="0"/>
-            <a:r>
-              <a:rPr b="1"/>
-              <a:t>The tree — not the needle — is the unit of replication.</a:t>
-            </a:r>
-            <a:r>
-              <a:rPr/>
-              <a:t> We need needles from </a:t>
-            </a:r>
-            <a:r>
-              <a:rPr i="1"/>
-              <a:t>many</a:t>
-            </a:r>
-            <a:r>
-              <a:rPr/>
-              <a:t> trees, sampled the same way each time.</a:t>
-            </a:r>
-          </a:p>
-          <a:p>
-            <a:pPr lvl="0"/>
-            <a:r>
-              <a:rPr b="1"/>
-              <a:t>Randomize</a:t>
-            </a:r>
-            <a:r>
-              <a:rPr/>
-              <a:t> which trees and branches you sample, so your own bias doesn’t sneak into the data.</a:t>
-            </a:r>
-          </a:p>
-          <a:p>
-            <a:pPr lvl="0" indent="0" marL="1270000">
-              <a:buNone/>
-            </a:pPr>
-            <a:r>
-              <a:rPr sz="2000" b="1"/>
-              <a:t>Important</a:t>
-            </a:r>
-          </a:p>
-          <a:p>
-            <a:pPr lvl="0" indent="0" marL="1270000">
-              <a:buNone/>
-            </a:pPr>
-            <a:r>
-              <a:rPr sz="2000" b="1"/>
-              <a:t>Dependent vs. independent variable</a:t>
-            </a:r>
-          </a:p>
-          <a:p>
-            <a:pPr lvl="0"/>
-            <a:r>
-              <a:rPr sz="2000" b="1"/>
-              <a:t>Independent (X):</a:t>
-            </a:r>
-            <a:r>
-              <a:rPr sz="2000"/>
-              <a:t> side of tree — what we group by</a:t>
-            </a:r>
-          </a:p>
-          <a:p>
-            <a:pPr lvl="0"/>
-            <a:r>
-              <a:rPr sz="2000" b="1"/>
-              <a:t>Dependent (Y):</a:t>
-            </a:r>
-            <a:r>
-              <a:rPr sz="2000"/>
-              <a:t> needle length — what we measure</a:t>
-            </a:r>
-          </a:p>
-        </p:txBody>
-      </p:sp>
-      <p:sp>
-        <p:nvSpPr>
-          <p:cNvPr id="4" name="Content Placeholder 3"/>
-          <p:cNvSpPr>
-            <a:spLocks noGrp="1"/>
-          </p:cNvSpPr>
-          <p:nvPr>
-            <p:ph idx="2" sz="half"/>
-          </p:nvPr>
-        </p:nvSpPr>
-        <p:spPr/>
-        <p:txBody>
-          <a:bodyPr/>
-          <a:lstStyle/>
-          <a:p>
-            <a:pPr lvl="0" indent="0" marL="1270000">
-              <a:buNone/>
-            </a:pPr>
-            <a:r>
-              <a:rPr sz="2000" b="1"/>
-              <a:t>Tip</a:t>
-            </a:r>
-          </a:p>
-          <a:p>
-            <a:pPr lvl="0" indent="0" marL="1270000">
-              <a:buNone/>
-            </a:pPr>
-            <a:r>
-              <a:rPr sz="2000" b="1"/>
-              <a:t>🖐 Today in the field</a:t>
-            </a:r>
-          </a:p>
-          <a:p>
-            <a:pPr lvl="0" indent="0" marL="1270000">
-              <a:buNone/>
-            </a:pPr>
-            <a:r>
-              <a:rPr sz="2000"/>
-              <a:t>Each group collects needles from the lee side </a:t>
-            </a:r>
-            <a:r>
-              <a:rPr sz="2000" b="1"/>
-              <a:t>and</a:t>
-            </a:r>
-            <a:r>
-              <a:rPr sz="2000"/>
-              <a:t> the windward side of the same trees, using one agreed-on method — same height, same “mature needle” definition, same spot on the branch.</a:t>
+              <a:t>Data is the raw material — treat it that way</a:t>
             </a:r>
           </a:p>
         </p:txBody>
